--- a/applications/ifad/documents/ifad_ppt.pptx
+++ b/applications/ifad/documents/ifad_ppt.pptx
@@ -3107,7 +3107,6 @@
         </p:nvPicPr>
         <p:blipFill>
           <a:blip r:embed="rId2"/>
-          <a:srcRect l="33" r="33"/>
           <a:stretch>
             <a:fillRect/>
           </a:stretch>
@@ -3130,8 +3129,8 @@
         </p:nvSpPr>
         <p:spPr>
           <a:xfrm>
-            <a:off x="0" y="3474720"/>
-            <a:ext cx="12191695" cy="3383280"/>
+            <a:off x="0" y="3657600"/>
+            <a:ext cx="12191695" cy="3200400"/>
           </a:xfrm>
           <a:prstGeom prst="rect">
             <a:avLst/>
@@ -3142,7 +3141,6 @@
           <a:ln>
             <a:noFill/>
           </a:ln>
-          <a:effectLst/>
         </p:spPr>
         <p:style>
           <a:lnRef idx="1">
@@ -3174,7 +3172,7 @@
         </p:nvSpPr>
         <p:spPr>
           <a:xfrm>
-            <a:off x="594360" y="3749040"/>
+            <a:off x="548640" y="3931920"/>
             <a:ext cx="10972800" cy="320040"/>
           </a:xfrm>
           <a:prstGeom prst="rect">
@@ -3183,16 +3181,12 @@
           <a:noFill/>
         </p:spPr>
         <p:txBody>
-          <a:bodyPr wrap="square" anchor="t">
+          <a:bodyPr wrap="square">
             <a:spAutoFit/>
           </a:bodyPr>
           <a:lstStyle/>
           <a:p>
-            <a:pPr algn="l">
-              <a:spcAft>
-                <a:spcPts val="0"/>
-              </a:spcAft>
-            </a:pPr>
+            <a:pPr algn="l"/>
             <a:r>
               <a:rPr sz="1300" b="1" i="0">
                 <a:solidFill>
@@ -3213,8 +3207,8 @@
         </p:nvSpPr>
         <p:spPr>
           <a:xfrm>
-            <a:off x="594360" y="4206240"/>
-            <a:ext cx="10972800" cy="640080"/>
+            <a:off x="548640" y="4389120"/>
+            <a:ext cx="10972800" cy="594360"/>
           </a:xfrm>
           <a:prstGeom prst="rect">
             <a:avLst/>
@@ -3222,24 +3216,20 @@
           <a:noFill/>
         </p:spPr>
         <p:txBody>
-          <a:bodyPr wrap="square" anchor="t">
+          <a:bodyPr wrap="square">
             <a:spAutoFit/>
           </a:bodyPr>
           <a:lstStyle/>
           <a:p>
-            <a:pPr algn="l">
-              <a:spcAft>
-                <a:spcPts val="0"/>
-              </a:spcAft>
-            </a:pPr>
-            <a:r>
-              <a:rPr sz="2600" b="1" i="0">
+            <a:pPr algn="l"/>
+            <a:r>
+              <a:rPr sz="2400" b="1" i="0">
                 <a:solidFill>
                   <a:srgbClr val="FFFFFF"/>
                 </a:solidFill>
                 <a:latin typeface="Calibri"/>
               </a:rPr>
-              <a:t>Health–Livelihood Intelligence for Rural Policy</a:t>
+              <a:t>Concept Note — Health–Livelihood Intelligence for Rural Policy</a:t>
             </a:r>
           </a:p>
         </p:txBody>
@@ -3252,7 +3242,7 @@
         </p:nvSpPr>
         <p:spPr>
           <a:xfrm>
-            <a:off x="594360" y="4983481"/>
+            <a:off x="548640" y="5166360"/>
             <a:ext cx="10972800" cy="365760"/>
           </a:xfrm>
           <a:prstGeom prst="rect">
@@ -3261,57 +3251,14 @@
           <a:noFill/>
         </p:spPr>
         <p:txBody>
-          <a:bodyPr wrap="square" anchor="t">
+          <a:bodyPr wrap="square">
             <a:spAutoFit/>
           </a:bodyPr>
           <a:lstStyle/>
           <a:p>
-            <a:pPr algn="l">
-              <a:spcAft>
-                <a:spcPts val="0"/>
-              </a:spcAft>
-            </a:pPr>
-            <a:r>
-              <a:rPr sz="1500" b="0" i="1">
-                <a:solidFill>
-                  <a:srgbClr val="F2C79B"/>
-                </a:solidFill>
-                <a:latin typeface="Calibri"/>
-              </a:rPr>
-              <a:t>Linking community health data to rural development performance</a:t>
-            </a:r>
-          </a:p>
-        </p:txBody>
-      </p:sp>
-      <p:sp>
-        <p:nvSpPr>
-          <p:cNvPr id="7" name="TextBox 6"/>
-          <p:cNvSpPr txBox="1"/>
-          <p:nvPr/>
-        </p:nvSpPr>
-        <p:spPr>
-          <a:xfrm>
-            <a:off x="594360" y="5532120"/>
-            <a:ext cx="10972800" cy="274320"/>
-          </a:xfrm>
-          <a:prstGeom prst="rect">
-            <a:avLst/>
-          </a:prstGeom>
-          <a:noFill/>
-        </p:spPr>
-        <p:txBody>
-          <a:bodyPr wrap="square" anchor="t">
-            <a:spAutoFit/>
-          </a:bodyPr>
-          <a:lstStyle/>
-          <a:p>
-            <a:pPr algn="l">
-              <a:spcAft>
-                <a:spcPts val="0"/>
-              </a:spcAft>
-            </a:pPr>
-            <a:r>
-              <a:rPr sz="1300" b="1" i="0">
+            <a:pPr algn="l"/>
+            <a:r>
+              <a:rPr sz="1400" b="1" i="0">
                 <a:solidFill>
                   <a:srgbClr val="FFFFFF"/>
                 </a:solidFill>
@@ -3324,14 +3271,14 @@
       </p:sp>
       <p:sp>
         <p:nvSpPr>
-          <p:cNvPr id="8" name="TextBox 7"/>
+          <p:cNvPr id="7" name="TextBox 6"/>
           <p:cNvSpPr txBox="1"/>
           <p:nvPr/>
         </p:nvSpPr>
         <p:spPr>
           <a:xfrm>
-            <a:off x="594360" y="5989320"/>
-            <a:ext cx="10972800" cy="365760"/>
+            <a:off x="548640" y="5760720"/>
+            <a:ext cx="10972800" cy="320040"/>
           </a:xfrm>
           <a:prstGeom prst="rect">
             <a:avLst/>
@@ -3339,24 +3286,20 @@
           <a:noFill/>
         </p:spPr>
         <p:txBody>
-          <a:bodyPr wrap="square" anchor="t">
+          <a:bodyPr wrap="square">
             <a:spAutoFit/>
           </a:bodyPr>
           <a:lstStyle/>
           <a:p>
-            <a:pPr algn="l">
-              <a:spcAft>
-                <a:spcPts val="0"/>
-              </a:spcAft>
-            </a:pPr>
-            <a:r>
-              <a:rPr sz="1200" b="0" i="0">
+            <a:pPr algn="l"/>
+            <a:r>
+              <a:rPr sz="1100" b="0" i="0">
                 <a:solidFill>
                   <a:srgbClr val="D0E8E8"/>
                 </a:solidFill>
                 <a:latin typeface="Calibri"/>
               </a:rPr>
-              <a:t>Consider FairBanks (and partners) for EOI and full proposal on health–livelihood policy intelligence.</a:t>
+              <a:t>Optional non-binding Expression of Interest by 31 July 2026 · Full proposal by 4 September 2026 (12:00 CET)</a:t>
             </a:r>
           </a:p>
         </p:txBody>
@@ -3389,7 +3332,6 @@
         </p:nvPicPr>
         <p:blipFill>
           <a:blip r:embed="rId2"/>
-          <a:srcRect t="7796" b="7796"/>
           <a:stretch>
             <a:fillRect/>
           </a:stretch>
@@ -3412,8 +3354,8 @@
         </p:nvSpPr>
         <p:spPr>
           <a:xfrm>
-            <a:off x="0" y="3657600"/>
-            <a:ext cx="12191695" cy="3200400"/>
+            <a:off x="0" y="4297680"/>
+            <a:ext cx="12191695" cy="2560320"/>
           </a:xfrm>
           <a:prstGeom prst="rect">
             <a:avLst/>
@@ -3424,7 +3366,6 @@
           <a:ln>
             <a:noFill/>
           </a:ln>
-          <a:effectLst/>
         </p:spPr>
         <p:style>
           <a:lnRef idx="1">
@@ -3456,8 +3397,8 @@
         </p:nvSpPr>
         <p:spPr>
           <a:xfrm>
-            <a:off x="594360" y="3931920"/>
-            <a:ext cx="10972800" cy="274320"/>
+            <a:off x="548640" y="4663440"/>
+            <a:ext cx="10972800" cy="502920"/>
           </a:xfrm>
           <a:prstGeom prst="rect">
             <a:avLst/>
@@ -3465,24 +3406,20 @@
           <a:noFill/>
         </p:spPr>
         <p:txBody>
-          <a:bodyPr wrap="square" anchor="t">
+          <a:bodyPr wrap="square">
             <a:spAutoFit/>
           </a:bodyPr>
           <a:lstStyle/>
           <a:p>
-            <a:pPr algn="l">
-              <a:spcAft>
-                <a:spcPts val="0"/>
-              </a:spcAft>
-            </a:pPr>
-            <a:r>
-              <a:rPr sz="1300" b="1" i="0">
-                <a:solidFill>
-                  <a:srgbClr val="14A3A3"/>
+            <a:pPr algn="l"/>
+            <a:r>
+              <a:rPr sz="2400" b="1" i="0">
+                <a:solidFill>
+                  <a:srgbClr val="FFFFFF"/>
                 </a:solidFill>
                 <a:latin typeface="Calibri"/>
               </a:rPr>
-              <a:t>The ask</a:t>
+              <a:t>EOI first — full proposal only where IFAD guidance confirms fit.</a:t>
             </a:r>
           </a:p>
         </p:txBody>
@@ -3495,8 +3432,8 @@
         </p:nvSpPr>
         <p:spPr>
           <a:xfrm>
-            <a:off x="594360" y="4389120"/>
-            <a:ext cx="10972800" cy="822960"/>
+            <a:off x="548640" y="5486400"/>
+            <a:ext cx="10972800" cy="320040"/>
           </a:xfrm>
           <a:prstGeom prst="rect">
             <a:avLst/>
@@ -3504,94 +3441,12 @@
           <a:noFill/>
         </p:spPr>
         <p:txBody>
-          <a:bodyPr wrap="square" anchor="t">
+          <a:bodyPr wrap="square">
             <a:spAutoFit/>
           </a:bodyPr>
           <a:lstStyle/>
           <a:p>
-            <a:pPr algn="l">
-              <a:spcAft>
-                <a:spcPts val="0"/>
-              </a:spcAft>
-            </a:pPr>
-            <a:r>
-              <a:rPr sz="2200" b="1" i="0">
-                <a:solidFill>
-                  <a:srgbClr val="FFFFFF"/>
-                </a:solidFill>
-                <a:latin typeface="Calibri"/>
-              </a:rPr>
-              <a:t>Consider FairBanks (and partners) for EOI and full proposal on health–livelihood policy intelligence.</a:t>
-            </a:r>
-          </a:p>
-        </p:txBody>
-      </p:sp>
-      <p:sp>
-        <p:nvSpPr>
-          <p:cNvPr id="6" name="TextBox 5"/>
-          <p:cNvSpPr txBox="1"/>
-          <p:nvPr/>
-        </p:nvSpPr>
-        <p:spPr>
-          <a:xfrm>
-            <a:off x="594360" y="5394960"/>
-            <a:ext cx="10972800" cy="365760"/>
-          </a:xfrm>
-          <a:prstGeom prst="rect">
-            <a:avLst/>
-          </a:prstGeom>
-          <a:noFill/>
-        </p:spPr>
-        <p:txBody>
-          <a:bodyPr wrap="square" anchor="t">
-            <a:spAutoFit/>
-          </a:bodyPr>
-          <a:lstStyle/>
-          <a:p>
-            <a:pPr algn="l">
-              <a:spcAft>
-                <a:spcPts val="0"/>
-              </a:spcAft>
-            </a:pPr>
-            <a:r>
-              <a:rPr sz="1400" b="0" i="1">
-                <a:solidFill>
-                  <a:srgbClr val="F2C79B"/>
-                </a:solidFill>
-                <a:latin typeface="Calibri"/>
-              </a:rPr>
-              <a:t>Linking community health data to rural development performance</a:t>
-            </a:r>
-          </a:p>
-        </p:txBody>
-      </p:sp>
-      <p:sp>
-        <p:nvSpPr>
-          <p:cNvPr id="7" name="TextBox 6"/>
-          <p:cNvSpPr txBox="1"/>
-          <p:nvPr/>
-        </p:nvSpPr>
-        <p:spPr>
-          <a:xfrm>
-            <a:off x="594360" y="5943600"/>
-            <a:ext cx="10972800" cy="320040"/>
-          </a:xfrm>
-          <a:prstGeom prst="rect">
-            <a:avLst/>
-          </a:prstGeom>
-          <a:noFill/>
-        </p:spPr>
-        <p:txBody>
-          <a:bodyPr wrap="square" anchor="t">
-            <a:spAutoFit/>
-          </a:bodyPr>
-          <a:lstStyle/>
-          <a:p>
-            <a:pPr algn="l">
-              <a:spcAft>
-                <a:spcPts val="0"/>
-              </a:spcAft>
-            </a:pPr>
+            <a:pPr algn="l"/>
             <a:r>
               <a:rPr sz="1400" b="1" i="0">
                 <a:solidFill>
@@ -3631,7 +3486,7 @@
         <p:spPr>
           <a:xfrm>
             <a:off x="0" y="0"/>
-            <a:ext cx="12191695" cy="960120"/>
+            <a:ext cx="12191695" cy="914400"/>
           </a:xfrm>
           <a:prstGeom prst="rect">
             <a:avLst/>
@@ -3642,7 +3497,6 @@
           <a:ln>
             <a:noFill/>
           </a:ln>
-          <a:effectLst/>
         </p:spPr>
         <p:style>
           <a:lnRef idx="1">
@@ -3675,7 +3529,7 @@
         <p:spPr>
           <a:xfrm>
             <a:off x="0" y="0"/>
-            <a:ext cx="164592" cy="960120"/>
+            <a:ext cx="137160" cy="914400"/>
           </a:xfrm>
           <a:prstGeom prst="rect">
             <a:avLst/>
@@ -3686,7 +3540,6 @@
           <a:ln>
             <a:noFill/>
           </a:ln>
-          <a:effectLst/>
         </p:spPr>
         <p:style>
           <a:lnRef idx="1">
@@ -3718,125 +3571,8 @@
         </p:nvSpPr>
         <p:spPr>
           <a:xfrm>
-            <a:off x="457200" y="109728"/>
-            <a:ext cx="10972800" cy="256032"/>
-          </a:xfrm>
-          <a:prstGeom prst="rect">
-            <a:avLst/>
-          </a:prstGeom>
-          <a:noFill/>
-        </p:spPr>
-        <p:txBody>
-          <a:bodyPr wrap="square" anchor="t">
-            <a:spAutoFit/>
-          </a:bodyPr>
-          <a:lstStyle/>
-          <a:p>
-            <a:pPr algn="l">
-              <a:spcAft>
-                <a:spcPts val="0"/>
-              </a:spcAft>
-            </a:pPr>
-            <a:r>
-              <a:rPr sz="1100" b="1" i="0">
-                <a:solidFill>
-                  <a:srgbClr val="C45C26"/>
-                </a:solidFill>
-                <a:latin typeface="Calibri"/>
-              </a:rPr>
-              <a:t>WIN-WIN</a:t>
-            </a:r>
-          </a:p>
-        </p:txBody>
-      </p:sp>
-      <p:sp>
-        <p:nvSpPr>
-          <p:cNvPr id="5" name="TextBox 4"/>
-          <p:cNvSpPr txBox="1"/>
-          <p:nvPr/>
-        </p:nvSpPr>
-        <p:spPr>
-          <a:xfrm>
-            <a:off x="457200" y="384048"/>
-            <a:ext cx="11247120" cy="475488"/>
-          </a:xfrm>
-          <a:prstGeom prst="rect">
-            <a:avLst/>
-          </a:prstGeom>
-          <a:noFill/>
-        </p:spPr>
-        <p:txBody>
-          <a:bodyPr wrap="square" anchor="t">
-            <a:spAutoFit/>
-          </a:bodyPr>
-          <a:lstStyle/>
-          <a:p>
-            <a:pPr algn="l">
-              <a:spcAft>
-                <a:spcPts val="0"/>
-              </a:spcAft>
-            </a:pPr>
-            <a:r>
-              <a:rPr sz="2200" b="1" i="0">
-                <a:solidFill>
-                  <a:srgbClr val="0A1F2E"/>
-                </a:solidFill>
-                <a:latin typeface="Calibri"/>
-              </a:rPr>
-              <a:t>Mutual value for FairBanks and the programme</a:t>
-            </a:r>
-          </a:p>
-        </p:txBody>
-      </p:sp>
-      <p:sp>
-        <p:nvSpPr>
-          <p:cNvPr id="6" name="TextBox 5"/>
-          <p:cNvSpPr txBox="1"/>
-          <p:nvPr/>
-        </p:nvSpPr>
-        <p:spPr>
-          <a:xfrm>
-            <a:off x="457200" y="1143000"/>
-            <a:ext cx="5486400" cy="320040"/>
-          </a:xfrm>
-          <a:prstGeom prst="rect">
-            <a:avLst/>
-          </a:prstGeom>
-          <a:noFill/>
-        </p:spPr>
-        <p:txBody>
-          <a:bodyPr wrap="square" anchor="t">
-            <a:spAutoFit/>
-          </a:bodyPr>
-          <a:lstStyle/>
-          <a:p>
-            <a:pPr algn="l">
-              <a:spcAft>
-                <a:spcPts val="0"/>
-              </a:spcAft>
-            </a:pPr>
-            <a:r>
-              <a:rPr sz="1600" b="1" i="0">
-                <a:solidFill>
-                  <a:srgbClr val="0D6E6E"/>
-                </a:solidFill>
-                <a:latin typeface="Calibri"/>
-              </a:rPr>
-              <a:t>What we gain</a:t>
-            </a:r>
-          </a:p>
-        </p:txBody>
-      </p:sp>
-      <p:sp>
-        <p:nvSpPr>
-          <p:cNvPr id="7" name="TextBox 6"/>
-          <p:cNvSpPr txBox="1"/>
-          <p:nvPr/>
-        </p:nvSpPr>
-        <p:spPr>
-          <a:xfrm>
-            <a:off x="457200" y="1508760"/>
-            <a:ext cx="5486400" cy="4800600"/>
+            <a:off x="411480" y="91440"/>
+            <a:ext cx="10972800" cy="274320"/>
           </a:xfrm>
           <a:prstGeom prst="rect">
             <a:avLst/>
@@ -3849,120 +3585,29 @@
           </a:bodyPr>
           <a:lstStyle/>
           <a:p>
-            <a:pPr>
-              <a:spcAft>
-                <a:spcPts val="800"/>
-              </a:spcAft>
-            </a:pPr>
-            <a:r>
-              <a:rPr sz="1300">
-                <a:solidFill>
-                  <a:srgbClr val="1E2F38"/>
+            <a:pPr algn="l"/>
+            <a:r>
+              <a:rPr sz="1100" b="1" i="0">
+                <a:solidFill>
+                  <a:srgbClr val="C45C26"/>
                 </a:solidFill>
                 <a:latin typeface="Calibri"/>
               </a:rPr>
-              <a:t>•  Resources to connect health intelligence with rural livelihood policy</a:t>
-            </a:r>
-          </a:p>
-          <a:p>
-            <a:pPr>
-              <a:spcAft>
-                <a:spcPts val="800"/>
-              </a:spcAft>
-            </a:pPr>
-            <a:r>
-              <a:rPr sz="1300">
-                <a:solidFill>
-                  <a:srgbClr val="1E2F38"/>
-                </a:solidFill>
-                <a:latin typeface="Calibri"/>
-              </a:rPr>
-              <a:t>•  Partnerships with universities / think tanks on rigorous assessment</a:t>
-            </a:r>
-          </a:p>
-          <a:p>
-            <a:pPr>
-              <a:spcAft>
-                <a:spcPts val="800"/>
-              </a:spcAft>
-            </a:pPr>
-            <a:r>
-              <a:rPr sz="1300">
-                <a:solidFill>
-                  <a:srgbClr val="1E2F38"/>
-                </a:solidFill>
-                <a:latin typeface="Calibri"/>
-              </a:rPr>
-              <a:t>•  Evidence that prevention protects income and food security</a:t>
-            </a:r>
-          </a:p>
-          <a:p>
-            <a:pPr>
-              <a:spcAft>
-                <a:spcPts val="800"/>
-              </a:spcAft>
-            </a:pPr>
-            <a:r>
-              <a:rPr sz="1300">
-                <a:solidFill>
-                  <a:srgbClr val="1E2F38"/>
-                </a:solidFill>
-                <a:latin typeface="Calibri"/>
-              </a:rPr>
-              <a:t>•  Optional EOI path to test fit early (31 July 2026)</a:t>
-            </a:r>
-          </a:p>
-        </p:txBody>
-      </p:sp>
-      <p:sp>
-        <p:nvSpPr>
-          <p:cNvPr id="8" name="TextBox 7"/>
+              <a:t>CONCEPT NOTE</a:t>
+            </a:r>
+          </a:p>
+        </p:txBody>
+      </p:sp>
+      <p:sp>
+        <p:nvSpPr>
+          <p:cNvPr id="5" name="TextBox 4"/>
           <p:cNvSpPr txBox="1"/>
           <p:nvPr/>
         </p:nvSpPr>
         <p:spPr>
           <a:xfrm>
-            <a:off x="6309360" y="1143000"/>
-            <a:ext cx="5486400" cy="320040"/>
-          </a:xfrm>
-          <a:prstGeom prst="rect">
-            <a:avLst/>
-          </a:prstGeom>
-          <a:noFill/>
-        </p:spPr>
-        <p:txBody>
-          <a:bodyPr wrap="square" anchor="t">
-            <a:spAutoFit/>
-          </a:bodyPr>
-          <a:lstStyle/>
-          <a:p>
-            <a:pPr algn="l">
-              <a:spcAft>
-                <a:spcPts val="0"/>
-              </a:spcAft>
-            </a:pPr>
-            <a:r>
-              <a:rPr sz="1600" b="1" i="0">
-                <a:solidFill>
-                  <a:srgbClr val="0D6E6E"/>
-                </a:solidFill>
-                <a:latin typeface="Calibri"/>
-              </a:rPr>
-              <a:t>What they gain</a:t>
-            </a:r>
-          </a:p>
-        </p:txBody>
-      </p:sp>
-      <p:sp>
-        <p:nvSpPr>
-          <p:cNvPr id="9" name="TextBox 8"/>
-          <p:cNvSpPr txBox="1"/>
-          <p:nvPr/>
-        </p:nvSpPr>
-        <p:spPr>
-          <a:xfrm>
-            <a:off x="6309360" y="1508760"/>
-            <a:ext cx="5394960" cy="4800600"/>
+            <a:off x="411480" y="384048"/>
+            <a:ext cx="10972800" cy="457200"/>
           </a:xfrm>
           <a:prstGeom prst="rect">
             <a:avLst/>
@@ -3975,81 +3620,90 @@
           </a:bodyPr>
           <a:lstStyle/>
           <a:p>
-            <a:pPr>
-              <a:spcAft>
-                <a:spcPts val="800"/>
-              </a:spcAft>
-            </a:pPr>
-            <a:r>
-              <a:rPr sz="1300">
-                <a:solidFill>
-                  <a:srgbClr val="1E2F38"/>
+            <a:pPr algn="l"/>
+            <a:r>
+              <a:rPr sz="2400" b="1" i="0">
+                <a:solidFill>
+                  <a:srgbClr val="0A1F2E"/>
                 </a:solidFill>
                 <a:latin typeface="Calibri"/>
               </a:rPr>
-              <a:t>•  Ground-level health and vulnerability data from community programmes</a:t>
-            </a:r>
-          </a:p>
-          <a:p>
-            <a:pPr>
-              <a:spcAft>
-                <a:spcPts val="800"/>
-              </a:spcAft>
-            </a:pPr>
-            <a:r>
-              <a:rPr sz="1300">
-                <a:solidFill>
-                  <a:srgbClr val="1E2F38"/>
+              <a:t>Health–livelihood intelligence for rural policy</a:t>
+            </a:r>
+          </a:p>
+        </p:txBody>
+      </p:sp>
+      <p:sp>
+        <p:nvSpPr>
+          <p:cNvPr id="6" name="TextBox 5"/>
+          <p:cNvSpPr txBox="1"/>
+          <p:nvPr/>
+        </p:nvSpPr>
+        <p:spPr>
+          <a:xfrm>
+            <a:off x="457200" y="1097280"/>
+            <a:ext cx="5669280" cy="5029200"/>
+          </a:xfrm>
+          <a:prstGeom prst="rect">
+            <a:avLst/>
+          </a:prstGeom>
+          <a:noFill/>
+        </p:spPr>
+        <p:txBody>
+          <a:bodyPr wrap="square">
+            <a:spAutoFit/>
+          </a:bodyPr>
+          <a:lstStyle/>
+          <a:p>
+            <a:pPr algn="l"/>
+            <a:r>
+              <a:rPr sz="1600" b="0" i="0">
+                <a:solidFill>
+                  <a:srgbClr val="3A4A54"/>
                 </a:solidFill>
                 <a:latin typeface="Calibri"/>
               </a:rPr>
-              <a:t>•  Private-sector / social enterprise implementer with field access</a:t>
-            </a:r>
-          </a:p>
-          <a:p>
-            <a:pPr>
-              <a:spcAft>
-                <a:spcPts val="800"/>
-              </a:spcAft>
-            </a:pPr>
-            <a:r>
-              <a:rPr sz="1300">
-                <a:solidFill>
-                  <a:srgbClr val="1E2F38"/>
-                </a:solidFill>
-                <a:latin typeface="Calibri"/>
-              </a:rPr>
-              <a:t>•  SDG-aligned story: health shocks as rural poverty drivers</a:t>
-            </a:r>
-          </a:p>
-          <a:p>
-            <a:pPr>
-              <a:spcAft>
-                <a:spcPts val="800"/>
-              </a:spcAft>
-            </a:pPr>
-            <a:r>
-              <a:rPr sz="1300">
-                <a:solidFill>
-                  <a:srgbClr val="1E2F38"/>
-                </a:solidFill>
-                <a:latin typeface="Calibri"/>
-              </a:rPr>
-              <a:t>•  Counterpart contribution potential via FairBanks operations (20–25%)</a:t>
-            </a:r>
-          </a:p>
-        </p:txBody>
-      </p:sp>
-      <p:sp>
-        <p:nvSpPr>
-          <p:cNvPr id="10" name="Rectangle 9"/>
+              <a:t>IFAD grant up to US$1.2M for Rural Sector Performance Assessment.
+FairBanks links health shocks to rural livelihoods through FCHIP and the community cascade.
+We proceed carefully — EOI first, full proposal only if thematic fit is confirmed.</a:t>
+            </a:r>
+          </a:p>
+        </p:txBody>
+      </p:sp>
+      <p:pic>
+        <p:nvPicPr>
+          <p:cNvPr id="7" name="Picture 6" descr="dashboard_demo_opt.jpg"/>
+          <p:cNvPicPr>
+            <a:picLocks noChangeAspect="1"/>
+          </p:cNvPicPr>
+          <p:nvPr/>
+        </p:nvPicPr>
+        <p:blipFill>
+          <a:blip r:embed="rId2"/>
+          <a:stretch>
+            <a:fillRect/>
+          </a:stretch>
+        </p:blipFill>
+        <p:spPr>
+          <a:xfrm>
+            <a:off x="6400800" y="1844040"/>
+            <a:ext cx="5303520" cy="3535680"/>
+          </a:xfrm>
+          <a:prstGeom prst="rect">
+            <a:avLst/>
+          </a:prstGeom>
+        </p:spPr>
+      </p:pic>
+      <p:sp>
+        <p:nvSpPr>
+          <p:cNvPr id="8" name="Rectangle 7"/>
           <p:cNvSpPr/>
           <p:nvPr/>
         </p:nvSpPr>
         <p:spPr>
           <a:xfrm>
-            <a:off x="0" y="6565392"/>
-            <a:ext cx="12191695" cy="292608"/>
+            <a:off x="0" y="6583680"/>
+            <a:ext cx="12191695" cy="274320"/>
           </a:xfrm>
           <a:prstGeom prst="rect">
             <a:avLst/>
@@ -4060,7 +3714,6 @@
           <a:ln>
             <a:noFill/>
           </a:ln>
-          <a:effectLst/>
         </p:spPr>
         <p:style>
           <a:lnRef idx="1">
@@ -4086,14 +3739,14 @@
       </p:sp>
       <p:sp>
         <p:nvSpPr>
-          <p:cNvPr id="11" name="TextBox 10"/>
+          <p:cNvPr id="9" name="TextBox 8"/>
           <p:cNvSpPr txBox="1"/>
           <p:nvPr/>
         </p:nvSpPr>
         <p:spPr>
           <a:xfrm>
-            <a:off x="365760" y="6574536"/>
-            <a:ext cx="9144000" cy="274320"/>
+            <a:off x="365760" y="6592824"/>
+            <a:ext cx="9144000" cy="256032"/>
           </a:xfrm>
           <a:prstGeom prst="rect">
             <a:avLst/>
@@ -4101,16 +3754,12 @@
           <a:noFill/>
         </p:spPr>
         <p:txBody>
-          <a:bodyPr wrap="square" anchor="ctr">
+          <a:bodyPr wrap="square">
             <a:spAutoFit/>
           </a:bodyPr>
           <a:lstStyle/>
           <a:p>
-            <a:pPr algn="l">
-              <a:spcAft>
-                <a:spcPts val="0"/>
-              </a:spcAft>
-            </a:pPr>
+            <a:pPr algn="l"/>
             <a:r>
               <a:rPr sz="900" b="0" i="0">
                 <a:solidFill>
@@ -4118,21 +3767,21 @@
                 </a:solidFill>
                 <a:latin typeface="Calibri"/>
               </a:rPr>
-              <a:t>FairBanks FCHIP  |  IFAD Grant — Rural Sector Performance As  |  Your health, our mission.</a:t>
-            </a:r>
-          </a:p>
-        </p:txBody>
-      </p:sp>
-      <p:sp>
-        <p:nvSpPr>
-          <p:cNvPr id="12" name="TextBox 11"/>
+              <a:t>FairBanks FCHIP | IFAD Rural Performance | Your health, our mission.</a:t>
+            </a:r>
+          </a:p>
+        </p:txBody>
+      </p:sp>
+      <p:sp>
+        <p:nvSpPr>
+          <p:cNvPr id="10" name="TextBox 9"/>
           <p:cNvSpPr txBox="1"/>
           <p:nvPr/>
         </p:nvSpPr>
         <p:spPr>
           <a:xfrm>
-            <a:off x="11094415" y="6574536"/>
-            <a:ext cx="731520" cy="274320"/>
+            <a:off x="11460175" y="6592824"/>
+            <a:ext cx="457200" cy="256032"/>
           </a:xfrm>
           <a:prstGeom prst="rect">
             <a:avLst/>
@@ -4140,16 +3789,12 @@
           <a:noFill/>
         </p:spPr>
         <p:txBody>
-          <a:bodyPr wrap="square" anchor="ctr">
+          <a:bodyPr wrap="square">
             <a:spAutoFit/>
           </a:bodyPr>
           <a:lstStyle/>
           <a:p>
-            <a:pPr algn="r">
-              <a:spcAft>
-                <a:spcPts val="0"/>
-              </a:spcAft>
-            </a:pPr>
+            <a:pPr algn="r"/>
             <a:r>
               <a:rPr sz="900" b="0" i="0">
                 <a:solidFill>
@@ -4189,7 +3834,7 @@
         <p:spPr>
           <a:xfrm>
             <a:off x="0" y="0"/>
-            <a:ext cx="12191695" cy="960120"/>
+            <a:ext cx="12191695" cy="914400"/>
           </a:xfrm>
           <a:prstGeom prst="rect">
             <a:avLst/>
@@ -4200,7 +3845,6 @@
           <a:ln>
             <a:noFill/>
           </a:ln>
-          <a:effectLst/>
         </p:spPr>
         <p:style>
           <a:lnRef idx="1">
@@ -4233,7 +3877,7 @@
         <p:spPr>
           <a:xfrm>
             <a:off x="0" y="0"/>
-            <a:ext cx="164592" cy="960120"/>
+            <a:ext cx="137160" cy="914400"/>
           </a:xfrm>
           <a:prstGeom prst="rect">
             <a:avLst/>
@@ -4244,7 +3888,6 @@
           <a:ln>
             <a:noFill/>
           </a:ln>
-          <a:effectLst/>
         </p:spPr>
         <p:style>
           <a:lnRef idx="1">
@@ -4276,8 +3919,8 @@
         </p:nvSpPr>
         <p:spPr>
           <a:xfrm>
-            <a:off x="457200" y="109728"/>
-            <a:ext cx="10972800" cy="256032"/>
+            <a:off x="411480" y="91440"/>
+            <a:ext cx="10972800" cy="274320"/>
           </a:xfrm>
           <a:prstGeom prst="rect">
             <a:avLst/>
@@ -4285,16 +3928,12 @@
           <a:noFill/>
         </p:spPr>
         <p:txBody>
-          <a:bodyPr wrap="square" anchor="t">
+          <a:bodyPr wrap="square">
             <a:spAutoFit/>
           </a:bodyPr>
           <a:lstStyle/>
           <a:p>
-            <a:pPr algn="l">
-              <a:spcAft>
-                <a:spcPts val="0"/>
-              </a:spcAft>
-            </a:pPr>
+            <a:pPr algn="l"/>
             <a:r>
               <a:rPr sz="1100" b="1" i="0">
                 <a:solidFill>
@@ -4302,7 +3941,7 @@
                 </a:solidFill>
                 <a:latin typeface="Calibri"/>
               </a:rPr>
-              <a:t>THE PROBLEM</a:t>
+              <a:t>THE GAP</a:t>
             </a:r>
           </a:p>
         </p:txBody>
@@ -4315,8 +3954,8 @@
         </p:nvSpPr>
         <p:spPr>
           <a:xfrm>
-            <a:off x="457200" y="384048"/>
-            <a:ext cx="11247120" cy="475488"/>
+            <a:off x="411480" y="384048"/>
+            <a:ext cx="10972800" cy="457200"/>
           </a:xfrm>
           <a:prstGeom prst="rect">
             <a:avLst/>
@@ -4324,31 +3963,27 @@
           <a:noFill/>
         </p:spPr>
         <p:txBody>
-          <a:bodyPr wrap="square" anchor="t">
+          <a:bodyPr wrap="square">
             <a:spAutoFit/>
           </a:bodyPr>
           <a:lstStyle/>
           <a:p>
-            <a:pPr algn="l">
-              <a:spcAft>
-                <a:spcPts val="0"/>
-              </a:spcAft>
-            </a:pPr>
-            <a:r>
-              <a:rPr sz="2200" b="1" i="0">
+            <a:pPr algn="l"/>
+            <a:r>
+              <a:rPr sz="2400" b="1" i="0">
                 <a:solidFill>
                   <a:srgbClr val="0A1F2E"/>
                 </a:solidFill>
                 <a:latin typeface="Calibri"/>
               </a:rPr>
-              <a:t>Health systems react too late</a:t>
+              <a:t>Health shocks wipe out rural household gains</a:t>
             </a:r>
           </a:p>
         </p:txBody>
       </p:sp>
       <p:pic>
         <p:nvPicPr>
-          <p:cNvPr id="6" name="Picture 5" descr="reactive_clinic_opt.jpg"/>
+          <p:cNvPr id="6" name="Picture 5" descr="bloom_maternal_health_participant_01_opt.jpg"/>
           <p:cNvPicPr>
             <a:picLocks noChangeAspect="1"/>
           </p:cNvPicPr>
@@ -4362,8 +3997,8 @@
         </p:blipFill>
         <p:spPr>
           <a:xfrm>
-            <a:off x="411480" y="2004691"/>
-            <a:ext cx="5303520" cy="3534417"/>
+            <a:off x="411480" y="1844040"/>
+            <a:ext cx="5303520" cy="3535680"/>
           </a:xfrm>
           <a:prstGeom prst="rect">
             <a:avLst/>
@@ -4378,8 +4013,8 @@
         </p:nvSpPr>
         <p:spPr>
           <a:xfrm>
-            <a:off x="6035040" y="1234440"/>
-            <a:ext cx="5669280" cy="5074920"/>
+            <a:off x="5943600" y="1097280"/>
+            <a:ext cx="5760720" cy="5029200"/>
           </a:xfrm>
           <a:prstGeom prst="rect">
             <a:avLst/>
@@ -4392,83 +4027,18 @@
           </a:bodyPr>
           <a:lstStyle/>
           <a:p>
-            <a:pPr>
-              <a:spcAft>
-                <a:spcPts val="800"/>
-              </a:spcAft>
-            </a:pPr>
-            <a:r>
-              <a:rPr sz="1400">
+            <a:pPr algn="l"/>
+            <a:r>
+              <a:rPr sz="1600" b="0" i="0">
                 <a:solidFill>
                   <a:srgbClr val="1E2F38"/>
                 </a:solidFill>
                 <a:latin typeface="Calibri"/>
               </a:rPr>
-              <a:t>•  Care often starts only after people fall sick</a:t>
-            </a:r>
-          </a:p>
-          <a:p>
-            <a:pPr>
-              <a:spcAft>
-                <a:spcPts val="800"/>
-              </a:spcAft>
-            </a:pPr>
-            <a:r>
-              <a:rPr sz="1400">
-                <a:solidFill>
-                  <a:srgbClr val="1E2F38"/>
-                </a:solidFill>
-                <a:latin typeface="Calibri"/>
-              </a:rPr>
-              <a:t>•  Community health data sits in paper registers and silos</a:t>
-            </a:r>
-          </a:p>
-          <a:p>
-            <a:pPr>
-              <a:spcAft>
-                <a:spcPts val="800"/>
-              </a:spcAft>
-            </a:pPr>
-            <a:r>
-              <a:rPr sz="1400">
-                <a:solidFill>
-                  <a:srgbClr val="1E2F38"/>
-                </a:solidFill>
-                <a:latin typeface="Calibri"/>
-              </a:rPr>
-              <a:t>•  High-risk pregnancies and NCDs are found too late</a:t>
-            </a:r>
-          </a:p>
-          <a:p>
-            <a:pPr>
-              <a:spcAft>
-                <a:spcPts val="800"/>
-              </a:spcAft>
-            </a:pPr>
-            <a:r>
-              <a:rPr sz="1400">
-                <a:solidFill>
-                  <a:srgbClr val="1E2F38"/>
-                </a:solidFill>
-                <a:latin typeface="Calibri"/>
-              </a:rPr>
-              <a:t>•  Medicine stock-outs hit hard during disease surges</a:t>
-            </a:r>
-          </a:p>
-          <a:p>
-            <a:pPr>
-              <a:spcAft>
-                <a:spcPts val="800"/>
-              </a:spcAft>
-            </a:pPr>
-            <a:r>
-              <a:rPr sz="1400">
-                <a:solidFill>
-                  <a:srgbClr val="1E2F38"/>
-                </a:solidFill>
-                <a:latin typeface="Calibri"/>
-              </a:rPr>
-              <a:t>•  Health shocks push poor families deeper into hardship</a:t>
+              <a:t>• Illness erases farm income and savings
+• Performance assessments under-weight health
+• Community data could make policy human-centred
+• Prevention protects livelihoods and food security</a:t>
             </a:r>
           </a:p>
         </p:txBody>
@@ -4481,8 +4051,8 @@
         </p:nvSpPr>
         <p:spPr>
           <a:xfrm>
-            <a:off x="0" y="6565392"/>
-            <a:ext cx="12191695" cy="292608"/>
+            <a:off x="0" y="6583680"/>
+            <a:ext cx="12191695" cy="274320"/>
           </a:xfrm>
           <a:prstGeom prst="rect">
             <a:avLst/>
@@ -4493,7 +4063,6 @@
           <a:ln>
             <a:noFill/>
           </a:ln>
-          <a:effectLst/>
         </p:spPr>
         <p:style>
           <a:lnRef idx="1">
@@ -4525,8 +4094,8 @@
         </p:nvSpPr>
         <p:spPr>
           <a:xfrm>
-            <a:off x="365760" y="6574536"/>
-            <a:ext cx="9144000" cy="274320"/>
+            <a:off x="365760" y="6592824"/>
+            <a:ext cx="9144000" cy="256032"/>
           </a:xfrm>
           <a:prstGeom prst="rect">
             <a:avLst/>
@@ -4534,16 +4103,12 @@
           <a:noFill/>
         </p:spPr>
         <p:txBody>
-          <a:bodyPr wrap="square" anchor="ctr">
+          <a:bodyPr wrap="square">
             <a:spAutoFit/>
           </a:bodyPr>
           <a:lstStyle/>
           <a:p>
-            <a:pPr algn="l">
-              <a:spcAft>
-                <a:spcPts val="0"/>
-              </a:spcAft>
-            </a:pPr>
+            <a:pPr algn="l"/>
             <a:r>
               <a:rPr sz="900" b="0" i="0">
                 <a:solidFill>
@@ -4551,7 +4116,7 @@
                 </a:solidFill>
                 <a:latin typeface="Calibri"/>
               </a:rPr>
-              <a:t>FairBanks FCHIP  |  IFAD Grant — Rural Sector Performance As  |  Your health, our mission.</a:t>
+              <a:t>FairBanks FCHIP | IFAD Rural Performance | Your health, our mission.</a:t>
             </a:r>
           </a:p>
         </p:txBody>
@@ -4564,8 +4129,8 @@
         </p:nvSpPr>
         <p:spPr>
           <a:xfrm>
-            <a:off x="11094415" y="6574536"/>
-            <a:ext cx="731520" cy="274320"/>
+            <a:off x="11460175" y="6592824"/>
+            <a:ext cx="457200" cy="256032"/>
           </a:xfrm>
           <a:prstGeom prst="rect">
             <a:avLst/>
@@ -4573,16 +4138,12 @@
           <a:noFill/>
         </p:spPr>
         <p:txBody>
-          <a:bodyPr wrap="square" anchor="ctr">
+          <a:bodyPr wrap="square">
             <a:spAutoFit/>
           </a:bodyPr>
           <a:lstStyle/>
           <a:p>
-            <a:pPr algn="r">
-              <a:spcAft>
-                <a:spcPts val="0"/>
-              </a:spcAft>
-            </a:pPr>
+            <a:pPr algn="r"/>
             <a:r>
               <a:rPr sz="900" b="0" i="0">
                 <a:solidFill>
@@ -4622,7 +4183,7 @@
         <p:spPr>
           <a:xfrm>
             <a:off x="0" y="0"/>
-            <a:ext cx="12191695" cy="960120"/>
+            <a:ext cx="12191695" cy="914400"/>
           </a:xfrm>
           <a:prstGeom prst="rect">
             <a:avLst/>
@@ -4633,7 +4194,6 @@
           <a:ln>
             <a:noFill/>
           </a:ln>
-          <a:effectLst/>
         </p:spPr>
         <p:style>
           <a:lnRef idx="1">
@@ -4666,7 +4226,7 @@
         <p:spPr>
           <a:xfrm>
             <a:off x="0" y="0"/>
-            <a:ext cx="164592" cy="960120"/>
+            <a:ext cx="137160" cy="914400"/>
           </a:xfrm>
           <a:prstGeom prst="rect">
             <a:avLst/>
@@ -4677,7 +4237,6 @@
           <a:ln>
             <a:noFill/>
           </a:ln>
-          <a:effectLst/>
         </p:spPr>
         <p:style>
           <a:lnRef idx="1">
@@ -4709,8 +4268,8 @@
         </p:nvSpPr>
         <p:spPr>
           <a:xfrm>
-            <a:off x="457200" y="109728"/>
-            <a:ext cx="10972800" cy="256032"/>
+            <a:off x="411480" y="91440"/>
+            <a:ext cx="10972800" cy="274320"/>
           </a:xfrm>
           <a:prstGeom prst="rect">
             <a:avLst/>
@@ -4718,16 +4277,12 @@
           <a:noFill/>
         </p:spPr>
         <p:txBody>
-          <a:bodyPr wrap="square" anchor="t">
+          <a:bodyPr wrap="square">
             <a:spAutoFit/>
           </a:bodyPr>
           <a:lstStyle/>
           <a:p>
-            <a:pPr algn="l">
-              <a:spcAft>
-                <a:spcPts val="0"/>
-              </a:spcAft>
-            </a:pPr>
+            <a:pPr algn="l"/>
             <a:r>
               <a:rPr sz="1100" b="1" i="0">
                 <a:solidFill>
@@ -4735,7 +4290,7 @@
                 </a:solidFill>
                 <a:latin typeface="Calibri"/>
               </a:rPr>
-              <a:t>THE SOLUTION</a:t>
+              <a:t>FCHIP LAYER</a:t>
             </a:r>
           </a:p>
         </p:txBody>
@@ -4748,8 +4303,8 @@
         </p:nvSpPr>
         <p:spPr>
           <a:xfrm>
-            <a:off x="457200" y="384048"/>
-            <a:ext cx="11247120" cy="475488"/>
+            <a:off x="411480" y="384048"/>
+            <a:ext cx="10972800" cy="457200"/>
           </a:xfrm>
           <a:prstGeom prst="rect">
             <a:avLst/>
@@ -4757,24 +4312,20 @@
           <a:noFill/>
         </p:spPr>
         <p:txBody>
-          <a:bodyPr wrap="square" anchor="t">
+          <a:bodyPr wrap="square">
             <a:spAutoFit/>
           </a:bodyPr>
           <a:lstStyle/>
           <a:p>
-            <a:pPr algn="l">
-              <a:spcAft>
-                <a:spcPts val="0"/>
-              </a:spcAft>
-            </a:pPr>
-            <a:r>
-              <a:rPr sz="2200" b="1" i="0">
+            <a:pPr algn="l"/>
+            <a:r>
+              <a:rPr sz="2400" b="1" i="0">
                 <a:solidFill>
                   <a:srgbClr val="0A1F2E"/>
                 </a:solidFill>
                 <a:latin typeface="Calibri"/>
               </a:rPr>
-              <a:t>FCHIP — community health intelligence</a:t>
+              <a:t>Community signals → rural performance dashboards</a:t>
             </a:r>
           </a:p>
         </p:txBody>
@@ -4795,7 +4346,7 @@
         </p:blipFill>
         <p:spPr>
           <a:xfrm>
-            <a:off x="365760" y="1639062"/>
+            <a:off x="365760" y="1479042"/>
             <a:ext cx="6400800" cy="4265676"/>
           </a:xfrm>
           <a:prstGeom prst="rect">
@@ -4811,8 +4362,8 @@
         </p:nvSpPr>
         <p:spPr>
           <a:xfrm>
-            <a:off x="7040880" y="1234440"/>
-            <a:ext cx="4754880" cy="5074920"/>
+            <a:off x="7040880" y="1097280"/>
+            <a:ext cx="4754880" cy="5029200"/>
           </a:xfrm>
           <a:prstGeom prst="rect">
             <a:avLst/>
@@ -4825,67 +4376,16 @@
           </a:bodyPr>
           <a:lstStyle/>
           <a:p>
-            <a:pPr>
-              <a:spcAft>
-                <a:spcPts val="800"/>
-              </a:spcAft>
-            </a:pPr>
-            <a:r>
-              <a:rPr sz="1400">
-                <a:solidFill>
-                  <a:srgbClr val="1E2F38"/>
+            <a:pPr algn="l"/>
+            <a:r>
+              <a:rPr sz="1500" b="0" i="0">
+                <a:solidFill>
+                  <a:srgbClr val="3A4A54"/>
                 </a:solidFill>
                 <a:latin typeface="Calibri"/>
               </a:rPr>
-              <a:t>•  CHWs and VHTs capture structured data at household level</a:t>
-            </a:r>
-          </a:p>
-          <a:p>
-            <a:pPr>
-              <a:spcAft>
-                <a:spcPts val="800"/>
-              </a:spcAft>
-            </a:pPr>
-            <a:r>
-              <a:rPr sz="1400">
-                <a:solidFill>
-                  <a:srgbClr val="1E2F38"/>
-                </a:solidFill>
-                <a:latin typeface="Calibri"/>
-              </a:rPr>
-              <a:t>•  FCHIP applies AI, ML, and GIS to predict risk early</a:t>
-            </a:r>
-          </a:p>
-          <a:p>
-            <a:pPr>
-              <a:spcAft>
-                <a:spcPts val="800"/>
-              </a:spcAft>
-            </a:pPr>
-            <a:r>
-              <a:rPr sz="1400">
-                <a:solidFill>
-                  <a:srgbClr val="1E2F38"/>
-                </a:solidFill>
-                <a:latin typeface="Calibri"/>
-              </a:rPr>
-              <a:t>•  Alerts reach clinics, districts, and partners in time to act</a:t>
-            </a:r>
-          </a:p>
-          <a:p>
-            <a:pPr>
-              <a:spcAft>
-                <a:spcPts val="800"/>
-              </a:spcAft>
-            </a:pPr>
-            <a:r>
-              <a:rPr sz="1400">
-                <a:solidFill>
-                  <a:srgbClr val="1E2F38"/>
-                </a:solidFill>
-                <a:latin typeface="Calibri"/>
-              </a:rPr>
-              <a:t>•  Built on a live medical centre and community programmes</a:t>
+              <a:t>CHWs → outreach → clinic → research → empowerment.
+FCHIP adds illness clusters, maternal risk, missed care, and stock-out signals for policy briefs and investment priorities.</a:t>
             </a:r>
           </a:p>
         </p:txBody>
@@ -4898,8 +4398,8 @@
         </p:nvSpPr>
         <p:spPr>
           <a:xfrm>
-            <a:off x="0" y="6565392"/>
-            <a:ext cx="12191695" cy="292608"/>
+            <a:off x="0" y="6583680"/>
+            <a:ext cx="12191695" cy="274320"/>
           </a:xfrm>
           <a:prstGeom prst="rect">
             <a:avLst/>
@@ -4910,7 +4410,6 @@
           <a:ln>
             <a:noFill/>
           </a:ln>
-          <a:effectLst/>
         </p:spPr>
         <p:style>
           <a:lnRef idx="1">
@@ -4942,8 +4441,8 @@
         </p:nvSpPr>
         <p:spPr>
           <a:xfrm>
-            <a:off x="365760" y="6574536"/>
-            <a:ext cx="9144000" cy="274320"/>
+            <a:off x="365760" y="6592824"/>
+            <a:ext cx="9144000" cy="256032"/>
           </a:xfrm>
           <a:prstGeom prst="rect">
             <a:avLst/>
@@ -4951,16 +4450,12 @@
           <a:noFill/>
         </p:spPr>
         <p:txBody>
-          <a:bodyPr wrap="square" anchor="ctr">
+          <a:bodyPr wrap="square">
             <a:spAutoFit/>
           </a:bodyPr>
           <a:lstStyle/>
           <a:p>
-            <a:pPr algn="l">
-              <a:spcAft>
-                <a:spcPts val="0"/>
-              </a:spcAft>
-            </a:pPr>
+            <a:pPr algn="l"/>
             <a:r>
               <a:rPr sz="900" b="0" i="0">
                 <a:solidFill>
@@ -4968,7 +4463,7 @@
                 </a:solidFill>
                 <a:latin typeface="Calibri"/>
               </a:rPr>
-              <a:t>FairBanks FCHIP  |  IFAD Grant — Rural Sector Performance As  |  Your health, our mission.</a:t>
+              <a:t>FairBanks FCHIP | IFAD Rural Performance | Your health, our mission.</a:t>
             </a:r>
           </a:p>
         </p:txBody>
@@ -4981,8 +4476,8 @@
         </p:nvSpPr>
         <p:spPr>
           <a:xfrm>
-            <a:off x="11094415" y="6574536"/>
-            <a:ext cx="731520" cy="274320"/>
+            <a:off x="11460175" y="6592824"/>
+            <a:ext cx="457200" cy="256032"/>
           </a:xfrm>
           <a:prstGeom prst="rect">
             <a:avLst/>
@@ -4990,16 +4485,12 @@
           <a:noFill/>
         </p:spPr>
         <p:txBody>
-          <a:bodyPr wrap="square" anchor="ctr">
+          <a:bodyPr wrap="square">
             <a:spAutoFit/>
           </a:bodyPr>
           <a:lstStyle/>
           <a:p>
-            <a:pPr algn="r">
-              <a:spcAft>
-                <a:spcPts val="0"/>
-              </a:spcAft>
-            </a:pPr>
+            <a:pPr algn="r"/>
             <a:r>
               <a:rPr sz="900" b="0" i="0">
                 <a:solidFill>
@@ -5039,7 +4530,7 @@
         <p:spPr>
           <a:xfrm>
             <a:off x="0" y="0"/>
-            <a:ext cx="12191695" cy="960120"/>
+            <a:ext cx="12191695" cy="914400"/>
           </a:xfrm>
           <a:prstGeom prst="rect">
             <a:avLst/>
@@ -5050,7 +4541,6 @@
           <a:ln>
             <a:noFill/>
           </a:ln>
-          <a:effectLst/>
         </p:spPr>
         <p:style>
           <a:lnRef idx="1">
@@ -5083,7 +4573,7 @@
         <p:spPr>
           <a:xfrm>
             <a:off x="0" y="0"/>
-            <a:ext cx="164592" cy="960120"/>
+            <a:ext cx="137160" cy="914400"/>
           </a:xfrm>
           <a:prstGeom prst="rect">
             <a:avLst/>
@@ -5094,7 +4584,6 @@
           <a:ln>
             <a:noFill/>
           </a:ln>
-          <a:effectLst/>
         </p:spPr>
         <p:style>
           <a:lnRef idx="1">
@@ -5126,8 +4615,8 @@
         </p:nvSpPr>
         <p:spPr>
           <a:xfrm>
-            <a:off x="457200" y="109728"/>
-            <a:ext cx="10972800" cy="256032"/>
+            <a:off x="411480" y="91440"/>
+            <a:ext cx="10972800" cy="274320"/>
           </a:xfrm>
           <a:prstGeom prst="rect">
             <a:avLst/>
@@ -5135,16 +4624,12 @@
           <a:noFill/>
         </p:spPr>
         <p:txBody>
-          <a:bodyPr wrap="square" anchor="t">
+          <a:bodyPr wrap="square">
             <a:spAutoFit/>
           </a:bodyPr>
           <a:lstStyle/>
           <a:p>
-            <a:pPr algn="l">
-              <a:spcAft>
-                <a:spcPts val="0"/>
-              </a:spcAft>
-            </a:pPr>
+            <a:pPr algn="l"/>
             <a:r>
               <a:rPr sz="1100" b="1" i="0">
                 <a:solidFill>
@@ -5152,7 +4637,7 @@
                 </a:solidFill>
                 <a:latin typeface="Calibri"/>
               </a:rPr>
-              <a:t>PROGRAMME FIT</a:t>
+              <a:t>WORKSTREAMS</a:t>
             </a:r>
           </a:p>
         </p:txBody>
@@ -5165,8 +4650,8 @@
         </p:nvSpPr>
         <p:spPr>
           <a:xfrm>
-            <a:off x="457200" y="384048"/>
-            <a:ext cx="11247120" cy="475488"/>
+            <a:off x="411480" y="384048"/>
+            <a:ext cx="10972800" cy="457200"/>
           </a:xfrm>
           <a:prstGeom prst="rect">
             <a:avLst/>
@@ -5174,24 +4659,20 @@
           <a:noFill/>
         </p:spPr>
         <p:txBody>
-          <a:bodyPr wrap="square" anchor="t">
+          <a:bodyPr wrap="square">
             <a:spAutoFit/>
           </a:bodyPr>
           <a:lstStyle/>
           <a:p>
-            <a:pPr algn="l">
-              <a:spcAft>
-                <a:spcPts val="0"/>
-              </a:spcAft>
-            </a:pPr>
-            <a:r>
-              <a:rPr sz="2200" b="1" i="0">
+            <a:pPr algn="l"/>
+            <a:r>
+              <a:rPr sz="2400" b="1" i="0">
                 <a:solidFill>
                   <a:srgbClr val="0A1F2E"/>
                 </a:solidFill>
                 <a:latin typeface="Calibri"/>
               </a:rPr>
-              <a:t>Why this call matches FCHIP</a:t>
+              <a:t>What we would implement with partners</a:t>
             </a:r>
           </a:p>
         </p:txBody>
@@ -5204,8 +4685,8 @@
         </p:nvSpPr>
         <p:spPr>
           <a:xfrm>
-            <a:off x="411480" y="1188720"/>
-            <a:ext cx="11338560" cy="1223010"/>
+            <a:off x="457200" y="1143000"/>
+            <a:ext cx="11155680" cy="914400"/>
           </a:xfrm>
           <a:prstGeom prst="rect">
             <a:avLst/>
@@ -5213,12 +4694,11 @@
           <a:solidFill>
             <a:srgbClr val="FFFFFF"/>
           </a:solidFill>
-          <a:ln w="9525">
+          <a:ln>
             <a:solidFill>
               <a:srgbClr val="D0DCDC"/>
             </a:solidFill>
           </a:ln>
-          <a:effectLst/>
         </p:spPr>
         <p:style>
           <a:lnRef idx="1">
@@ -5244,105 +4724,24 @@
       </p:sp>
       <p:sp>
         <p:nvSpPr>
-          <p:cNvPr id="7" name="TextBox 6"/>
-          <p:cNvSpPr txBox="1"/>
-          <p:nvPr/>
-        </p:nvSpPr>
-        <p:spPr>
-          <a:xfrm>
-            <a:off x="594360" y="1252728"/>
-            <a:ext cx="2926080" cy="1085850"/>
-          </a:xfrm>
-          <a:prstGeom prst="rect">
-            <a:avLst/>
-          </a:prstGeom>
-          <a:noFill/>
-        </p:spPr>
-        <p:txBody>
-          <a:bodyPr wrap="square" anchor="ctr">
-            <a:spAutoFit/>
-          </a:bodyPr>
-          <a:lstStyle/>
-          <a:p>
-            <a:pPr algn="l">
-              <a:spcAft>
-                <a:spcPts val="0"/>
-              </a:spcAft>
-            </a:pPr>
-            <a:r>
-              <a:rPr sz="1300" b="1" i="0">
-                <a:solidFill>
-                  <a:srgbClr val="0D6E6E"/>
-                </a:solidFill>
-                <a:latin typeface="Calibri"/>
-              </a:rPr>
-              <a:t>Rural Sector Performance Assessment</a:t>
-            </a:r>
-          </a:p>
-        </p:txBody>
-      </p:sp>
-      <p:sp>
-        <p:nvSpPr>
-          <p:cNvPr id="8" name="TextBox 7"/>
-          <p:cNvSpPr txBox="1"/>
-          <p:nvPr/>
-        </p:nvSpPr>
-        <p:spPr>
-          <a:xfrm>
-            <a:off x="3657600" y="1252728"/>
-            <a:ext cx="7772400" cy="1085850"/>
-          </a:xfrm>
-          <a:prstGeom prst="rect">
-            <a:avLst/>
-          </a:prstGeom>
-          <a:noFill/>
-        </p:spPr>
-        <p:txBody>
-          <a:bodyPr wrap="square" anchor="ctr">
-            <a:spAutoFit/>
-          </a:bodyPr>
-          <a:lstStyle/>
-          <a:p>
-            <a:pPr algn="l">
-              <a:spcAft>
-                <a:spcPts val="0"/>
-              </a:spcAft>
-            </a:pPr>
-            <a:r>
-              <a:rPr sz="1200" b="0" i="0">
-                <a:solidFill>
-                  <a:srgbClr val="3A4A54"/>
-                </a:solidFill>
-                <a:latin typeface="Calibri"/>
-              </a:rPr>
-              <a:t>Add health–livelihood intelligence layer</a:t>
-            </a:r>
-          </a:p>
-        </p:txBody>
-      </p:sp>
-      <p:sp>
-        <p:nvSpPr>
-          <p:cNvPr id="9" name="Rectangle 8"/>
+          <p:cNvPr id="7" name="Rectangle 6"/>
           <p:cNvSpPr/>
           <p:nvPr/>
         </p:nvSpPr>
         <p:spPr>
           <a:xfrm>
-            <a:off x="411480" y="2503170"/>
-            <a:ext cx="11338560" cy="1223010"/>
+            <a:off x="457200" y="1143000"/>
+            <a:ext cx="109728" cy="914400"/>
           </a:xfrm>
           <a:prstGeom prst="rect">
             <a:avLst/>
           </a:prstGeom>
           <a:solidFill>
-            <a:srgbClr val="FFFFFF"/>
+            <a:srgbClr val="0D6E6E"/>
           </a:solidFill>
-          <a:ln w="9525">
-            <a:solidFill>
-              <a:srgbClr val="D0DCDC"/>
-            </a:solidFill>
+          <a:ln>
+            <a:noFill/>
           </a:ln>
-          <a:effectLst/>
         </p:spPr>
         <p:style>
           <a:lnRef idx="1">
@@ -5368,14 +4767,14 @@
       </p:sp>
       <p:sp>
         <p:nvSpPr>
-          <p:cNvPr id="10" name="TextBox 9"/>
+          <p:cNvPr id="8" name="TextBox 7"/>
           <p:cNvSpPr txBox="1"/>
           <p:nvPr/>
         </p:nvSpPr>
         <p:spPr>
           <a:xfrm>
-            <a:off x="594360" y="2567178"/>
-            <a:ext cx="2926080" cy="1085850"/>
+            <a:off x="685800" y="1280160"/>
+            <a:ext cx="10515600" cy="640080"/>
           </a:xfrm>
           <a:prstGeom prst="rect">
             <a:avLst/>
@@ -5383,77 +4782,34 @@
           <a:noFill/>
         </p:spPr>
         <p:txBody>
-          <a:bodyPr wrap="square" anchor="ctr">
+          <a:bodyPr wrap="square">
             <a:spAutoFit/>
           </a:bodyPr>
           <a:lstStyle/>
           <a:p>
-            <a:pPr algn="l">
-              <a:spcAft>
-                <a:spcPts val="0"/>
-              </a:spcAft>
-            </a:pPr>
-            <a:r>
-              <a:rPr sz="1300" b="1" i="0">
-                <a:solidFill>
-                  <a:srgbClr val="0D6E6E"/>
+            <a:pPr algn="l"/>
+            <a:r>
+              <a:rPr sz="1400" b="0" i="0">
+                <a:solidFill>
+                  <a:srgbClr val="1E2F38"/>
                 </a:solidFill>
                 <a:latin typeface="Calibri"/>
               </a:rPr>
-              <a:t>Eligible entity types</a:t>
-            </a:r>
-          </a:p>
-        </p:txBody>
-      </p:sp>
-      <p:sp>
-        <p:nvSpPr>
-          <p:cNvPr id="11" name="TextBox 10"/>
-          <p:cNvSpPr txBox="1"/>
-          <p:nvPr/>
-        </p:nvSpPr>
-        <p:spPr>
-          <a:xfrm>
-            <a:off x="3657600" y="2567178"/>
-            <a:ext cx="7772400" cy="1085850"/>
-          </a:xfrm>
-          <a:prstGeom prst="rect">
-            <a:avLst/>
-          </a:prstGeom>
-          <a:noFill/>
-        </p:spPr>
-        <p:txBody>
-          <a:bodyPr wrap="square" anchor="ctr">
-            <a:spAutoFit/>
-          </a:bodyPr>
-          <a:lstStyle/>
-          <a:p>
-            <a:pPr algn="l">
-              <a:spcAft>
-                <a:spcPts val="0"/>
-              </a:spcAft>
-            </a:pPr>
-            <a:r>
-              <a:rPr sz="1200" b="0" i="0">
-                <a:solidFill>
-                  <a:srgbClr val="3A4A54"/>
-                </a:solidFill>
-                <a:latin typeface="Calibri"/>
-              </a:rPr>
-              <a:t>Social enterprise + research partners</a:t>
-            </a:r>
-          </a:p>
-        </p:txBody>
-      </p:sp>
-      <p:sp>
-        <p:nvSpPr>
-          <p:cNvPr id="12" name="Rectangle 11"/>
+              <a:t>Health-shock markers linked to livelihood stress in rural performance dashboards</a:t>
+            </a:r>
+          </a:p>
+        </p:txBody>
+      </p:sp>
+      <p:sp>
+        <p:nvSpPr>
+          <p:cNvPr id="9" name="Rectangle 8"/>
           <p:cNvSpPr/>
           <p:nvPr/>
         </p:nvSpPr>
         <p:spPr>
           <a:xfrm>
-            <a:off x="411480" y="3817620"/>
-            <a:ext cx="11338560" cy="1223010"/>
+            <a:off x="457200" y="2194560"/>
+            <a:ext cx="11155680" cy="914400"/>
           </a:xfrm>
           <a:prstGeom prst="rect">
             <a:avLst/>
@@ -5461,12 +4817,11 @@
           <a:solidFill>
             <a:srgbClr val="FFFFFF"/>
           </a:solidFill>
-          <a:ln w="9525">
+          <a:ln>
             <a:solidFill>
               <a:srgbClr val="D0DCDC"/>
             </a:solidFill>
           </a:ln>
-          <a:effectLst/>
         </p:spPr>
         <p:style>
           <a:lnRef idx="1">
@@ -5492,105 +4847,24 @@
       </p:sp>
       <p:sp>
         <p:nvSpPr>
-          <p:cNvPr id="13" name="TextBox 12"/>
-          <p:cNvSpPr txBox="1"/>
-          <p:nvPr/>
-        </p:nvSpPr>
-        <p:spPr>
-          <a:xfrm>
-            <a:off x="594360" y="3881628"/>
-            <a:ext cx="2926080" cy="1085850"/>
-          </a:xfrm>
-          <a:prstGeom prst="rect">
-            <a:avLst/>
-          </a:prstGeom>
-          <a:noFill/>
-        </p:spPr>
-        <p:txBody>
-          <a:bodyPr wrap="square" anchor="ctr">
-            <a:spAutoFit/>
-          </a:bodyPr>
-          <a:lstStyle/>
-          <a:p>
-            <a:pPr algn="l">
-              <a:spcAft>
-                <a:spcPts val="0"/>
-              </a:spcAft>
-            </a:pPr>
-            <a:r>
-              <a:rPr sz="1300" b="1" i="0">
-                <a:solidFill>
-                  <a:srgbClr val="0D6E6E"/>
-                </a:solidFill>
-                <a:latin typeface="Calibri"/>
-              </a:rPr>
-              <a:t>Counterpart 20–25%</a:t>
-            </a:r>
-          </a:p>
-        </p:txBody>
-      </p:sp>
-      <p:sp>
-        <p:nvSpPr>
-          <p:cNvPr id="14" name="TextBox 13"/>
-          <p:cNvSpPr txBox="1"/>
-          <p:nvPr/>
-        </p:nvSpPr>
-        <p:spPr>
-          <a:xfrm>
-            <a:off x="3657600" y="3881628"/>
-            <a:ext cx="7772400" cy="1085850"/>
-          </a:xfrm>
-          <a:prstGeom prst="rect">
-            <a:avLst/>
-          </a:prstGeom>
-          <a:noFill/>
-        </p:spPr>
-        <p:txBody>
-          <a:bodyPr wrap="square" anchor="ctr">
-            <a:spAutoFit/>
-          </a:bodyPr>
-          <a:lstStyle/>
-          <a:p>
-            <a:pPr algn="l">
-              <a:spcAft>
-                <a:spcPts val="0"/>
-              </a:spcAft>
-            </a:pPr>
-            <a:r>
-              <a:rPr sz="1200" b="0" i="0">
-                <a:solidFill>
-                  <a:srgbClr val="3A4A54"/>
-                </a:solidFill>
-                <a:latin typeface="Calibri"/>
-              </a:rPr>
-              <a:t>In-kind operations and staff time</a:t>
-            </a:r>
-          </a:p>
-        </p:txBody>
-      </p:sp>
-      <p:sp>
-        <p:nvSpPr>
-          <p:cNvPr id="15" name="Rectangle 14"/>
+          <p:cNvPr id="10" name="Rectangle 9"/>
           <p:cNvSpPr/>
           <p:nvPr/>
         </p:nvSpPr>
         <p:spPr>
           <a:xfrm>
-            <a:off x="411480" y="5132070"/>
-            <a:ext cx="11338560" cy="1223010"/>
+            <a:off x="457200" y="2194560"/>
+            <a:ext cx="109728" cy="914400"/>
           </a:xfrm>
           <a:prstGeom prst="rect">
             <a:avLst/>
           </a:prstGeom>
           <a:solidFill>
-            <a:srgbClr val="FFFFFF"/>
+            <a:srgbClr val="0D6E6E"/>
           </a:solidFill>
-          <a:ln w="9525">
-            <a:solidFill>
-              <a:srgbClr val="D0DCDC"/>
-            </a:solidFill>
+          <a:ln>
+            <a:noFill/>
           </a:ln>
-          <a:effectLst/>
         </p:spPr>
         <p:style>
           <a:lnRef idx="1">
@@ -5616,14 +4890,14 @@
       </p:sp>
       <p:sp>
         <p:nvSpPr>
-          <p:cNvPr id="16" name="TextBox 15"/>
+          <p:cNvPr id="11" name="TextBox 10"/>
           <p:cNvSpPr txBox="1"/>
           <p:nvPr/>
         </p:nvSpPr>
         <p:spPr>
           <a:xfrm>
-            <a:off x="594360" y="5196078"/>
-            <a:ext cx="2926080" cy="1085850"/>
+            <a:off x="685800" y="2331720"/>
+            <a:ext cx="10515600" cy="640080"/>
           </a:xfrm>
           <a:prstGeom prst="rect">
             <a:avLst/>
@@ -5631,25 +4905,232 @@
           <a:noFill/>
         </p:spPr>
         <p:txBody>
-          <a:bodyPr wrap="square" anchor="ctr">
+          <a:bodyPr wrap="square">
             <a:spAutoFit/>
           </a:bodyPr>
           <a:lstStyle/>
           <a:p>
-            <a:pPr algn="l">
-              <a:spcAft>
-                <a:spcPts val="0"/>
-              </a:spcAft>
-            </a:pPr>
-            <a:r>
-              <a:rPr sz="1300" b="1" i="0">
-                <a:solidFill>
-                  <a:srgbClr val="0D6E6E"/>
+            <a:pPr algn="l"/>
+            <a:r>
+              <a:rPr sz="1400" b="0" i="0">
+                <a:solidFill>
+                  <a:srgbClr val="1E2F38"/>
                 </a:solidFill>
                 <a:latin typeface="Calibri"/>
               </a:rPr>
-              <a:t>Verify thematic match</a:t>
-            </a:r>
+              <a:t>Community-generated indicators from CHW outreach and clinic encounters</a:t>
+            </a:r>
+          </a:p>
+        </p:txBody>
+      </p:sp>
+      <p:sp>
+        <p:nvSpPr>
+          <p:cNvPr id="12" name="Rectangle 11"/>
+          <p:cNvSpPr/>
+          <p:nvPr/>
+        </p:nvSpPr>
+        <p:spPr>
+          <a:xfrm>
+            <a:off x="457200" y="3246120"/>
+            <a:ext cx="11155680" cy="914400"/>
+          </a:xfrm>
+          <a:prstGeom prst="rect">
+            <a:avLst/>
+          </a:prstGeom>
+          <a:solidFill>
+            <a:srgbClr val="FFFFFF"/>
+          </a:solidFill>
+          <a:ln>
+            <a:solidFill>
+              <a:srgbClr val="D0DCDC"/>
+            </a:solidFill>
+          </a:ln>
+        </p:spPr>
+        <p:style>
+          <a:lnRef idx="1">
+            <a:schemeClr val="accent1"/>
+          </a:lnRef>
+          <a:fillRef idx="3">
+            <a:schemeClr val="accent1"/>
+          </a:fillRef>
+          <a:effectRef idx="2">
+            <a:schemeClr val="accent1"/>
+          </a:effectRef>
+          <a:fontRef idx="minor">
+            <a:schemeClr val="lt1"/>
+          </a:fontRef>
+        </p:style>
+        <p:txBody>
+          <a:bodyPr rtlCol="0" anchor="ctr"/>
+          <a:lstStyle/>
+          <a:p>
+            <a:pPr algn="ctr"/>
+          </a:p>
+        </p:txBody>
+      </p:sp>
+      <p:sp>
+        <p:nvSpPr>
+          <p:cNvPr id="13" name="Rectangle 12"/>
+          <p:cNvSpPr/>
+          <p:nvPr/>
+        </p:nvSpPr>
+        <p:spPr>
+          <a:xfrm>
+            <a:off x="457200" y="3246120"/>
+            <a:ext cx="109728" cy="914400"/>
+          </a:xfrm>
+          <a:prstGeom prst="rect">
+            <a:avLst/>
+          </a:prstGeom>
+          <a:solidFill>
+            <a:srgbClr val="0D6E6E"/>
+          </a:solidFill>
+          <a:ln>
+            <a:noFill/>
+          </a:ln>
+        </p:spPr>
+        <p:style>
+          <a:lnRef idx="1">
+            <a:schemeClr val="accent1"/>
+          </a:lnRef>
+          <a:fillRef idx="3">
+            <a:schemeClr val="accent1"/>
+          </a:fillRef>
+          <a:effectRef idx="2">
+            <a:schemeClr val="accent1"/>
+          </a:effectRef>
+          <a:fontRef idx="minor">
+            <a:schemeClr val="lt1"/>
+          </a:fontRef>
+        </p:style>
+        <p:txBody>
+          <a:bodyPr rtlCol="0" anchor="ctr"/>
+          <a:lstStyle/>
+          <a:p>
+            <a:pPr algn="ctr"/>
+          </a:p>
+        </p:txBody>
+      </p:sp>
+      <p:sp>
+        <p:nvSpPr>
+          <p:cNvPr id="14" name="TextBox 13"/>
+          <p:cNvSpPr txBox="1"/>
+          <p:nvPr/>
+        </p:nvSpPr>
+        <p:spPr>
+          <a:xfrm>
+            <a:off x="685800" y="3383280"/>
+            <a:ext cx="10515600" cy="640080"/>
+          </a:xfrm>
+          <a:prstGeom prst="rect">
+            <a:avLst/>
+          </a:prstGeom>
+          <a:noFill/>
+        </p:spPr>
+        <p:txBody>
+          <a:bodyPr wrap="square">
+            <a:spAutoFit/>
+          </a:bodyPr>
+          <a:lstStyle/>
+          <a:p>
+            <a:pPr algn="l"/>
+            <a:r>
+              <a:rPr sz="1400" b="0" i="0">
+                <a:solidFill>
+                  <a:srgbClr val="1E2F38"/>
+                </a:solidFill>
+                <a:latin typeface="Calibri"/>
+              </a:rPr>
+              <a:t>Policy briefs translating FCHIP signals into rural investment priorities</a:t>
+            </a:r>
+          </a:p>
+        </p:txBody>
+      </p:sp>
+      <p:sp>
+        <p:nvSpPr>
+          <p:cNvPr id="15" name="Rectangle 14"/>
+          <p:cNvSpPr/>
+          <p:nvPr/>
+        </p:nvSpPr>
+        <p:spPr>
+          <a:xfrm>
+            <a:off x="457200" y="4297680"/>
+            <a:ext cx="11155680" cy="914400"/>
+          </a:xfrm>
+          <a:prstGeom prst="rect">
+            <a:avLst/>
+          </a:prstGeom>
+          <a:solidFill>
+            <a:srgbClr val="FFFFFF"/>
+          </a:solidFill>
+          <a:ln>
+            <a:solidFill>
+              <a:srgbClr val="D0DCDC"/>
+            </a:solidFill>
+          </a:ln>
+        </p:spPr>
+        <p:style>
+          <a:lnRef idx="1">
+            <a:schemeClr val="accent1"/>
+          </a:lnRef>
+          <a:fillRef idx="3">
+            <a:schemeClr val="accent1"/>
+          </a:fillRef>
+          <a:effectRef idx="2">
+            <a:schemeClr val="accent1"/>
+          </a:effectRef>
+          <a:fontRef idx="minor">
+            <a:schemeClr val="lt1"/>
+          </a:fontRef>
+        </p:style>
+        <p:txBody>
+          <a:bodyPr rtlCol="0" anchor="ctr"/>
+          <a:lstStyle/>
+          <a:p>
+            <a:pPr algn="ctr"/>
+          </a:p>
+        </p:txBody>
+      </p:sp>
+      <p:sp>
+        <p:nvSpPr>
+          <p:cNvPr id="16" name="Rectangle 15"/>
+          <p:cNvSpPr/>
+          <p:nvPr/>
+        </p:nvSpPr>
+        <p:spPr>
+          <a:xfrm>
+            <a:off x="457200" y="4297680"/>
+            <a:ext cx="109728" cy="914400"/>
+          </a:xfrm>
+          <a:prstGeom prst="rect">
+            <a:avLst/>
+          </a:prstGeom>
+          <a:solidFill>
+            <a:srgbClr val="0D6E6E"/>
+          </a:solidFill>
+          <a:ln>
+            <a:noFill/>
+          </a:ln>
+        </p:spPr>
+        <p:style>
+          <a:lnRef idx="1">
+            <a:schemeClr val="accent1"/>
+          </a:lnRef>
+          <a:fillRef idx="3">
+            <a:schemeClr val="accent1"/>
+          </a:fillRef>
+          <a:effectRef idx="2">
+            <a:schemeClr val="accent1"/>
+          </a:effectRef>
+          <a:fontRef idx="minor">
+            <a:schemeClr val="lt1"/>
+          </a:fontRef>
+        </p:style>
+        <p:txBody>
+          <a:bodyPr rtlCol="0" anchor="ctr"/>
+          <a:lstStyle/>
+          <a:p>
+            <a:pPr algn="ctr"/>
           </a:p>
         </p:txBody>
       </p:sp>
@@ -5661,8 +5142,8 @@
         </p:nvSpPr>
         <p:spPr>
           <a:xfrm>
-            <a:off x="3657600" y="5196078"/>
-            <a:ext cx="7772400" cy="1085850"/>
+            <a:off x="685800" y="4434840"/>
+            <a:ext cx="10515600" cy="640080"/>
           </a:xfrm>
           <a:prstGeom prst="rect">
             <a:avLst/>
@@ -5670,24 +5151,20 @@
           <a:noFill/>
         </p:spPr>
         <p:txBody>
-          <a:bodyPr wrap="square" anchor="ctr">
+          <a:bodyPr wrap="square">
             <a:spAutoFit/>
           </a:bodyPr>
           <a:lstStyle/>
           <a:p>
-            <a:pPr algn="l">
-              <a:spcAft>
-                <a:spcPts val="0"/>
-              </a:spcAft>
-            </a:pPr>
-            <a:r>
-              <a:rPr sz="1200" b="0" i="0">
-                <a:solidFill>
-                  <a:srgbClr val="3A4A54"/>
+            <a:pPr algn="l"/>
+            <a:r>
+              <a:rPr sz="1400" b="0" i="0">
+                <a:solidFill>
+                  <a:srgbClr val="1E2F38"/>
                 </a:solidFill>
                 <a:latin typeface="Calibri"/>
               </a:rPr>
-              <a:t>EOI first; full proposal only if guidance confirms fit</a:t>
+              <a:t>Partner-led evaluation design with academic / think-tank co-authorship</a:t>
             </a:r>
           </a:p>
         </p:txBody>
@@ -5700,8 +5177,8 @@
         </p:nvSpPr>
         <p:spPr>
           <a:xfrm>
-            <a:off x="0" y="6565392"/>
-            <a:ext cx="12191695" cy="292608"/>
+            <a:off x="0" y="6583680"/>
+            <a:ext cx="12191695" cy="274320"/>
           </a:xfrm>
           <a:prstGeom prst="rect">
             <a:avLst/>
@@ -5712,7 +5189,6 @@
           <a:ln>
             <a:noFill/>
           </a:ln>
-          <a:effectLst/>
         </p:spPr>
         <p:style>
           <a:lnRef idx="1">
@@ -5744,8 +5220,8 @@
         </p:nvSpPr>
         <p:spPr>
           <a:xfrm>
-            <a:off x="365760" y="6574536"/>
-            <a:ext cx="9144000" cy="274320"/>
+            <a:off x="365760" y="6592824"/>
+            <a:ext cx="9144000" cy="256032"/>
           </a:xfrm>
           <a:prstGeom prst="rect">
             <a:avLst/>
@@ -5753,16 +5229,12 @@
           <a:noFill/>
         </p:spPr>
         <p:txBody>
-          <a:bodyPr wrap="square" anchor="ctr">
+          <a:bodyPr wrap="square">
             <a:spAutoFit/>
           </a:bodyPr>
           <a:lstStyle/>
           <a:p>
-            <a:pPr algn="l">
-              <a:spcAft>
-                <a:spcPts val="0"/>
-              </a:spcAft>
-            </a:pPr>
+            <a:pPr algn="l"/>
             <a:r>
               <a:rPr sz="900" b="0" i="0">
                 <a:solidFill>
@@ -5770,7 +5242,7 @@
                 </a:solidFill>
                 <a:latin typeface="Calibri"/>
               </a:rPr>
-              <a:t>FairBanks FCHIP  |  IFAD Grant — Rural Sector Performance As  |  Your health, our mission.</a:t>
+              <a:t>FairBanks FCHIP | IFAD Rural Performance | Your health, our mission.</a:t>
             </a:r>
           </a:p>
         </p:txBody>
@@ -5783,8 +5255,8 @@
         </p:nvSpPr>
         <p:spPr>
           <a:xfrm>
-            <a:off x="11094415" y="6574536"/>
-            <a:ext cx="731520" cy="274320"/>
+            <a:off x="11460175" y="6592824"/>
+            <a:ext cx="457200" cy="256032"/>
           </a:xfrm>
           <a:prstGeom prst="rect">
             <a:avLst/>
@@ -5792,16 +5264,12 @@
           <a:noFill/>
         </p:spPr>
         <p:txBody>
-          <a:bodyPr wrap="square" anchor="ctr">
+          <a:bodyPr wrap="square">
             <a:spAutoFit/>
           </a:bodyPr>
           <a:lstStyle/>
           <a:p>
-            <a:pPr algn="r">
-              <a:spcAft>
-                <a:spcPts val="0"/>
-              </a:spcAft>
-            </a:pPr>
+            <a:pPr algn="r"/>
             <a:r>
               <a:rPr sz="900" b="0" i="0">
                 <a:solidFill>
@@ -5841,7 +5309,7 @@
         <p:spPr>
           <a:xfrm>
             <a:off x="0" y="0"/>
-            <a:ext cx="12191695" cy="960120"/>
+            <a:ext cx="12191695" cy="914400"/>
           </a:xfrm>
           <a:prstGeom prst="rect">
             <a:avLst/>
@@ -5852,7 +5320,6 @@
           <a:ln>
             <a:noFill/>
           </a:ln>
-          <a:effectLst/>
         </p:spPr>
         <p:style>
           <a:lnRef idx="1">
@@ -5885,7 +5352,7 @@
         <p:spPr>
           <a:xfrm>
             <a:off x="0" y="0"/>
-            <a:ext cx="164592" cy="960120"/>
+            <a:ext cx="137160" cy="914400"/>
           </a:xfrm>
           <a:prstGeom prst="rect">
             <a:avLst/>
@@ -5896,7 +5363,6 @@
           <a:ln>
             <a:noFill/>
           </a:ln>
-          <a:effectLst/>
         </p:spPr>
         <p:style>
           <a:lnRef idx="1">
@@ -5928,8 +5394,8 @@
         </p:nvSpPr>
         <p:spPr>
           <a:xfrm>
-            <a:off x="457200" y="109728"/>
-            <a:ext cx="10972800" cy="256032"/>
+            <a:off x="411480" y="91440"/>
+            <a:ext cx="10972800" cy="274320"/>
           </a:xfrm>
           <a:prstGeom prst="rect">
             <a:avLst/>
@@ -5937,16 +5403,12 @@
           <a:noFill/>
         </p:spPr>
         <p:txBody>
-          <a:bodyPr wrap="square" anchor="t">
+          <a:bodyPr wrap="square">
             <a:spAutoFit/>
           </a:bodyPr>
           <a:lstStyle/>
           <a:p>
-            <a:pPr algn="l">
-              <a:spcAft>
-                <a:spcPts val="0"/>
-              </a:spcAft>
-            </a:pPr>
+            <a:pPr algn="l"/>
             <a:r>
               <a:rPr sz="1100" b="1" i="0">
                 <a:solidFill>
@@ -5954,7 +5416,7 @@
                 </a:solidFill>
                 <a:latin typeface="Calibri"/>
               </a:rPr>
-              <a:t>WHY FAIRBANKS</a:t>
+              <a:t>COUNTERPART</a:t>
             </a:r>
           </a:p>
         </p:txBody>
@@ -5967,8 +5429,8 @@
         </p:nvSpPr>
         <p:spPr>
           <a:xfrm>
-            <a:off x="457200" y="384048"/>
-            <a:ext cx="11247120" cy="475488"/>
+            <a:off x="411480" y="384048"/>
+            <a:ext cx="10972800" cy="457200"/>
           </a:xfrm>
           <a:prstGeom prst="rect">
             <a:avLst/>
@@ -5976,31 +5438,66 @@
           <a:noFill/>
         </p:spPr>
         <p:txBody>
-          <a:bodyPr wrap="square" anchor="t">
+          <a:bodyPr wrap="square">
             <a:spAutoFit/>
           </a:bodyPr>
           <a:lstStyle/>
           <a:p>
-            <a:pPr algn="l">
-              <a:spcAft>
-                <a:spcPts val="0"/>
-              </a:spcAft>
-            </a:pPr>
-            <a:r>
-              <a:rPr sz="2200" b="1" i="0">
+            <a:pPr algn="l"/>
+            <a:r>
+              <a:rPr sz="2400" b="1" i="0">
                 <a:solidFill>
                   <a:srgbClr val="0A1F2E"/>
                 </a:solidFill>
                 <a:latin typeface="Calibri"/>
               </a:rPr>
-              <a:t>A live community health ecosystem</a:t>
+              <a:t>20–25% in-kind from FairBanks operations</a:t>
+            </a:r>
+          </a:p>
+        </p:txBody>
+      </p:sp>
+      <p:sp>
+        <p:nvSpPr>
+          <p:cNvPr id="6" name="TextBox 5"/>
+          <p:cNvSpPr txBox="1"/>
+          <p:nvPr/>
+        </p:nvSpPr>
+        <p:spPr>
+          <a:xfrm>
+            <a:off x="457200" y="1097280"/>
+            <a:ext cx="5486400" cy="5029200"/>
+          </a:xfrm>
+          <a:prstGeom prst="rect">
+            <a:avLst/>
+          </a:prstGeom>
+          <a:noFill/>
+        </p:spPr>
+        <p:txBody>
+          <a:bodyPr wrap="square">
+            <a:spAutoFit/>
+          </a:bodyPr>
+          <a:lstStyle/>
+          <a:p>
+            <a:pPr algn="l"/>
+            <a:r>
+              <a:rPr sz="1600" b="0" i="0">
+                <a:solidFill>
+                  <a:srgbClr val="1E2F38"/>
+                </a:solidFill>
+                <a:latin typeface="Calibri"/>
+              </a:rPr>
+              <a:t>FairBanks meets IFAD counterpart through:
+• Field operations and CHW supervision
+• Outreach infrastructure and staff time
+• Data stewardship and existing digital foundations
+• Partner university / think tank for research design</a:t>
             </a:r>
           </a:p>
         </p:txBody>
       </p:sp>
       <p:pic>
         <p:nvPicPr>
-          <p:cNvPr id="6" name="Picture 5" descr="outreach_facilitator_canopy_01_opt.jpg"/>
+          <p:cNvPr id="7" name="Picture 6" descr="outreach_mobile_phone_demo_01_opt.jpg"/>
           <p:cNvPicPr>
             <a:picLocks noChangeAspect="1"/>
           </p:cNvPicPr>
@@ -6014,133 +5511,14 @@
         </p:blipFill>
         <p:spPr>
           <a:xfrm>
-            <a:off x="411480" y="1943753"/>
-            <a:ext cx="5486400" cy="3656293"/>
+            <a:off x="6400800" y="1844040"/>
+            <a:ext cx="5303520" cy="3535680"/>
           </a:xfrm>
           <a:prstGeom prst="rect">
             <a:avLst/>
           </a:prstGeom>
         </p:spPr>
       </p:pic>
-      <p:sp>
-        <p:nvSpPr>
-          <p:cNvPr id="7" name="TextBox 6"/>
-          <p:cNvSpPr txBox="1"/>
-          <p:nvPr/>
-        </p:nvSpPr>
-        <p:spPr>
-          <a:xfrm>
-            <a:off x="6217920" y="1234440"/>
-            <a:ext cx="5486400" cy="5074920"/>
-          </a:xfrm>
-          <a:prstGeom prst="rect">
-            <a:avLst/>
-          </a:prstGeom>
-          <a:noFill/>
-        </p:spPr>
-        <p:txBody>
-          <a:bodyPr wrap="square">
-            <a:spAutoFit/>
-          </a:bodyPr>
-          <a:lstStyle/>
-          <a:p>
-            <a:pPr>
-              <a:spcAft>
-                <a:spcPts val="800"/>
-              </a:spcAft>
-            </a:pPr>
-            <a:r>
-              <a:rPr sz="1400">
-                <a:solidFill>
-                  <a:srgbClr val="1E2F38"/>
-                </a:solidFill>
-                <a:latin typeface="Calibri"/>
-              </a:rPr>
-              <a:t>•  Functioning FairBanks Medical Centre with clinic, pharmacy, and diagnostics</a:t>
-            </a:r>
-          </a:p>
-          <a:p>
-            <a:pPr>
-              <a:spcAft>
-                <a:spcPts val="800"/>
-              </a:spcAft>
-            </a:pPr>
-            <a:r>
-              <a:rPr sz="1400">
-                <a:solidFill>
-                  <a:srgbClr val="1E2F38"/>
-                </a:solidFill>
-                <a:latin typeface="Calibri"/>
-              </a:rPr>
-              <a:t>•  Active Community Reach outreach in Bukoto, Kyebando, Kisaasi, Kamwokya, Kikaaya</a:t>
-            </a:r>
-          </a:p>
-          <a:p>
-            <a:pPr>
-              <a:spcAft>
-                <a:spcPts val="800"/>
-              </a:spcAft>
-            </a:pPr>
-            <a:r>
-              <a:rPr sz="1400">
-                <a:solidFill>
-                  <a:srgbClr val="1E2F38"/>
-                </a:solidFill>
-                <a:latin typeface="Calibri"/>
-              </a:rPr>
-              <a:t>•  Trusted CHW and VHT relationships for household visits and referrals</a:t>
-            </a:r>
-          </a:p>
-          <a:p>
-            <a:pPr>
-              <a:spcAft>
-                <a:spcPts val="800"/>
-              </a:spcAft>
-            </a:pPr>
-            <a:r>
-              <a:rPr sz="1400">
-                <a:solidFill>
-                  <a:srgbClr val="1E2F38"/>
-                </a:solidFill>
-                <a:latin typeface="Calibri"/>
-              </a:rPr>
-              <a:t>•  Live programmes: maternal &amp; child health, Gericare, chronic-disease screening</a:t>
-            </a:r>
-          </a:p>
-          <a:p>
-            <a:pPr>
-              <a:spcAft>
-                <a:spcPts val="800"/>
-              </a:spcAft>
-            </a:pPr>
-            <a:r>
-              <a:rPr sz="1400">
-                <a:solidFill>
-                  <a:srgbClr val="1E2F38"/>
-                </a:solidFill>
-                <a:latin typeface="Calibri"/>
-              </a:rPr>
-              <a:t>•  Digital health records and outreach data ready to feed FCHIP</a:t>
-            </a:r>
-          </a:p>
-          <a:p>
-            <a:pPr>
-              <a:spcAft>
-                <a:spcPts val="800"/>
-              </a:spcAft>
-            </a:pPr>
-            <a:r>
-              <a:rPr sz="1400">
-                <a:solidFill>
-                  <a:srgbClr val="1E2F38"/>
-                </a:solidFill>
-                <a:latin typeface="Calibri"/>
-              </a:rPr>
-              <a:t>•  Research and partnership mindset for ethical, evidence-based scale</a:t>
-            </a:r>
-          </a:p>
-        </p:txBody>
-      </p:sp>
       <p:sp>
         <p:nvSpPr>
           <p:cNvPr id="8" name="Rectangle 7"/>
@@ -6149,8 +5527,8 @@
         </p:nvSpPr>
         <p:spPr>
           <a:xfrm>
-            <a:off x="0" y="6565392"/>
-            <a:ext cx="12191695" cy="292608"/>
+            <a:off x="0" y="6583680"/>
+            <a:ext cx="12191695" cy="274320"/>
           </a:xfrm>
           <a:prstGeom prst="rect">
             <a:avLst/>
@@ -6161,7 +5539,6 @@
           <a:ln>
             <a:noFill/>
           </a:ln>
-          <a:effectLst/>
         </p:spPr>
         <p:style>
           <a:lnRef idx="1">
@@ -6193,8 +5570,8 @@
         </p:nvSpPr>
         <p:spPr>
           <a:xfrm>
-            <a:off x="365760" y="6574536"/>
-            <a:ext cx="9144000" cy="274320"/>
+            <a:off x="365760" y="6592824"/>
+            <a:ext cx="9144000" cy="256032"/>
           </a:xfrm>
           <a:prstGeom prst="rect">
             <a:avLst/>
@@ -6202,16 +5579,12 @@
           <a:noFill/>
         </p:spPr>
         <p:txBody>
-          <a:bodyPr wrap="square" anchor="ctr">
+          <a:bodyPr wrap="square">
             <a:spAutoFit/>
           </a:bodyPr>
           <a:lstStyle/>
           <a:p>
-            <a:pPr algn="l">
-              <a:spcAft>
-                <a:spcPts val="0"/>
-              </a:spcAft>
-            </a:pPr>
+            <a:pPr algn="l"/>
             <a:r>
               <a:rPr sz="900" b="0" i="0">
                 <a:solidFill>
@@ -6219,7 +5592,7 @@
                 </a:solidFill>
                 <a:latin typeface="Calibri"/>
               </a:rPr>
-              <a:t>FairBanks FCHIP  |  IFAD Grant — Rural Sector Performance As  |  Your health, our mission.</a:t>
+              <a:t>FairBanks FCHIP | IFAD Rural Performance | Your health, our mission.</a:t>
             </a:r>
           </a:p>
         </p:txBody>
@@ -6232,8 +5605,8 @@
         </p:nvSpPr>
         <p:spPr>
           <a:xfrm>
-            <a:off x="11094415" y="6574536"/>
-            <a:ext cx="731520" cy="274320"/>
+            <a:off x="11460175" y="6592824"/>
+            <a:ext cx="457200" cy="256032"/>
           </a:xfrm>
           <a:prstGeom prst="rect">
             <a:avLst/>
@@ -6241,16 +5614,12 @@
           <a:noFill/>
         </p:spPr>
         <p:txBody>
-          <a:bodyPr wrap="square" anchor="ctr">
+          <a:bodyPr wrap="square">
             <a:spAutoFit/>
           </a:bodyPr>
           <a:lstStyle/>
           <a:p>
-            <a:pPr algn="r">
-              <a:spcAft>
-                <a:spcPts val="0"/>
-              </a:spcAft>
-            </a:pPr>
+            <a:pPr algn="r"/>
             <a:r>
               <a:rPr sz="900" b="0" i="0">
                 <a:solidFill>
@@ -6290,7 +5659,7 @@
         <p:spPr>
           <a:xfrm>
             <a:off x="0" y="0"/>
-            <a:ext cx="12191695" cy="960120"/>
+            <a:ext cx="12191695" cy="914400"/>
           </a:xfrm>
           <a:prstGeom prst="rect">
             <a:avLst/>
@@ -6301,7 +5670,6 @@
           <a:ln>
             <a:noFill/>
           </a:ln>
-          <a:effectLst/>
         </p:spPr>
         <p:style>
           <a:lnRef idx="1">
@@ -6334,7 +5702,7 @@
         <p:spPr>
           <a:xfrm>
             <a:off x="0" y="0"/>
-            <a:ext cx="164592" cy="960120"/>
+            <a:ext cx="137160" cy="914400"/>
           </a:xfrm>
           <a:prstGeom prst="rect">
             <a:avLst/>
@@ -6345,7 +5713,6 @@
           <a:ln>
             <a:noFill/>
           </a:ln>
-          <a:effectLst/>
         </p:spPr>
         <p:style>
           <a:lnRef idx="1">
@@ -6377,86 +5744,8 @@
         </p:nvSpPr>
         <p:spPr>
           <a:xfrm>
-            <a:off x="457200" y="109728"/>
-            <a:ext cx="10972800" cy="256032"/>
-          </a:xfrm>
-          <a:prstGeom prst="rect">
-            <a:avLst/>
-          </a:prstGeom>
-          <a:noFill/>
-        </p:spPr>
-        <p:txBody>
-          <a:bodyPr wrap="square" anchor="t">
-            <a:spAutoFit/>
-          </a:bodyPr>
-          <a:lstStyle/>
-          <a:p>
-            <a:pPr algn="l">
-              <a:spcAft>
-                <a:spcPts val="0"/>
-              </a:spcAft>
-            </a:pPr>
-            <a:r>
-              <a:rPr sz="1100" b="1" i="0">
-                <a:solidFill>
-                  <a:srgbClr val="C45C26"/>
-                </a:solidFill>
-                <a:latin typeface="Calibri"/>
-              </a:rPr>
-              <a:t>THE PLAN</a:t>
-            </a:r>
-          </a:p>
-        </p:txBody>
-      </p:sp>
-      <p:sp>
-        <p:nvSpPr>
-          <p:cNvPr id="5" name="TextBox 4"/>
-          <p:cNvSpPr txBox="1"/>
-          <p:nvPr/>
-        </p:nvSpPr>
-        <p:spPr>
-          <a:xfrm>
-            <a:off x="457200" y="384048"/>
-            <a:ext cx="11247120" cy="475488"/>
-          </a:xfrm>
-          <a:prstGeom prst="rect">
-            <a:avLst/>
-          </a:prstGeom>
-          <a:noFill/>
-        </p:spPr>
-        <p:txBody>
-          <a:bodyPr wrap="square" anchor="t">
-            <a:spAutoFit/>
-          </a:bodyPr>
-          <a:lstStyle/>
-          <a:p>
-            <a:pPr algn="l">
-              <a:spcAft>
-                <a:spcPts val="0"/>
-              </a:spcAft>
-            </a:pPr>
-            <a:r>
-              <a:rPr sz="2200" b="1" i="0">
-                <a:solidFill>
-                  <a:srgbClr val="0A1F2E"/>
-                </a:solidFill>
-                <a:latin typeface="Calibri"/>
-              </a:rPr>
-              <a:t>EOI → proposal → policy learning</a:t>
-            </a:r>
-          </a:p>
-        </p:txBody>
-      </p:sp>
-      <p:sp>
-        <p:nvSpPr>
-          <p:cNvPr id="6" name="TextBox 5"/>
-          <p:cNvSpPr txBox="1"/>
-          <p:nvPr/>
-        </p:nvSpPr>
-        <p:spPr>
-          <a:xfrm>
-            <a:off x="502920" y="1234440"/>
-            <a:ext cx="5760720" cy="5074920"/>
+            <a:off x="411480" y="91440"/>
+            <a:ext cx="10972800" cy="274320"/>
           </a:xfrm>
           <a:prstGeom prst="rect">
             <a:avLst/>
@@ -6469,105 +5758,639 @@
           </a:bodyPr>
           <a:lstStyle/>
           <a:p>
-            <a:pPr>
-              <a:spcAft>
-                <a:spcPts val="800"/>
-              </a:spcAft>
-            </a:pPr>
-            <a:r>
-              <a:rPr sz="1500">
-                <a:solidFill>
-                  <a:srgbClr val="1E2F38"/>
+            <a:pPr algn="l"/>
+            <a:r>
+              <a:rPr sz="1100" b="1" i="0">
+                <a:solidFill>
+                  <a:srgbClr val="C45C26"/>
                 </a:solidFill>
                 <a:latin typeface="Calibri"/>
               </a:rPr>
-              <a:t>•  By 31 Jul 2026: Optional non-binding Expression of Interest</a:t>
-            </a:r>
-          </a:p>
-          <a:p>
-            <a:pPr>
-              <a:spcAft>
-                <a:spcPts val="800"/>
-              </a:spcAft>
-            </a:pPr>
-            <a:r>
-              <a:rPr sz="1500">
-                <a:solidFill>
-                  <a:srgbClr val="1E2F38"/>
+              <a:t>EOI → PROPOSAL → LEARNING</a:t>
+            </a:r>
+          </a:p>
+        </p:txBody>
+      </p:sp>
+      <p:sp>
+        <p:nvSpPr>
+          <p:cNvPr id="5" name="TextBox 4"/>
+          <p:cNvSpPr txBox="1"/>
+          <p:nvPr/>
+        </p:nvSpPr>
+        <p:spPr>
+          <a:xfrm>
+            <a:off x="411480" y="384048"/>
+            <a:ext cx="10972800" cy="457200"/>
+          </a:xfrm>
+          <a:prstGeom prst="rect">
+            <a:avLst/>
+          </a:prstGeom>
+          <a:noFill/>
+        </p:spPr>
+        <p:txBody>
+          <a:bodyPr wrap="square">
+            <a:spAutoFit/>
+          </a:bodyPr>
+          <a:lstStyle/>
+          <a:p>
+            <a:pPr algn="l"/>
+            <a:r>
+              <a:rPr sz="2400" b="1" i="0">
+                <a:solidFill>
+                  <a:srgbClr val="0A1F2E"/>
                 </a:solidFill>
                 <a:latin typeface="Calibri"/>
               </a:rPr>
-              <a:t>•  By 4 Sep 2026: Full proposal if thematic fit confirmed</a:t>
-            </a:r>
-          </a:p>
-          <a:p>
-            <a:pPr>
-              <a:spcAft>
-                <a:spcPts val="800"/>
-              </a:spcAft>
-            </a:pPr>
-            <a:r>
-              <a:rPr sz="1500">
-                <a:solidFill>
-                  <a:srgbClr val="1E2F38"/>
+              <a:t>Gated by thematic fit verification</a:t>
+            </a:r>
+          </a:p>
+        </p:txBody>
+      </p:sp>
+      <p:sp>
+        <p:nvSpPr>
+          <p:cNvPr id="6" name="Rectangle 5"/>
+          <p:cNvSpPr/>
+          <p:nvPr/>
+        </p:nvSpPr>
+        <p:spPr>
+          <a:xfrm>
+            <a:off x="457200" y="1051560"/>
+            <a:ext cx="11155680" cy="868680"/>
+          </a:xfrm>
+          <a:prstGeom prst="rect">
+            <a:avLst/>
+          </a:prstGeom>
+          <a:solidFill>
+            <a:srgbClr val="FFFFFF"/>
+          </a:solidFill>
+          <a:ln>
+            <a:solidFill>
+              <a:srgbClr val="D0DCDC"/>
+            </a:solidFill>
+          </a:ln>
+        </p:spPr>
+        <p:style>
+          <a:lnRef idx="1">
+            <a:schemeClr val="accent1"/>
+          </a:lnRef>
+          <a:fillRef idx="3">
+            <a:schemeClr val="accent1"/>
+          </a:fillRef>
+          <a:effectRef idx="2">
+            <a:schemeClr val="accent1"/>
+          </a:effectRef>
+          <a:fontRef idx="minor">
+            <a:schemeClr val="lt1"/>
+          </a:fontRef>
+        </p:style>
+        <p:txBody>
+          <a:bodyPr rtlCol="0" anchor="ctr"/>
+          <a:lstStyle/>
+          <a:p>
+            <a:pPr algn="ctr"/>
+          </a:p>
+        </p:txBody>
+      </p:sp>
+      <p:sp>
+        <p:nvSpPr>
+          <p:cNvPr id="7" name="TextBox 6"/>
+          <p:cNvSpPr txBox="1"/>
+          <p:nvPr/>
+        </p:nvSpPr>
+        <p:spPr>
+          <a:xfrm>
+            <a:off x="640080" y="1143000"/>
+            <a:ext cx="2560320" cy="320040"/>
+          </a:xfrm>
+          <a:prstGeom prst="rect">
+            <a:avLst/>
+          </a:prstGeom>
+          <a:noFill/>
+        </p:spPr>
+        <p:txBody>
+          <a:bodyPr wrap="square">
+            <a:spAutoFit/>
+          </a:bodyPr>
+          <a:lstStyle/>
+          <a:p>
+            <a:pPr algn="l"/>
+            <a:r>
+              <a:rPr sz="1300" b="1" i="0">
+                <a:solidFill>
+                  <a:srgbClr val="0D6E6E"/>
                 </a:solidFill>
                 <a:latin typeface="Calibri"/>
               </a:rPr>
-              <a:t>•  Year 1–2: Pilot indicators in FairBanks / partner rural catchments</a:t>
-            </a:r>
-          </a:p>
-          <a:p>
-            <a:pPr>
-              <a:spcAft>
-                <a:spcPts val="800"/>
-              </a:spcAft>
-            </a:pPr>
-            <a:r>
-              <a:rPr sz="1500">
-                <a:solidFill>
-                  <a:srgbClr val="1E2F38"/>
+              <a:t>By 31 Jul 2026</a:t>
+            </a:r>
+          </a:p>
+        </p:txBody>
+      </p:sp>
+      <p:sp>
+        <p:nvSpPr>
+          <p:cNvPr id="8" name="TextBox 7"/>
+          <p:cNvSpPr txBox="1"/>
+          <p:nvPr/>
+        </p:nvSpPr>
+        <p:spPr>
+          <a:xfrm>
+            <a:off x="3291840" y="1143000"/>
+            <a:ext cx="7772400" cy="685800"/>
+          </a:xfrm>
+          <a:prstGeom prst="rect">
+            <a:avLst/>
+          </a:prstGeom>
+          <a:noFill/>
+        </p:spPr>
+        <p:txBody>
+          <a:bodyPr wrap="square">
+            <a:spAutoFit/>
+          </a:bodyPr>
+          <a:lstStyle/>
+          <a:p>
+            <a:pPr algn="l"/>
+            <a:r>
+              <a:rPr sz="1300" b="0" i="0">
+                <a:solidFill>
+                  <a:srgbClr val="3A4A54"/>
                 </a:solidFill>
                 <a:latin typeface="Calibri"/>
               </a:rPr>
-              <a:t>•  Learning: Policy notes for IFAD and national stakeholders</a:t>
-            </a:r>
-          </a:p>
-        </p:txBody>
-      </p:sp>
-      <p:pic>
-        <p:nvPicPr>
-          <p:cNvPr id="7" name="Picture 6" descr="indoor_training_staff_presenting_01_opt.jpg"/>
-          <p:cNvPicPr>
-            <a:picLocks noChangeAspect="1"/>
-          </p:cNvPicPr>
-          <p:nvPr/>
-        </p:nvPicPr>
-        <p:blipFill>
-          <a:blip r:embed="rId2"/>
-          <a:stretch>
-            <a:fillRect/>
-          </a:stretch>
-        </p:blipFill>
-        <p:spPr>
-          <a:xfrm>
-            <a:off x="6492240" y="2035160"/>
-            <a:ext cx="5212080" cy="3473479"/>
-          </a:xfrm>
-          <a:prstGeom prst="rect">
-            <a:avLst/>
-          </a:prstGeom>
-        </p:spPr>
-      </p:pic>
-      <p:sp>
-        <p:nvSpPr>
-          <p:cNvPr id="8" name="Rectangle 7"/>
+              <a:t>Optional non-binding Expression of Interest to test thematic fit</a:t>
+            </a:r>
+          </a:p>
+        </p:txBody>
+      </p:sp>
+      <p:sp>
+        <p:nvSpPr>
+          <p:cNvPr id="9" name="Rectangle 8"/>
           <p:cNvSpPr/>
           <p:nvPr/>
         </p:nvSpPr>
         <p:spPr>
           <a:xfrm>
-            <a:off x="0" y="6565392"/>
-            <a:ext cx="12191695" cy="292608"/>
+            <a:off x="457200" y="2011680"/>
+            <a:ext cx="11155680" cy="868680"/>
+          </a:xfrm>
+          <a:prstGeom prst="rect">
+            <a:avLst/>
+          </a:prstGeom>
+          <a:solidFill>
+            <a:srgbClr val="FFFFFF"/>
+          </a:solidFill>
+          <a:ln>
+            <a:solidFill>
+              <a:srgbClr val="D0DCDC"/>
+            </a:solidFill>
+          </a:ln>
+        </p:spPr>
+        <p:style>
+          <a:lnRef idx="1">
+            <a:schemeClr val="accent1"/>
+          </a:lnRef>
+          <a:fillRef idx="3">
+            <a:schemeClr val="accent1"/>
+          </a:fillRef>
+          <a:effectRef idx="2">
+            <a:schemeClr val="accent1"/>
+          </a:effectRef>
+          <a:fontRef idx="minor">
+            <a:schemeClr val="lt1"/>
+          </a:fontRef>
+        </p:style>
+        <p:txBody>
+          <a:bodyPr rtlCol="0" anchor="ctr"/>
+          <a:lstStyle/>
+          <a:p>
+            <a:pPr algn="ctr"/>
+          </a:p>
+        </p:txBody>
+      </p:sp>
+      <p:sp>
+        <p:nvSpPr>
+          <p:cNvPr id="10" name="TextBox 9"/>
+          <p:cNvSpPr txBox="1"/>
+          <p:nvPr/>
+        </p:nvSpPr>
+        <p:spPr>
+          <a:xfrm>
+            <a:off x="640080" y="2103120"/>
+            <a:ext cx="2560320" cy="320040"/>
+          </a:xfrm>
+          <a:prstGeom prst="rect">
+            <a:avLst/>
+          </a:prstGeom>
+          <a:noFill/>
+        </p:spPr>
+        <p:txBody>
+          <a:bodyPr wrap="square">
+            <a:spAutoFit/>
+          </a:bodyPr>
+          <a:lstStyle/>
+          <a:p>
+            <a:pPr algn="l"/>
+            <a:r>
+              <a:rPr sz="1300" b="1" i="0">
+                <a:solidFill>
+                  <a:srgbClr val="0D6E6E"/>
+                </a:solidFill>
+                <a:latin typeface="Calibri"/>
+              </a:rPr>
+              <a:t>Review</a:t>
+            </a:r>
+          </a:p>
+        </p:txBody>
+      </p:sp>
+      <p:sp>
+        <p:nvSpPr>
+          <p:cNvPr id="11" name="TextBox 10"/>
+          <p:cNvSpPr txBox="1"/>
+          <p:nvPr/>
+        </p:nvSpPr>
+        <p:spPr>
+          <a:xfrm>
+            <a:off x="3291840" y="2103120"/>
+            <a:ext cx="7772400" cy="685800"/>
+          </a:xfrm>
+          <a:prstGeom prst="rect">
+            <a:avLst/>
+          </a:prstGeom>
+          <a:noFill/>
+        </p:spPr>
+        <p:txBody>
+          <a:bodyPr wrap="square">
+            <a:spAutoFit/>
+          </a:bodyPr>
+          <a:lstStyle/>
+          <a:p>
+            <a:pPr algn="l"/>
+            <a:r>
+              <a:rPr sz="1300" b="0" i="0">
+                <a:solidFill>
+                  <a:srgbClr val="3A4A54"/>
+                </a:solidFill>
+                <a:latin typeface="Calibri"/>
+              </a:rPr>
+              <a:t>Confirm alignment with IFAD Rural Sector Performance Assessment guidance</a:t>
+            </a:r>
+          </a:p>
+        </p:txBody>
+      </p:sp>
+      <p:sp>
+        <p:nvSpPr>
+          <p:cNvPr id="12" name="Rectangle 11"/>
+          <p:cNvSpPr/>
+          <p:nvPr/>
+        </p:nvSpPr>
+        <p:spPr>
+          <a:xfrm>
+            <a:off x="457200" y="2971800"/>
+            <a:ext cx="11155680" cy="868680"/>
+          </a:xfrm>
+          <a:prstGeom prst="rect">
+            <a:avLst/>
+          </a:prstGeom>
+          <a:solidFill>
+            <a:srgbClr val="FFFFFF"/>
+          </a:solidFill>
+          <a:ln>
+            <a:solidFill>
+              <a:srgbClr val="D0DCDC"/>
+            </a:solidFill>
+          </a:ln>
+        </p:spPr>
+        <p:style>
+          <a:lnRef idx="1">
+            <a:schemeClr val="accent1"/>
+          </a:lnRef>
+          <a:fillRef idx="3">
+            <a:schemeClr val="accent1"/>
+          </a:fillRef>
+          <a:effectRef idx="2">
+            <a:schemeClr val="accent1"/>
+          </a:effectRef>
+          <a:fontRef idx="minor">
+            <a:schemeClr val="lt1"/>
+          </a:fontRef>
+        </p:style>
+        <p:txBody>
+          <a:bodyPr rtlCol="0" anchor="ctr"/>
+          <a:lstStyle/>
+          <a:p>
+            <a:pPr algn="ctr"/>
+          </a:p>
+        </p:txBody>
+      </p:sp>
+      <p:sp>
+        <p:nvSpPr>
+          <p:cNvPr id="13" name="TextBox 12"/>
+          <p:cNvSpPr txBox="1"/>
+          <p:nvPr/>
+        </p:nvSpPr>
+        <p:spPr>
+          <a:xfrm>
+            <a:off x="640080" y="3063240"/>
+            <a:ext cx="2560320" cy="320040"/>
+          </a:xfrm>
+          <a:prstGeom prst="rect">
+            <a:avLst/>
+          </a:prstGeom>
+          <a:noFill/>
+        </p:spPr>
+        <p:txBody>
+          <a:bodyPr wrap="square">
+            <a:spAutoFit/>
+          </a:bodyPr>
+          <a:lstStyle/>
+          <a:p>
+            <a:pPr algn="l"/>
+            <a:r>
+              <a:rPr sz="1300" b="1" i="0">
+                <a:solidFill>
+                  <a:srgbClr val="0D6E6E"/>
+                </a:solidFill>
+                <a:latin typeface="Calibri"/>
+              </a:rPr>
+              <a:t>By 4 Sep 2026</a:t>
+            </a:r>
+          </a:p>
+        </p:txBody>
+      </p:sp>
+      <p:sp>
+        <p:nvSpPr>
+          <p:cNvPr id="14" name="TextBox 13"/>
+          <p:cNvSpPr txBox="1"/>
+          <p:nvPr/>
+        </p:nvSpPr>
+        <p:spPr>
+          <a:xfrm>
+            <a:off x="3291840" y="3063240"/>
+            <a:ext cx="7772400" cy="685800"/>
+          </a:xfrm>
+          <a:prstGeom prst="rect">
+            <a:avLst/>
+          </a:prstGeom>
+          <a:noFill/>
+        </p:spPr>
+        <p:txBody>
+          <a:bodyPr wrap="square">
+            <a:spAutoFit/>
+          </a:bodyPr>
+          <a:lstStyle/>
+          <a:p>
+            <a:pPr algn="l"/>
+            <a:r>
+              <a:rPr sz="1300" b="0" i="0">
+                <a:solidFill>
+                  <a:srgbClr val="3A4A54"/>
+                </a:solidFill>
+                <a:latin typeface="Calibri"/>
+              </a:rPr>
+              <a:t>Full proposal only if thematic fit is confirmed</a:t>
+            </a:r>
+          </a:p>
+        </p:txBody>
+      </p:sp>
+      <p:sp>
+        <p:nvSpPr>
+          <p:cNvPr id="15" name="Rectangle 14"/>
+          <p:cNvSpPr/>
+          <p:nvPr/>
+        </p:nvSpPr>
+        <p:spPr>
+          <a:xfrm>
+            <a:off x="457200" y="3931920"/>
+            <a:ext cx="11155680" cy="868680"/>
+          </a:xfrm>
+          <a:prstGeom prst="rect">
+            <a:avLst/>
+          </a:prstGeom>
+          <a:solidFill>
+            <a:srgbClr val="FFFFFF"/>
+          </a:solidFill>
+          <a:ln>
+            <a:solidFill>
+              <a:srgbClr val="D0DCDC"/>
+            </a:solidFill>
+          </a:ln>
+        </p:spPr>
+        <p:style>
+          <a:lnRef idx="1">
+            <a:schemeClr val="accent1"/>
+          </a:lnRef>
+          <a:fillRef idx="3">
+            <a:schemeClr val="accent1"/>
+          </a:fillRef>
+          <a:effectRef idx="2">
+            <a:schemeClr val="accent1"/>
+          </a:effectRef>
+          <a:fontRef idx="minor">
+            <a:schemeClr val="lt1"/>
+          </a:fontRef>
+        </p:style>
+        <p:txBody>
+          <a:bodyPr rtlCol="0" anchor="ctr"/>
+          <a:lstStyle/>
+          <a:p>
+            <a:pPr algn="ctr"/>
+          </a:p>
+        </p:txBody>
+      </p:sp>
+      <p:sp>
+        <p:nvSpPr>
+          <p:cNvPr id="16" name="TextBox 15"/>
+          <p:cNvSpPr txBox="1"/>
+          <p:nvPr/>
+        </p:nvSpPr>
+        <p:spPr>
+          <a:xfrm>
+            <a:off x="640080" y="4023360"/>
+            <a:ext cx="2560320" cy="320040"/>
+          </a:xfrm>
+          <a:prstGeom prst="rect">
+            <a:avLst/>
+          </a:prstGeom>
+          <a:noFill/>
+        </p:spPr>
+        <p:txBody>
+          <a:bodyPr wrap="square">
+            <a:spAutoFit/>
+          </a:bodyPr>
+          <a:lstStyle/>
+          <a:p>
+            <a:pPr algn="l"/>
+            <a:r>
+              <a:rPr sz="1300" b="1" i="0">
+                <a:solidFill>
+                  <a:srgbClr val="0D6E6E"/>
+                </a:solidFill>
+                <a:latin typeface="Calibri"/>
+              </a:rPr>
+              <a:t>Year 1–2</a:t>
+            </a:r>
+          </a:p>
+        </p:txBody>
+      </p:sp>
+      <p:sp>
+        <p:nvSpPr>
+          <p:cNvPr id="17" name="TextBox 16"/>
+          <p:cNvSpPr txBox="1"/>
+          <p:nvPr/>
+        </p:nvSpPr>
+        <p:spPr>
+          <a:xfrm>
+            <a:off x="3291840" y="4023360"/>
+            <a:ext cx="7772400" cy="685800"/>
+          </a:xfrm>
+          <a:prstGeom prst="rect">
+            <a:avLst/>
+          </a:prstGeom>
+          <a:noFill/>
+        </p:spPr>
+        <p:txBody>
+          <a:bodyPr wrap="square">
+            <a:spAutoFit/>
+          </a:bodyPr>
+          <a:lstStyle/>
+          <a:p>
+            <a:pPr algn="l"/>
+            <a:r>
+              <a:rPr sz="1300" b="0" i="0">
+                <a:solidFill>
+                  <a:srgbClr val="3A4A54"/>
+                </a:solidFill>
+                <a:latin typeface="Calibri"/>
+              </a:rPr>
+              <a:t>Pilot health–livelihood indicators in FairBanks / partner rural catchments</a:t>
+            </a:r>
+          </a:p>
+        </p:txBody>
+      </p:sp>
+      <p:sp>
+        <p:nvSpPr>
+          <p:cNvPr id="18" name="Rectangle 17"/>
+          <p:cNvSpPr/>
+          <p:nvPr/>
+        </p:nvSpPr>
+        <p:spPr>
+          <a:xfrm>
+            <a:off x="457200" y="4892040"/>
+            <a:ext cx="11155680" cy="868680"/>
+          </a:xfrm>
+          <a:prstGeom prst="rect">
+            <a:avLst/>
+          </a:prstGeom>
+          <a:solidFill>
+            <a:srgbClr val="FFFFFF"/>
+          </a:solidFill>
+          <a:ln>
+            <a:solidFill>
+              <a:srgbClr val="D0DCDC"/>
+            </a:solidFill>
+          </a:ln>
+        </p:spPr>
+        <p:style>
+          <a:lnRef idx="1">
+            <a:schemeClr val="accent1"/>
+          </a:lnRef>
+          <a:fillRef idx="3">
+            <a:schemeClr val="accent1"/>
+          </a:fillRef>
+          <a:effectRef idx="2">
+            <a:schemeClr val="accent1"/>
+          </a:effectRef>
+          <a:fontRef idx="minor">
+            <a:schemeClr val="lt1"/>
+          </a:fontRef>
+        </p:style>
+        <p:txBody>
+          <a:bodyPr rtlCol="0" anchor="ctr"/>
+          <a:lstStyle/>
+          <a:p>
+            <a:pPr algn="ctr"/>
+          </a:p>
+        </p:txBody>
+      </p:sp>
+      <p:sp>
+        <p:nvSpPr>
+          <p:cNvPr id="19" name="TextBox 18"/>
+          <p:cNvSpPr txBox="1"/>
+          <p:nvPr/>
+        </p:nvSpPr>
+        <p:spPr>
+          <a:xfrm>
+            <a:off x="640080" y="4983480"/>
+            <a:ext cx="2560320" cy="320040"/>
+          </a:xfrm>
+          <a:prstGeom prst="rect">
+            <a:avLst/>
+          </a:prstGeom>
+          <a:noFill/>
+        </p:spPr>
+        <p:txBody>
+          <a:bodyPr wrap="square">
+            <a:spAutoFit/>
+          </a:bodyPr>
+          <a:lstStyle/>
+          <a:p>
+            <a:pPr algn="l"/>
+            <a:r>
+              <a:rPr sz="1300" b="1" i="0">
+                <a:solidFill>
+                  <a:srgbClr val="0D6E6E"/>
+                </a:solidFill>
+                <a:latin typeface="Calibri"/>
+              </a:rPr>
+              <a:t>Learning</a:t>
+            </a:r>
+          </a:p>
+        </p:txBody>
+      </p:sp>
+      <p:sp>
+        <p:nvSpPr>
+          <p:cNvPr id="20" name="TextBox 19"/>
+          <p:cNvSpPr txBox="1"/>
+          <p:nvPr/>
+        </p:nvSpPr>
+        <p:spPr>
+          <a:xfrm>
+            <a:off x="3291840" y="4983480"/>
+            <a:ext cx="7772400" cy="685800"/>
+          </a:xfrm>
+          <a:prstGeom prst="rect">
+            <a:avLst/>
+          </a:prstGeom>
+          <a:noFill/>
+        </p:spPr>
+        <p:txBody>
+          <a:bodyPr wrap="square">
+            <a:spAutoFit/>
+          </a:bodyPr>
+          <a:lstStyle/>
+          <a:p>
+            <a:pPr algn="l"/>
+            <a:r>
+              <a:rPr sz="1300" b="0" i="0">
+                <a:solidFill>
+                  <a:srgbClr val="3A4A54"/>
+                </a:solidFill>
+                <a:latin typeface="Calibri"/>
+              </a:rPr>
+              <a:t>Policy notes for IFAD, national stakeholders, and rural investment planners</a:t>
+            </a:r>
+          </a:p>
+        </p:txBody>
+      </p:sp>
+      <p:sp>
+        <p:nvSpPr>
+          <p:cNvPr id="21" name="Rectangle 20"/>
+          <p:cNvSpPr/>
+          <p:nvPr/>
+        </p:nvSpPr>
+        <p:spPr>
+          <a:xfrm>
+            <a:off x="0" y="6583680"/>
+            <a:ext cx="12191695" cy="274320"/>
           </a:xfrm>
           <a:prstGeom prst="rect">
             <a:avLst/>
@@ -6578,7 +6401,6 @@
           <a:ln>
             <a:noFill/>
           </a:ln>
-          <a:effectLst/>
         </p:spPr>
         <p:style>
           <a:lnRef idx="1">
@@ -6604,14 +6426,14 @@
       </p:sp>
       <p:sp>
         <p:nvSpPr>
-          <p:cNvPr id="9" name="TextBox 8"/>
+          <p:cNvPr id="22" name="TextBox 21"/>
           <p:cNvSpPr txBox="1"/>
           <p:nvPr/>
         </p:nvSpPr>
         <p:spPr>
           <a:xfrm>
-            <a:off x="365760" y="6574536"/>
-            <a:ext cx="9144000" cy="274320"/>
+            <a:off x="365760" y="6592824"/>
+            <a:ext cx="9144000" cy="256032"/>
           </a:xfrm>
           <a:prstGeom prst="rect">
             <a:avLst/>
@@ -6619,16 +6441,12 @@
           <a:noFill/>
         </p:spPr>
         <p:txBody>
-          <a:bodyPr wrap="square" anchor="ctr">
+          <a:bodyPr wrap="square">
             <a:spAutoFit/>
           </a:bodyPr>
           <a:lstStyle/>
           <a:p>
-            <a:pPr algn="l">
-              <a:spcAft>
-                <a:spcPts val="0"/>
-              </a:spcAft>
-            </a:pPr>
+            <a:pPr algn="l"/>
             <a:r>
               <a:rPr sz="900" b="0" i="0">
                 <a:solidFill>
@@ -6636,21 +6454,21 @@
                 </a:solidFill>
                 <a:latin typeface="Calibri"/>
               </a:rPr>
-              <a:t>FairBanks FCHIP  |  IFAD Grant — Rural Sector Performance As  |  Your health, our mission.</a:t>
-            </a:r>
-          </a:p>
-        </p:txBody>
-      </p:sp>
-      <p:sp>
-        <p:nvSpPr>
-          <p:cNvPr id="10" name="TextBox 9"/>
+              <a:t>FairBanks FCHIP | IFAD Rural Performance | Your health, our mission.</a:t>
+            </a:r>
+          </a:p>
+        </p:txBody>
+      </p:sp>
+      <p:sp>
+        <p:nvSpPr>
+          <p:cNvPr id="23" name="TextBox 22"/>
           <p:cNvSpPr txBox="1"/>
           <p:nvPr/>
         </p:nvSpPr>
         <p:spPr>
           <a:xfrm>
-            <a:off x="11094415" y="6574536"/>
-            <a:ext cx="731520" cy="274320"/>
+            <a:off x="11460175" y="6592824"/>
+            <a:ext cx="457200" cy="256032"/>
           </a:xfrm>
           <a:prstGeom prst="rect">
             <a:avLst/>
@@ -6658,16 +6476,12 @@
           <a:noFill/>
         </p:spPr>
         <p:txBody>
-          <a:bodyPr wrap="square" anchor="ctr">
+          <a:bodyPr wrap="square">
             <a:spAutoFit/>
           </a:bodyPr>
           <a:lstStyle/>
           <a:p>
-            <a:pPr algn="r">
-              <a:spcAft>
-                <a:spcPts val="0"/>
-              </a:spcAft>
-            </a:pPr>
+            <a:pPr algn="r"/>
             <a:r>
               <a:rPr sz="900" b="0" i="0">
                 <a:solidFill>
@@ -6707,7 +6521,7 @@
         <p:spPr>
           <a:xfrm>
             <a:off x="0" y="0"/>
-            <a:ext cx="12191695" cy="960120"/>
+            <a:ext cx="12191695" cy="914400"/>
           </a:xfrm>
           <a:prstGeom prst="rect">
             <a:avLst/>
@@ -6718,7 +6532,6 @@
           <a:ln>
             <a:noFill/>
           </a:ln>
-          <a:effectLst/>
         </p:spPr>
         <p:style>
           <a:lnRef idx="1">
@@ -6751,7 +6564,7 @@
         <p:spPr>
           <a:xfrm>
             <a:off x="0" y="0"/>
-            <a:ext cx="164592" cy="960120"/>
+            <a:ext cx="137160" cy="914400"/>
           </a:xfrm>
           <a:prstGeom prst="rect">
             <a:avLst/>
@@ -6762,7 +6575,6 @@
           <a:ln>
             <a:noFill/>
           </a:ln>
-          <a:effectLst/>
         </p:spPr>
         <p:style>
           <a:lnRef idx="1">
@@ -6794,8 +6606,8 @@
         </p:nvSpPr>
         <p:spPr>
           <a:xfrm>
-            <a:off x="457200" y="109728"/>
-            <a:ext cx="10972800" cy="256032"/>
+            <a:off x="411480" y="91440"/>
+            <a:ext cx="10972800" cy="274320"/>
           </a:xfrm>
           <a:prstGeom prst="rect">
             <a:avLst/>
@@ -6803,16 +6615,12 @@
           <a:noFill/>
         </p:spPr>
         <p:txBody>
-          <a:bodyPr wrap="square" anchor="t">
+          <a:bodyPr wrap="square">
             <a:spAutoFit/>
           </a:bodyPr>
           <a:lstStyle/>
           <a:p>
-            <a:pPr algn="l">
-              <a:spcAft>
-                <a:spcPts val="0"/>
-              </a:spcAft>
-            </a:pPr>
+            <a:pPr algn="l"/>
             <a:r>
               <a:rPr sz="1100" b="1" i="0">
                 <a:solidFill>
@@ -6820,7 +6628,7 @@
                 </a:solidFill>
                 <a:latin typeface="Calibri"/>
               </a:rPr>
-              <a:t>DEEP TECHNOLOGY</a:t>
+              <a:t>RESOURCES</a:t>
             </a:r>
           </a:p>
         </p:txBody>
@@ -6833,8 +6641,8 @@
         </p:nvSpPr>
         <p:spPr>
           <a:xfrm>
-            <a:off x="457200" y="384048"/>
-            <a:ext cx="11247120" cy="475488"/>
+            <a:off x="411480" y="384048"/>
+            <a:ext cx="10972800" cy="457200"/>
           </a:xfrm>
           <a:prstGeom prst="rect">
             <a:avLst/>
@@ -6842,62 +6650,34 @@
           <a:noFill/>
         </p:spPr>
         <p:txBody>
-          <a:bodyPr wrap="square" anchor="t">
+          <a:bodyPr wrap="square">
             <a:spAutoFit/>
           </a:bodyPr>
           <a:lstStyle/>
           <a:p>
-            <a:pPr algn="l">
-              <a:spcAft>
-                <a:spcPts val="0"/>
-              </a:spcAft>
-            </a:pPr>
-            <a:r>
-              <a:rPr sz="2200" b="1" i="0">
+            <a:pPr algn="l"/>
+            <a:r>
+              <a:rPr sz="2400" b="1" i="0">
                 <a:solidFill>
                   <a:srgbClr val="0A1F2E"/>
                 </a:solidFill>
                 <a:latin typeface="Calibri"/>
               </a:rPr>
-              <a:t>Intelligence rooted in African community care</a:t>
-            </a:r>
-          </a:p>
-        </p:txBody>
-      </p:sp>
-      <p:pic>
-        <p:nvPicPr>
-          <p:cNvPr id="6" name="Picture 5" descr="deep_tech_collage_opt.jpg"/>
-          <p:cNvPicPr>
-            <a:picLocks noChangeAspect="1"/>
-          </p:cNvPicPr>
-          <p:nvPr/>
-        </p:nvPicPr>
-        <p:blipFill>
-          <a:blip r:embed="rId2"/>
-          <a:stretch>
-            <a:fillRect/>
-          </a:stretch>
-        </p:blipFill>
-        <p:spPr>
-          <a:xfrm>
-            <a:off x="411480" y="2065630"/>
-            <a:ext cx="5120640" cy="3412540"/>
-          </a:xfrm>
-          <a:prstGeom prst="rect">
-            <a:avLst/>
-          </a:prstGeom>
-        </p:spPr>
-      </p:pic>
-      <p:sp>
-        <p:nvSpPr>
-          <p:cNvPr id="7" name="Rectangle 6"/>
+              <a:t>Indicative allocation — up to US$1.2M ceiling</a:t>
+            </a:r>
+          </a:p>
+        </p:txBody>
+      </p:sp>
+      <p:sp>
+        <p:nvSpPr>
+          <p:cNvPr id="6" name="Rectangle 5"/>
           <p:cNvSpPr/>
           <p:nvPr/>
         </p:nvSpPr>
         <p:spPr>
           <a:xfrm>
-            <a:off x="5852160" y="1197864"/>
-            <a:ext cx="5852160" cy="766572"/>
+            <a:off x="457200" y="1051560"/>
+            <a:ext cx="11155680" cy="868680"/>
           </a:xfrm>
           <a:prstGeom prst="rect">
             <a:avLst/>
@@ -6905,12 +6685,11 @@
           <a:solidFill>
             <a:srgbClr val="FFFFFF"/>
           </a:solidFill>
-          <a:ln w="9525">
+          <a:ln>
             <a:solidFill>
               <a:srgbClr val="D0DCDC"/>
             </a:solidFill>
           </a:ln>
-          <a:effectLst/>
         </p:spPr>
         <p:style>
           <a:lnRef idx="1">
@@ -6936,14 +6715,49 @@
       </p:sp>
       <p:sp>
         <p:nvSpPr>
+          <p:cNvPr id="7" name="TextBox 6"/>
+          <p:cNvSpPr txBox="1"/>
+          <p:nvPr/>
+        </p:nvSpPr>
+        <p:spPr>
+          <a:xfrm>
+            <a:off x="640080" y="1143000"/>
+            <a:ext cx="3200400" cy="320040"/>
+          </a:xfrm>
+          <a:prstGeom prst="rect">
+            <a:avLst/>
+          </a:prstGeom>
+          <a:noFill/>
+        </p:spPr>
+        <p:txBody>
+          <a:bodyPr wrap="square">
+            <a:spAutoFit/>
+          </a:bodyPr>
+          <a:lstStyle/>
+          <a:p>
+            <a:pPr algn="l"/>
+            <a:r>
+              <a:rPr sz="1200" b="0" i="0">
+                <a:solidFill>
+                  <a:srgbClr val="1E2F38"/>
+                </a:solidFill>
+                <a:latin typeface="Calibri"/>
+              </a:rPr>
+              <a:t>Research &amp; assessment design</a:t>
+            </a:r>
+          </a:p>
+        </p:txBody>
+      </p:sp>
+      <p:sp>
+        <p:nvSpPr>
           <p:cNvPr id="8" name="TextBox 7"/>
           <p:cNvSpPr txBox="1"/>
           <p:nvPr/>
         </p:nvSpPr>
         <p:spPr>
           <a:xfrm>
-            <a:off x="6035040" y="1252728"/>
-            <a:ext cx="5486400" cy="274320"/>
+            <a:off x="3931920" y="1143000"/>
+            <a:ext cx="5943600" cy="685800"/>
           </a:xfrm>
           <a:prstGeom prst="rect">
             <a:avLst/>
@@ -6951,24 +6765,20 @@
           <a:noFill/>
         </p:spPr>
         <p:txBody>
-          <a:bodyPr wrap="square" anchor="t">
+          <a:bodyPr wrap="square">
             <a:spAutoFit/>
           </a:bodyPr>
           <a:lstStyle/>
           <a:p>
-            <a:pPr algn="l">
-              <a:spcAft>
-                <a:spcPts val="0"/>
-              </a:spcAft>
-            </a:pPr>
-            <a:r>
-              <a:rPr sz="1400" b="1" i="0">
-                <a:solidFill>
-                  <a:srgbClr val="0D6E6E"/>
+            <a:pPr algn="l"/>
+            <a:r>
+              <a:rPr sz="1100" b="0" i="0">
+                <a:solidFill>
+                  <a:srgbClr val="3A4A54"/>
                 </a:solidFill>
                 <a:latin typeface="Calibri"/>
               </a:rPr>
-              <a:t>Artificial Intelligence</a:t>
+              <a:t>Methods, partner contracts, ethics</a:t>
             </a:r>
           </a:p>
         </p:txBody>
@@ -6981,8 +6791,8 @@
         </p:nvSpPr>
         <p:spPr>
           <a:xfrm>
-            <a:off x="6035040" y="1527048"/>
-            <a:ext cx="5486400" cy="365760"/>
+            <a:off x="10241280" y="1143000"/>
+            <a:ext cx="1097280" cy="320040"/>
           </a:xfrm>
           <a:prstGeom prst="rect">
             <a:avLst/>
@@ -6990,24 +6800,20 @@
           <a:noFill/>
         </p:spPr>
         <p:txBody>
-          <a:bodyPr wrap="square" anchor="t">
+          <a:bodyPr wrap="square">
             <a:spAutoFit/>
           </a:bodyPr>
           <a:lstStyle/>
           <a:p>
-            <a:pPr algn="l">
-              <a:spcAft>
-                <a:spcPts val="0"/>
-              </a:spcAft>
-            </a:pPr>
-            <a:r>
-              <a:rPr sz="1200" b="0" i="0">
-                <a:solidFill>
-                  <a:srgbClr val="3A4A54"/>
+            <a:pPr algn="r"/>
+            <a:r>
+              <a:rPr sz="1200" b="1" i="0">
+                <a:solidFill>
+                  <a:srgbClr val="C45C26"/>
                 </a:solidFill>
                 <a:latin typeface="Calibri"/>
               </a:rPr>
-              <a:t>Outbreak early warning; maternal and NCD risk scoring</a:t>
+              <a:t>Share of grant</a:t>
             </a:r>
           </a:p>
         </p:txBody>
@@ -7020,8 +6826,8 @@
         </p:nvSpPr>
         <p:spPr>
           <a:xfrm>
-            <a:off x="5852160" y="2074164"/>
-            <a:ext cx="5852160" cy="766572"/>
+            <a:off x="457200" y="2011680"/>
+            <a:ext cx="11155680" cy="868680"/>
           </a:xfrm>
           <a:prstGeom prst="rect">
             <a:avLst/>
@@ -7029,12 +6835,11 @@
           <a:solidFill>
             <a:srgbClr val="FFFFFF"/>
           </a:solidFill>
-          <a:ln w="9525">
+          <a:ln>
             <a:solidFill>
               <a:srgbClr val="D0DCDC"/>
             </a:solidFill>
           </a:ln>
-          <a:effectLst/>
         </p:spPr>
         <p:style>
           <a:lnRef idx="1">
@@ -7066,8 +6871,8 @@
         </p:nvSpPr>
         <p:spPr>
           <a:xfrm>
-            <a:off x="6035040" y="2129028"/>
-            <a:ext cx="5486400" cy="274320"/>
+            <a:off x="640080" y="2103120"/>
+            <a:ext cx="3200400" cy="320040"/>
           </a:xfrm>
           <a:prstGeom prst="rect">
             <a:avLst/>
@@ -7075,24 +6880,20 @@
           <a:noFill/>
         </p:spPr>
         <p:txBody>
-          <a:bodyPr wrap="square" anchor="t">
+          <a:bodyPr wrap="square">
             <a:spAutoFit/>
           </a:bodyPr>
           <a:lstStyle/>
           <a:p>
-            <a:pPr algn="l">
-              <a:spcAft>
-                <a:spcPts val="0"/>
-              </a:spcAft>
-            </a:pPr>
-            <a:r>
-              <a:rPr sz="1400" b="1" i="0">
-                <a:solidFill>
-                  <a:srgbClr val="0D6E6E"/>
+            <a:pPr algn="l"/>
+            <a:r>
+              <a:rPr sz="1200" b="0" i="0">
+                <a:solidFill>
+                  <a:srgbClr val="1E2F38"/>
                 </a:solidFill>
                 <a:latin typeface="Calibri"/>
               </a:rPr>
-              <a:t>Machine Learning</a:t>
+              <a:t>Community data &amp; FCHIP modules</a:t>
             </a:r>
           </a:p>
         </p:txBody>
@@ -7105,8 +6906,8 @@
         </p:nvSpPr>
         <p:spPr>
           <a:xfrm>
-            <a:off x="6035040" y="2403348"/>
-            <a:ext cx="5486400" cy="365760"/>
+            <a:off x="3931920" y="2103120"/>
+            <a:ext cx="5943600" cy="685800"/>
           </a:xfrm>
           <a:prstGeom prst="rect">
             <a:avLst/>
@@ -7114,38 +6915,69 @@
           <a:noFill/>
         </p:spPr>
         <p:txBody>
-          <a:bodyPr wrap="square" anchor="t">
+          <a:bodyPr wrap="square">
             <a:spAutoFit/>
           </a:bodyPr>
           <a:lstStyle/>
           <a:p>
-            <a:pPr algn="l">
-              <a:spcAft>
-                <a:spcPts val="0"/>
-              </a:spcAft>
-            </a:pPr>
-            <a:r>
-              <a:rPr sz="1200" b="0" i="0">
+            <a:pPr algn="l"/>
+            <a:r>
+              <a:rPr sz="1100" b="0" i="0">
                 <a:solidFill>
                   <a:srgbClr val="3A4A54"/>
                 </a:solidFill>
                 <a:latin typeface="Calibri"/>
               </a:rPr>
-              <a:t>Learn from community patterns, seasons, and outreach outcomes</a:t>
-            </a:r>
-          </a:p>
-        </p:txBody>
-      </p:sp>
-      <p:sp>
-        <p:nvSpPr>
-          <p:cNvPr id="13" name="Rectangle 12"/>
+              <a:t>Indicators, dashboards, data quality</a:t>
+            </a:r>
+          </a:p>
+        </p:txBody>
+      </p:sp>
+      <p:sp>
+        <p:nvSpPr>
+          <p:cNvPr id="13" name="TextBox 12"/>
+          <p:cNvSpPr txBox="1"/>
+          <p:nvPr/>
+        </p:nvSpPr>
+        <p:spPr>
+          <a:xfrm>
+            <a:off x="10241280" y="2103120"/>
+            <a:ext cx="1097280" cy="320040"/>
+          </a:xfrm>
+          <a:prstGeom prst="rect">
+            <a:avLst/>
+          </a:prstGeom>
+          <a:noFill/>
+        </p:spPr>
+        <p:txBody>
+          <a:bodyPr wrap="square">
+            <a:spAutoFit/>
+          </a:bodyPr>
+          <a:lstStyle/>
+          <a:p>
+            <a:pPr algn="r"/>
+            <a:r>
+              <a:rPr sz="1200" b="1" i="0">
+                <a:solidFill>
+                  <a:srgbClr val="C45C26"/>
+                </a:solidFill>
+                <a:latin typeface="Calibri"/>
+              </a:rPr>
+              <a:t>Share of grant</a:t>
+            </a:r>
+          </a:p>
+        </p:txBody>
+      </p:sp>
+      <p:sp>
+        <p:nvSpPr>
+          <p:cNvPr id="14" name="Rectangle 13"/>
           <p:cNvSpPr/>
           <p:nvPr/>
         </p:nvSpPr>
         <p:spPr>
           <a:xfrm>
-            <a:off x="5852160" y="2950464"/>
-            <a:ext cx="5852160" cy="766572"/>
+            <a:off x="457200" y="2971800"/>
+            <a:ext cx="11155680" cy="868680"/>
           </a:xfrm>
           <a:prstGeom prst="rect">
             <a:avLst/>
@@ -7153,12 +6985,11 @@
           <a:solidFill>
             <a:srgbClr val="FFFFFF"/>
           </a:solidFill>
-          <a:ln w="9525">
+          <a:ln>
             <a:solidFill>
               <a:srgbClr val="D0DCDC"/>
             </a:solidFill>
           </a:ln>
-          <a:effectLst/>
         </p:spPr>
         <p:style>
           <a:lnRef idx="1">
@@ -7184,14 +7015,14 @@
       </p:sp>
       <p:sp>
         <p:nvSpPr>
-          <p:cNvPr id="14" name="TextBox 13"/>
+          <p:cNvPr id="15" name="TextBox 14"/>
           <p:cNvSpPr txBox="1"/>
           <p:nvPr/>
         </p:nvSpPr>
         <p:spPr>
           <a:xfrm>
-            <a:off x="6035040" y="3005328"/>
-            <a:ext cx="5486400" cy="274320"/>
+            <a:off x="640080" y="3063240"/>
+            <a:ext cx="3200400" cy="320040"/>
           </a:xfrm>
           <a:prstGeom prst="rect">
             <a:avLst/>
@@ -7199,38 +7030,34 @@
           <a:noFill/>
         </p:spPr>
         <p:txBody>
-          <a:bodyPr wrap="square" anchor="t">
+          <a:bodyPr wrap="square">
             <a:spAutoFit/>
           </a:bodyPr>
           <a:lstStyle/>
           <a:p>
-            <a:pPr algn="l">
-              <a:spcAft>
-                <a:spcPts val="0"/>
-              </a:spcAft>
-            </a:pPr>
-            <a:r>
-              <a:rPr sz="1400" b="1" i="0">
-                <a:solidFill>
-                  <a:srgbClr val="0D6E6E"/>
+            <a:pPr algn="l"/>
+            <a:r>
+              <a:rPr sz="1200" b="0" i="0">
+                <a:solidFill>
+                  <a:srgbClr val="1E2F38"/>
                 </a:solidFill>
                 <a:latin typeface="Calibri"/>
               </a:rPr>
-              <a:t>GIS Mapping</a:t>
-            </a:r>
-          </a:p>
-        </p:txBody>
-      </p:sp>
-      <p:sp>
-        <p:nvSpPr>
-          <p:cNvPr id="15" name="TextBox 14"/>
+              <a:t>Policy engagement</a:t>
+            </a:r>
+          </a:p>
+        </p:txBody>
+      </p:sp>
+      <p:sp>
+        <p:nvSpPr>
+          <p:cNvPr id="16" name="TextBox 15"/>
           <p:cNvSpPr txBox="1"/>
           <p:nvPr/>
         </p:nvSpPr>
         <p:spPr>
           <a:xfrm>
-            <a:off x="6035040" y="3279648"/>
-            <a:ext cx="5486400" cy="365760"/>
+            <a:off x="3931920" y="3063240"/>
+            <a:ext cx="5943600" cy="685800"/>
           </a:xfrm>
           <a:prstGeom prst="rect">
             <a:avLst/>
@@ -7238,38 +7065,69 @@
           <a:noFill/>
         </p:spPr>
         <p:txBody>
-          <a:bodyPr wrap="square" anchor="t">
+          <a:bodyPr wrap="square">
             <a:spAutoFit/>
           </a:bodyPr>
           <a:lstStyle/>
           <a:p>
-            <a:pPr algn="l">
-              <a:spcAft>
-                <a:spcPts val="0"/>
-              </a:spcAft>
-            </a:pPr>
-            <a:r>
-              <a:rPr sz="1200" b="0" i="0">
+            <a:pPr algn="l"/>
+            <a:r>
+              <a:rPr sz="1100" b="0" i="0">
                 <a:solidFill>
                   <a:srgbClr val="3A4A54"/>
                 </a:solidFill>
                 <a:latin typeface="Calibri"/>
               </a:rPr>
-              <a:t>Disease distribution, hotspots, and resource gaps</a:t>
-            </a:r>
-          </a:p>
-        </p:txBody>
-      </p:sp>
-      <p:sp>
-        <p:nvSpPr>
-          <p:cNvPr id="16" name="Rectangle 15"/>
+              <a:t>Briefs, stakeholder dialogues, learning events</a:t>
+            </a:r>
+          </a:p>
+        </p:txBody>
+      </p:sp>
+      <p:sp>
+        <p:nvSpPr>
+          <p:cNvPr id="17" name="TextBox 16"/>
+          <p:cNvSpPr txBox="1"/>
+          <p:nvPr/>
+        </p:nvSpPr>
+        <p:spPr>
+          <a:xfrm>
+            <a:off x="10241280" y="3063240"/>
+            <a:ext cx="1097280" cy="320040"/>
+          </a:xfrm>
+          <a:prstGeom prst="rect">
+            <a:avLst/>
+          </a:prstGeom>
+          <a:noFill/>
+        </p:spPr>
+        <p:txBody>
+          <a:bodyPr wrap="square">
+            <a:spAutoFit/>
+          </a:bodyPr>
+          <a:lstStyle/>
+          <a:p>
+            <a:pPr algn="r"/>
+            <a:r>
+              <a:rPr sz="1200" b="1" i="0">
+                <a:solidFill>
+                  <a:srgbClr val="C45C26"/>
+                </a:solidFill>
+                <a:latin typeface="Calibri"/>
+              </a:rPr>
+              <a:t>Share of grant</a:t>
+            </a:r>
+          </a:p>
+        </p:txBody>
+      </p:sp>
+      <p:sp>
+        <p:nvSpPr>
+          <p:cNvPr id="18" name="Rectangle 17"/>
           <p:cNvSpPr/>
           <p:nvPr/>
         </p:nvSpPr>
         <p:spPr>
           <a:xfrm>
-            <a:off x="5852160" y="3826764"/>
-            <a:ext cx="5852160" cy="766572"/>
+            <a:off x="457200" y="3931920"/>
+            <a:ext cx="11155680" cy="868680"/>
           </a:xfrm>
           <a:prstGeom prst="rect">
             <a:avLst/>
@@ -7277,12 +7135,11 @@
           <a:solidFill>
             <a:srgbClr val="FFFFFF"/>
           </a:solidFill>
-          <a:ln w="9525">
+          <a:ln>
             <a:solidFill>
               <a:srgbClr val="D0DCDC"/>
             </a:solidFill>
           </a:ln>
-          <a:effectLst/>
         </p:spPr>
         <p:style>
           <a:lnRef idx="1">
@@ -7308,14 +7165,14 @@
       </p:sp>
       <p:sp>
         <p:nvSpPr>
-          <p:cNvPr id="17" name="TextBox 16"/>
+          <p:cNvPr id="19" name="TextBox 18"/>
           <p:cNvSpPr txBox="1"/>
           <p:nvPr/>
         </p:nvSpPr>
         <p:spPr>
           <a:xfrm>
-            <a:off x="6035040" y="3881628"/>
-            <a:ext cx="5486400" cy="274320"/>
+            <a:off x="640080" y="4023360"/>
+            <a:ext cx="3200400" cy="320040"/>
           </a:xfrm>
           <a:prstGeom prst="rect">
             <a:avLst/>
@@ -7323,38 +7180,34 @@
           <a:noFill/>
         </p:spPr>
         <p:txBody>
-          <a:bodyPr wrap="square" anchor="t">
+          <a:bodyPr wrap="square">
             <a:spAutoFit/>
           </a:bodyPr>
           <a:lstStyle/>
           <a:p>
-            <a:pPr algn="l">
-              <a:spcAft>
-                <a:spcPts val="0"/>
-              </a:spcAft>
-            </a:pPr>
-            <a:r>
-              <a:rPr sz="1400" b="1" i="0">
-                <a:solidFill>
-                  <a:srgbClr val="0D6E6E"/>
+            <a:pPr algn="l"/>
+            <a:r>
+              <a:rPr sz="1200" b="0" i="0">
+                <a:solidFill>
+                  <a:srgbClr val="1E2F38"/>
                 </a:solidFill>
                 <a:latin typeface="Calibri"/>
               </a:rPr>
-              <a:t>Mobile Data Collection</a:t>
-            </a:r>
-          </a:p>
-        </p:txBody>
-      </p:sp>
-      <p:sp>
-        <p:nvSpPr>
-          <p:cNvPr id="18" name="TextBox 17"/>
+              <a:t>FairBanks counterpart</a:t>
+            </a:r>
+          </a:p>
+        </p:txBody>
+      </p:sp>
+      <p:sp>
+        <p:nvSpPr>
+          <p:cNvPr id="20" name="TextBox 19"/>
           <p:cNvSpPr txBox="1"/>
           <p:nvPr/>
         </p:nvSpPr>
         <p:spPr>
           <a:xfrm>
-            <a:off x="6035040" y="4155948"/>
-            <a:ext cx="5486400" cy="365760"/>
+            <a:off x="3931920" y="4023360"/>
+            <a:ext cx="5943600" cy="685800"/>
           </a:xfrm>
           <a:prstGeom prst="rect">
             <a:avLst/>
@@ -7362,51 +7215,81 @@
           <a:noFill/>
         </p:spPr>
         <p:txBody>
-          <a:bodyPr wrap="square" anchor="t">
+          <a:bodyPr wrap="square">
             <a:spAutoFit/>
           </a:bodyPr>
           <a:lstStyle/>
           <a:p>
-            <a:pPr algn="l">
-              <a:spcAft>
-                <a:spcPts val="0"/>
-              </a:spcAft>
-            </a:pPr>
-            <a:r>
-              <a:rPr sz="1200" b="0" i="0">
+            <a:pPr algn="l"/>
+            <a:r>
+              <a:rPr sz="1100" b="0" i="0">
                 <a:solidFill>
                   <a:srgbClr val="3A4A54"/>
                 </a:solidFill>
                 <a:latin typeface="Calibri"/>
               </a:rPr>
-              <a:t>Offline-capable CHW/VHT capture at household level</a:t>
-            </a:r>
-          </a:p>
-        </p:txBody>
-      </p:sp>
-      <p:sp>
-        <p:nvSpPr>
-          <p:cNvPr id="19" name="Rectangle 18"/>
+              <a:t>Field ops, CHW supervision, outreach, staff time</a:t>
+            </a:r>
+          </a:p>
+        </p:txBody>
+      </p:sp>
+      <p:sp>
+        <p:nvSpPr>
+          <p:cNvPr id="21" name="TextBox 20"/>
+          <p:cNvSpPr txBox="1"/>
+          <p:nvPr/>
+        </p:nvSpPr>
+        <p:spPr>
+          <a:xfrm>
+            <a:off x="10241280" y="4023360"/>
+            <a:ext cx="1097280" cy="320040"/>
+          </a:xfrm>
+          <a:prstGeom prst="rect">
+            <a:avLst/>
+          </a:prstGeom>
+          <a:noFill/>
+        </p:spPr>
+        <p:txBody>
+          <a:bodyPr wrap="square">
+            <a:spAutoFit/>
+          </a:bodyPr>
+          <a:lstStyle/>
+          <a:p>
+            <a:pPr algn="r"/>
+            <a:r>
+              <a:rPr sz="1200" b="1" i="0">
+                <a:solidFill>
+                  <a:srgbClr val="C45C26"/>
+                </a:solidFill>
+                <a:latin typeface="Calibri"/>
+              </a:rPr>
+              <a:t>20–25% in-kind</a:t>
+            </a:r>
+          </a:p>
+        </p:txBody>
+      </p:sp>
+      <p:sp>
+        <p:nvSpPr>
+          <p:cNvPr id="22" name="Rectangle 21"/>
           <p:cNvSpPr/>
           <p:nvPr/>
         </p:nvSpPr>
         <p:spPr>
           <a:xfrm>
-            <a:off x="5852160" y="4703064"/>
-            <a:ext cx="5852160" cy="766572"/>
+            <a:off x="457200" y="4892040"/>
+            <a:ext cx="11155680" cy="868680"/>
           </a:xfrm>
           <a:prstGeom prst="rect">
             <a:avLst/>
           </a:prstGeom>
           <a:solidFill>
-            <a:srgbClr val="FFFFFF"/>
+            <a:srgbClr val="E8F0F0"/>
           </a:solidFill>
-          <a:ln w="9525">
+          <a:ln>
             <a:solidFill>
               <a:srgbClr val="D0DCDC"/>
             </a:solidFill>
           </a:ln>
-          <a:effectLst/>
         </p:spPr>
         <p:style>
           <a:lnRef idx="1">
@@ -7432,14 +7315,14 @@
       </p:sp>
       <p:sp>
         <p:nvSpPr>
-          <p:cNvPr id="20" name="TextBox 19"/>
+          <p:cNvPr id="23" name="TextBox 22"/>
           <p:cNvSpPr txBox="1"/>
           <p:nvPr/>
         </p:nvSpPr>
         <p:spPr>
           <a:xfrm>
-            <a:off x="6035040" y="4757928"/>
-            <a:ext cx="5486400" cy="274320"/>
+            <a:off x="640080" y="4983480"/>
+            <a:ext cx="3200400" cy="320040"/>
           </a:xfrm>
           <a:prstGeom prst="rect">
             <a:avLst/>
@@ -7447,38 +7330,34 @@
           <a:noFill/>
         </p:spPr>
         <p:txBody>
-          <a:bodyPr wrap="square" anchor="t">
+          <a:bodyPr wrap="square">
             <a:spAutoFit/>
           </a:bodyPr>
           <a:lstStyle/>
           <a:p>
-            <a:pPr algn="l">
-              <a:spcAft>
-                <a:spcPts val="0"/>
-              </a:spcAft>
-            </a:pPr>
-            <a:r>
-              <a:rPr sz="1400" b="1" i="0">
-                <a:solidFill>
-                  <a:srgbClr val="0D6E6E"/>
+            <a:pPr algn="l"/>
+            <a:r>
+              <a:rPr sz="1200" b="1" i="0">
+                <a:solidFill>
+                  <a:srgbClr val="0A1F2E"/>
                 </a:solidFill>
                 <a:latin typeface="Calibri"/>
               </a:rPr>
-              <a:t>Cloud Computing</a:t>
-            </a:r>
-          </a:p>
-        </p:txBody>
-      </p:sp>
-      <p:sp>
-        <p:nvSpPr>
-          <p:cNvPr id="21" name="TextBox 20"/>
+              <a:t>Ceiling</a:t>
+            </a:r>
+          </a:p>
+        </p:txBody>
+      </p:sp>
+      <p:sp>
+        <p:nvSpPr>
+          <p:cNvPr id="24" name="TextBox 23"/>
           <p:cNvSpPr txBox="1"/>
           <p:nvPr/>
         </p:nvSpPr>
         <p:spPr>
           <a:xfrm>
-            <a:off x="6035040" y="5032248"/>
-            <a:ext cx="5486400" cy="365760"/>
+            <a:off x="3931920" y="4983480"/>
+            <a:ext cx="5943600" cy="685800"/>
           </a:xfrm>
           <a:prstGeom prst="rect">
             <a:avLst/>
@@ -7486,84 +7365,34 @@
           <a:noFill/>
         </p:spPr>
         <p:txBody>
-          <a:bodyPr wrap="square" anchor="t">
+          <a:bodyPr wrap="square">
             <a:spAutoFit/>
           </a:bodyPr>
           <a:lstStyle/>
           <a:p>
-            <a:pPr algn="l">
-              <a:spcAft>
-                <a:spcPts val="0"/>
-              </a:spcAft>
-            </a:pPr>
-            <a:r>
-              <a:rPr sz="1200" b="0" i="0">
+            <a:pPr algn="l"/>
+            <a:r>
+              <a:rPr sz="1100" b="0" i="0">
                 <a:solidFill>
                   <a:srgbClr val="3A4A54"/>
                 </a:solidFill>
                 <a:latin typeface="Calibri"/>
               </a:rPr>
-              <a:t>Secure sync across facilities and partners</a:t>
-            </a:r>
-          </a:p>
-        </p:txBody>
-      </p:sp>
-      <p:sp>
-        <p:nvSpPr>
-          <p:cNvPr id="22" name="Rectangle 21"/>
-          <p:cNvSpPr/>
-          <p:nvPr/>
-        </p:nvSpPr>
-        <p:spPr>
-          <a:xfrm>
-            <a:off x="5852160" y="5579364"/>
-            <a:ext cx="5852160" cy="766572"/>
-          </a:xfrm>
-          <a:prstGeom prst="rect">
-            <a:avLst/>
-          </a:prstGeom>
-          <a:solidFill>
-            <a:srgbClr val="FFFFFF"/>
-          </a:solidFill>
-          <a:ln w="9525">
-            <a:solidFill>
-              <a:srgbClr val="D0DCDC"/>
-            </a:solidFill>
-          </a:ln>
-          <a:effectLst/>
-        </p:spPr>
-        <p:style>
-          <a:lnRef idx="1">
-            <a:schemeClr val="accent1"/>
-          </a:lnRef>
-          <a:fillRef idx="3">
-            <a:schemeClr val="accent1"/>
-          </a:fillRef>
-          <a:effectRef idx="2">
-            <a:schemeClr val="accent1"/>
-          </a:effectRef>
-          <a:fontRef idx="minor">
-            <a:schemeClr val="lt1"/>
-          </a:fontRef>
-        </p:style>
-        <p:txBody>
-          <a:bodyPr rtlCol="0" anchor="ctr"/>
-          <a:lstStyle/>
-          <a:p>
-            <a:pPr algn="ctr"/>
-          </a:p>
-        </p:txBody>
-      </p:sp>
-      <p:sp>
-        <p:nvSpPr>
-          <p:cNvPr id="23" name="TextBox 22"/>
+              <a:t>Per IFAD call</a:t>
+            </a:r>
+          </a:p>
+        </p:txBody>
+      </p:sp>
+      <p:sp>
+        <p:nvSpPr>
+          <p:cNvPr id="25" name="TextBox 24"/>
           <p:cNvSpPr txBox="1"/>
           <p:nvPr/>
         </p:nvSpPr>
         <p:spPr>
           <a:xfrm>
-            <a:off x="6035040" y="5634228"/>
-            <a:ext cx="5486400" cy="274320"/>
+            <a:off x="10241280" y="4983480"/>
+            <a:ext cx="1097280" cy="320040"/>
           </a:xfrm>
           <a:prstGeom prst="rect">
             <a:avLst/>
@@ -7571,77 +7400,34 @@
           <a:noFill/>
         </p:spPr>
         <p:txBody>
-          <a:bodyPr wrap="square" anchor="t">
+          <a:bodyPr wrap="square">
             <a:spAutoFit/>
           </a:bodyPr>
           <a:lstStyle/>
           <a:p>
-            <a:pPr algn="l">
-              <a:spcAft>
-                <a:spcPts val="0"/>
-              </a:spcAft>
-            </a:pPr>
-            <a:r>
-              <a:rPr sz="1400" b="1" i="0">
-                <a:solidFill>
-                  <a:srgbClr val="0D6E6E"/>
+            <a:pPr algn="r"/>
+            <a:r>
+              <a:rPr sz="1200" b="1" i="0">
+                <a:solidFill>
+                  <a:srgbClr val="C45C26"/>
                 </a:solidFill>
                 <a:latin typeface="Calibri"/>
               </a:rPr>
-              <a:t>Analytics Dashboards</a:t>
-            </a:r>
-          </a:p>
-        </p:txBody>
-      </p:sp>
-      <p:sp>
-        <p:nvSpPr>
-          <p:cNvPr id="24" name="TextBox 23"/>
-          <p:cNvSpPr txBox="1"/>
-          <p:nvPr/>
-        </p:nvSpPr>
-        <p:spPr>
-          <a:xfrm>
-            <a:off x="6035040" y="5908548"/>
-            <a:ext cx="5486400" cy="365760"/>
-          </a:xfrm>
-          <a:prstGeom prst="rect">
-            <a:avLst/>
-          </a:prstGeom>
-          <a:noFill/>
-        </p:spPr>
-        <p:txBody>
-          <a:bodyPr wrap="square" anchor="t">
-            <a:spAutoFit/>
-          </a:bodyPr>
-          <a:lstStyle/>
-          <a:p>
-            <a:pPr algn="l">
-              <a:spcAft>
-                <a:spcPts val="0"/>
-              </a:spcAft>
-            </a:pPr>
-            <a:r>
-              <a:rPr sz="1200" b="0" i="0">
-                <a:solidFill>
-                  <a:srgbClr val="3A4A54"/>
-                </a:solidFill>
-                <a:latin typeface="Calibri"/>
-              </a:rPr>
-              <a:t>Real-time views for clinics, districts, and NGOs</a:t>
-            </a:r>
-          </a:p>
-        </p:txBody>
-      </p:sp>
-      <p:sp>
-        <p:nvSpPr>
-          <p:cNvPr id="25" name="Rectangle 24"/>
+              <a:t>Up to US$1.2M</a:t>
+            </a:r>
+          </a:p>
+        </p:txBody>
+      </p:sp>
+      <p:sp>
+        <p:nvSpPr>
+          <p:cNvPr id="26" name="Rectangle 25"/>
           <p:cNvSpPr/>
           <p:nvPr/>
         </p:nvSpPr>
         <p:spPr>
           <a:xfrm>
-            <a:off x="0" y="6565392"/>
-            <a:ext cx="12191695" cy="292608"/>
+            <a:off x="0" y="6583680"/>
+            <a:ext cx="12191695" cy="274320"/>
           </a:xfrm>
           <a:prstGeom prst="rect">
             <a:avLst/>
@@ -7652,7 +7438,6 @@
           <a:ln>
             <a:noFill/>
           </a:ln>
-          <a:effectLst/>
         </p:spPr>
         <p:style>
           <a:lnRef idx="1">
@@ -7678,14 +7463,14 @@
       </p:sp>
       <p:sp>
         <p:nvSpPr>
-          <p:cNvPr id="26" name="TextBox 25"/>
+          <p:cNvPr id="27" name="TextBox 26"/>
           <p:cNvSpPr txBox="1"/>
           <p:nvPr/>
         </p:nvSpPr>
         <p:spPr>
           <a:xfrm>
-            <a:off x="365760" y="6574536"/>
-            <a:ext cx="9144000" cy="274320"/>
+            <a:off x="365760" y="6592824"/>
+            <a:ext cx="9144000" cy="256032"/>
           </a:xfrm>
           <a:prstGeom prst="rect">
             <a:avLst/>
@@ -7693,16 +7478,12 @@
           <a:noFill/>
         </p:spPr>
         <p:txBody>
-          <a:bodyPr wrap="square" anchor="ctr">
+          <a:bodyPr wrap="square">
             <a:spAutoFit/>
           </a:bodyPr>
           <a:lstStyle/>
           <a:p>
-            <a:pPr algn="l">
-              <a:spcAft>
-                <a:spcPts val="0"/>
-              </a:spcAft>
-            </a:pPr>
+            <a:pPr algn="l"/>
             <a:r>
               <a:rPr sz="900" b="0" i="0">
                 <a:solidFill>
@@ -7710,21 +7491,21 @@
                 </a:solidFill>
                 <a:latin typeface="Calibri"/>
               </a:rPr>
-              <a:t>FairBanks FCHIP  |  IFAD Grant — Rural Sector Performance As  |  Your health, our mission.</a:t>
-            </a:r>
-          </a:p>
-        </p:txBody>
-      </p:sp>
-      <p:sp>
-        <p:nvSpPr>
-          <p:cNvPr id="27" name="TextBox 26"/>
+              <a:t>FairBanks FCHIP | IFAD Rural Performance | Your health, our mission.</a:t>
+            </a:r>
+          </a:p>
+        </p:txBody>
+      </p:sp>
+      <p:sp>
+        <p:nvSpPr>
+          <p:cNvPr id="28" name="TextBox 27"/>
           <p:cNvSpPr txBox="1"/>
           <p:nvPr/>
         </p:nvSpPr>
         <p:spPr>
           <a:xfrm>
-            <a:off x="11094415" y="6574536"/>
-            <a:ext cx="731520" cy="274320"/>
+            <a:off x="11460175" y="6592824"/>
+            <a:ext cx="457200" cy="256032"/>
           </a:xfrm>
           <a:prstGeom prst="rect">
             <a:avLst/>
@@ -7732,16 +7513,12 @@
           <a:noFill/>
         </p:spPr>
         <p:txBody>
-          <a:bodyPr wrap="square" anchor="ctr">
+          <a:bodyPr wrap="square">
             <a:spAutoFit/>
           </a:bodyPr>
           <a:lstStyle/>
           <a:p>
-            <a:pPr algn="r">
-              <a:spcAft>
-                <a:spcPts val="0"/>
-              </a:spcAft>
-            </a:pPr>
+            <a:pPr algn="r"/>
             <a:r>
               <a:rPr sz="900" b="0" i="0">
                 <a:solidFill>
@@ -7781,7 +7558,7 @@
         <p:spPr>
           <a:xfrm>
             <a:off x="0" y="0"/>
-            <a:ext cx="12191695" cy="960120"/>
+            <a:ext cx="12191695" cy="914400"/>
           </a:xfrm>
           <a:prstGeom prst="rect">
             <a:avLst/>
@@ -7792,7 +7569,6 @@
           <a:ln>
             <a:noFill/>
           </a:ln>
-          <a:effectLst/>
         </p:spPr>
         <p:style>
           <a:lnRef idx="1">
@@ -7825,7 +7601,7 @@
         <p:spPr>
           <a:xfrm>
             <a:off x="0" y="0"/>
-            <a:ext cx="164592" cy="960120"/>
+            <a:ext cx="137160" cy="914400"/>
           </a:xfrm>
           <a:prstGeom prst="rect">
             <a:avLst/>
@@ -7836,7 +7612,6 @@
           <a:ln>
             <a:noFill/>
           </a:ln>
-          <a:effectLst/>
         </p:spPr>
         <p:style>
           <a:lnRef idx="1">
@@ -7868,86 +7643,8 @@
         </p:nvSpPr>
         <p:spPr>
           <a:xfrm>
-            <a:off x="457200" y="109728"/>
-            <a:ext cx="10972800" cy="256032"/>
-          </a:xfrm>
-          <a:prstGeom prst="rect">
-            <a:avLst/>
-          </a:prstGeom>
-          <a:noFill/>
-        </p:spPr>
-        <p:txBody>
-          <a:bodyPr wrap="square" anchor="t">
-            <a:spAutoFit/>
-          </a:bodyPr>
-          <a:lstStyle/>
-          <a:p>
-            <a:pPr algn="l">
-              <a:spcAft>
-                <a:spcPts val="0"/>
-              </a:spcAft>
-            </a:pPr>
-            <a:r>
-              <a:rPr sz="1100" b="1" i="0">
-                <a:solidFill>
-                  <a:srgbClr val="C45C26"/>
-                </a:solidFill>
-                <a:latin typeface="Calibri"/>
-              </a:rPr>
-              <a:t>OUR MODEL</a:t>
-            </a:r>
-          </a:p>
-        </p:txBody>
-      </p:sp>
-      <p:sp>
-        <p:nvSpPr>
-          <p:cNvPr id="5" name="TextBox 4"/>
-          <p:cNvSpPr txBox="1"/>
-          <p:nvPr/>
-        </p:nvSpPr>
-        <p:spPr>
-          <a:xfrm>
-            <a:off x="457200" y="384048"/>
-            <a:ext cx="11247120" cy="475488"/>
-          </a:xfrm>
-          <a:prstGeom prst="rect">
-            <a:avLst/>
-          </a:prstGeom>
-          <a:noFill/>
-        </p:spPr>
-        <p:txBody>
-          <a:bodyPr wrap="square" anchor="t">
-            <a:spAutoFit/>
-          </a:bodyPr>
-          <a:lstStyle/>
-          <a:p>
-            <a:pPr algn="l">
-              <a:spcAft>
-                <a:spcPts val="0"/>
-              </a:spcAft>
-            </a:pPr>
-            <a:r>
-              <a:rPr sz="2200" b="1" i="0">
-                <a:solidFill>
-                  <a:srgbClr val="0A1F2E"/>
-                </a:solidFill>
-                <a:latin typeface="Calibri"/>
-              </a:rPr>
-              <a:t>Communities first — intelligence that serves care</a:t>
-            </a:r>
-          </a:p>
-        </p:txBody>
-      </p:sp>
-      <p:sp>
-        <p:nvSpPr>
-          <p:cNvPr id="6" name="TextBox 5"/>
-          <p:cNvSpPr txBox="1"/>
-          <p:nvPr/>
-        </p:nvSpPr>
-        <p:spPr>
-          <a:xfrm>
-            <a:off x="502920" y="1234440"/>
-            <a:ext cx="5760720" cy="5074920"/>
+            <a:off x="411480" y="91440"/>
+            <a:ext cx="10972800" cy="274320"/>
           </a:xfrm>
           <a:prstGeom prst="rect">
             <a:avLst/>
@@ -7960,137 +7657,294 @@
           </a:bodyPr>
           <a:lstStyle/>
           <a:p>
-            <a:pPr>
-              <a:spcAft>
-                <a:spcPts val="800"/>
-              </a:spcAft>
-            </a:pPr>
-            <a:r>
-              <a:rPr sz="1400">
-                <a:solidFill>
-                  <a:srgbClr val="1E2F38"/>
+            <a:pPr algn="l"/>
+            <a:r>
+              <a:rPr sz="1100" b="1" i="0">
+                <a:solidFill>
+                  <a:srgbClr val="C45C26"/>
                 </a:solidFill>
                 <a:latin typeface="Calibri"/>
               </a:rPr>
-              <a:t>•  Community members identify needs and own solutions</a:t>
-            </a:r>
-          </a:p>
-          <a:p>
-            <a:pPr>
-              <a:spcAft>
-                <a:spcPts val="800"/>
-              </a:spcAft>
-            </a:pPr>
-            <a:r>
-              <a:rPr sz="1400">
-                <a:solidFill>
-                  <a:srgbClr val="1E2F38"/>
+              <a:t>WIN-WIN</a:t>
+            </a:r>
+          </a:p>
+        </p:txBody>
+      </p:sp>
+      <p:sp>
+        <p:nvSpPr>
+          <p:cNvPr id="5" name="TextBox 4"/>
+          <p:cNvSpPr txBox="1"/>
+          <p:nvPr/>
+        </p:nvSpPr>
+        <p:spPr>
+          <a:xfrm>
+            <a:off x="411480" y="384048"/>
+            <a:ext cx="10972800" cy="457200"/>
+          </a:xfrm>
+          <a:prstGeom prst="rect">
+            <a:avLst/>
+          </a:prstGeom>
+          <a:noFill/>
+        </p:spPr>
+        <p:txBody>
+          <a:bodyPr wrap="square">
+            <a:spAutoFit/>
+          </a:bodyPr>
+          <a:lstStyle/>
+          <a:p>
+            <a:pPr algn="l"/>
+            <a:r>
+              <a:rPr sz="2400" b="1" i="0">
+                <a:solidFill>
+                  <a:srgbClr val="0A1F2E"/>
                 </a:solidFill>
                 <a:latin typeface="Calibri"/>
               </a:rPr>
-              <a:t>•  CHWs / VHTs bridge homes to clinics</a:t>
-            </a:r>
-          </a:p>
-          <a:p>
-            <a:pPr>
-              <a:spcAft>
-                <a:spcPts val="800"/>
-              </a:spcAft>
-            </a:pPr>
-            <a:r>
-              <a:rPr sz="1400">
-                <a:solidFill>
-                  <a:srgbClr val="1E2F38"/>
+              <a:t>FairBanks ↔ IFAD ↔ rural families</a:t>
+            </a:r>
+          </a:p>
+        </p:txBody>
+      </p:sp>
+      <p:sp>
+        <p:nvSpPr>
+          <p:cNvPr id="6" name="Rectangle 5"/>
+          <p:cNvSpPr/>
+          <p:nvPr/>
+        </p:nvSpPr>
+        <p:spPr>
+          <a:xfrm>
+            <a:off x="457200" y="1188720"/>
+            <a:ext cx="5394960" cy="4754880"/>
+          </a:xfrm>
+          <a:prstGeom prst="rect">
+            <a:avLst/>
+          </a:prstGeom>
+          <a:solidFill>
+            <a:srgbClr val="FFFFFF"/>
+          </a:solidFill>
+          <a:ln>
+            <a:solidFill>
+              <a:srgbClr val="D0DCDC"/>
+            </a:solidFill>
+          </a:ln>
+        </p:spPr>
+        <p:style>
+          <a:lnRef idx="1">
+            <a:schemeClr val="accent1"/>
+          </a:lnRef>
+          <a:fillRef idx="3">
+            <a:schemeClr val="accent1"/>
+          </a:fillRef>
+          <a:effectRef idx="2">
+            <a:schemeClr val="accent1"/>
+          </a:effectRef>
+          <a:fontRef idx="minor">
+            <a:schemeClr val="lt1"/>
+          </a:fontRef>
+        </p:style>
+        <p:txBody>
+          <a:bodyPr rtlCol="0" anchor="ctr"/>
+          <a:lstStyle/>
+          <a:p>
+            <a:pPr algn="ctr"/>
+          </a:p>
+        </p:txBody>
+      </p:sp>
+      <p:sp>
+        <p:nvSpPr>
+          <p:cNvPr id="7" name="TextBox 6"/>
+          <p:cNvSpPr txBox="1"/>
+          <p:nvPr/>
+        </p:nvSpPr>
+        <p:spPr>
+          <a:xfrm>
+            <a:off x="640080" y="1371600"/>
+            <a:ext cx="5029200" cy="365760"/>
+          </a:xfrm>
+          <a:prstGeom prst="rect">
+            <a:avLst/>
+          </a:prstGeom>
+          <a:noFill/>
+        </p:spPr>
+        <p:txBody>
+          <a:bodyPr wrap="square">
+            <a:spAutoFit/>
+          </a:bodyPr>
+          <a:lstStyle/>
+          <a:p>
+            <a:pPr algn="l"/>
+            <a:r>
+              <a:rPr sz="1600" b="1" i="0">
+                <a:solidFill>
+                  <a:srgbClr val="0D6E6E"/>
                 </a:solidFill>
                 <a:latin typeface="Calibri"/>
               </a:rPr>
-              <a:t>•  FairBanks Community Reach programmes deliver outreach</a:t>
-            </a:r>
-          </a:p>
-          <a:p>
-            <a:pPr>
-              <a:spcAft>
-                <a:spcPts val="800"/>
-              </a:spcAft>
-            </a:pPr>
-            <a:r>
-              <a:rPr sz="1400">
-                <a:solidFill>
-                  <a:srgbClr val="1E2F38"/>
+              <a:t>FairBanks gains</a:t>
+            </a:r>
+          </a:p>
+        </p:txBody>
+      </p:sp>
+      <p:sp>
+        <p:nvSpPr>
+          <p:cNvPr id="8" name="TextBox 7"/>
+          <p:cNvSpPr txBox="1"/>
+          <p:nvPr/>
+        </p:nvSpPr>
+        <p:spPr>
+          <a:xfrm>
+            <a:off x="640080" y="1828800"/>
+            <a:ext cx="5029200" cy="3657600"/>
+          </a:xfrm>
+          <a:prstGeom prst="rect">
+            <a:avLst/>
+          </a:prstGeom>
+          <a:noFill/>
+        </p:spPr>
+        <p:txBody>
+          <a:bodyPr wrap="square">
+            <a:spAutoFit/>
+          </a:bodyPr>
+          <a:lstStyle/>
+          <a:p>
+            <a:pPr algn="l"/>
+            <a:r>
+              <a:rPr sz="1400" b="0" i="0">
+                <a:solidFill>
+                  <a:srgbClr val="3A4A54"/>
                 </a:solidFill>
                 <a:latin typeface="Calibri"/>
               </a:rPr>
-              <a:t>•  FairBanks Medical Centre provides clinical care</a:t>
-            </a:r>
-          </a:p>
-          <a:p>
-            <a:pPr>
-              <a:spcAft>
-                <a:spcPts val="800"/>
-              </a:spcAft>
-            </a:pPr>
-            <a:r>
-              <a:rPr sz="1400">
-                <a:solidFill>
-                  <a:srgbClr val="1E2F38"/>
+              <a:t>Resources to connect health intelligence with rural livelihood policy; university partnerships; evidence that prevention protects income and food security.</a:t>
+            </a:r>
+          </a:p>
+        </p:txBody>
+      </p:sp>
+      <p:sp>
+        <p:nvSpPr>
+          <p:cNvPr id="9" name="Rectangle 8"/>
+          <p:cNvSpPr/>
+          <p:nvPr/>
+        </p:nvSpPr>
+        <p:spPr>
+          <a:xfrm>
+            <a:off x="6217920" y="1188720"/>
+            <a:ext cx="5394960" cy="4754880"/>
+          </a:xfrm>
+          <a:prstGeom prst="rect">
+            <a:avLst/>
+          </a:prstGeom>
+          <a:solidFill>
+            <a:srgbClr val="FFFFFF"/>
+          </a:solidFill>
+          <a:ln>
+            <a:solidFill>
+              <a:srgbClr val="D0DCDC"/>
+            </a:solidFill>
+          </a:ln>
+        </p:spPr>
+        <p:style>
+          <a:lnRef idx="1">
+            <a:schemeClr val="accent1"/>
+          </a:lnRef>
+          <a:fillRef idx="3">
+            <a:schemeClr val="accent1"/>
+          </a:fillRef>
+          <a:effectRef idx="2">
+            <a:schemeClr val="accent1"/>
+          </a:effectRef>
+          <a:fontRef idx="minor">
+            <a:schemeClr val="lt1"/>
+          </a:fontRef>
+        </p:style>
+        <p:txBody>
+          <a:bodyPr rtlCol="0" anchor="ctr"/>
+          <a:lstStyle/>
+          <a:p>
+            <a:pPr algn="ctr"/>
+          </a:p>
+        </p:txBody>
+      </p:sp>
+      <p:sp>
+        <p:nvSpPr>
+          <p:cNvPr id="10" name="TextBox 9"/>
+          <p:cNvSpPr txBox="1"/>
+          <p:nvPr/>
+        </p:nvSpPr>
+        <p:spPr>
+          <a:xfrm>
+            <a:off x="6400800" y="1371600"/>
+            <a:ext cx="5029200" cy="365760"/>
+          </a:xfrm>
+          <a:prstGeom prst="rect">
+            <a:avLst/>
+          </a:prstGeom>
+          <a:noFill/>
+        </p:spPr>
+        <p:txBody>
+          <a:bodyPr wrap="square">
+            <a:spAutoFit/>
+          </a:bodyPr>
+          <a:lstStyle/>
+          <a:p>
+            <a:pPr algn="l"/>
+            <a:r>
+              <a:rPr sz="1600" b="1" i="0">
+                <a:solidFill>
+                  <a:srgbClr val="0D6E6E"/>
                 </a:solidFill>
                 <a:latin typeface="Calibri"/>
               </a:rPr>
-              <a:t>•  Research, partnerships, and skills strengthen the system</a:t>
-            </a:r>
-          </a:p>
-          <a:p>
-            <a:pPr>
-              <a:spcAft>
-                <a:spcPts val="800"/>
-              </a:spcAft>
-            </a:pPr>
-            <a:r>
-              <a:rPr sz="1400">
-                <a:solidFill>
-                  <a:srgbClr val="1E2F38"/>
+              <a:t>IFAD gains</a:t>
+            </a:r>
+          </a:p>
+        </p:txBody>
+      </p:sp>
+      <p:sp>
+        <p:nvSpPr>
+          <p:cNvPr id="11" name="TextBox 10"/>
+          <p:cNvSpPr txBox="1"/>
+          <p:nvPr/>
+        </p:nvSpPr>
+        <p:spPr>
+          <a:xfrm>
+            <a:off x="6400800" y="1828800"/>
+            <a:ext cx="5029200" cy="3657600"/>
+          </a:xfrm>
+          <a:prstGeom prst="rect">
+            <a:avLst/>
+          </a:prstGeom>
+          <a:noFill/>
+        </p:spPr>
+        <p:txBody>
+          <a:bodyPr wrap="square">
+            <a:spAutoFit/>
+          </a:bodyPr>
+          <a:lstStyle/>
+          <a:p>
+            <a:pPr algn="l"/>
+            <a:r>
+              <a:rPr sz="1400" b="0" i="0">
+                <a:solidFill>
+                  <a:srgbClr val="3A4A54"/>
                 </a:solidFill>
                 <a:latin typeface="Calibri"/>
               </a:rPr>
-              <a:t>•  Livelihoods and empowerment make health gains last</a:t>
-            </a:r>
-          </a:p>
-        </p:txBody>
-      </p:sp>
-      <p:pic>
-        <p:nvPicPr>
-          <p:cNvPr id="7" name="Picture 6" descr="gis_hotspots_opt.jpg"/>
-          <p:cNvPicPr>
-            <a:picLocks noChangeAspect="1"/>
-          </p:cNvPicPr>
-          <p:nvPr/>
-        </p:nvPicPr>
-        <p:blipFill>
-          <a:blip r:embed="rId2"/>
-          <a:stretch>
-            <a:fillRect/>
-          </a:stretch>
-        </p:blipFill>
-        <p:spPr>
-          <a:xfrm>
-            <a:off x="6492240" y="2035160"/>
-            <a:ext cx="5212080" cy="3473479"/>
-          </a:xfrm>
-          <a:prstGeom prst="rect">
-            <a:avLst/>
-          </a:prstGeom>
-        </p:spPr>
-      </p:pic>
-      <p:sp>
-        <p:nvSpPr>
-          <p:cNvPr id="8" name="Rectangle 7"/>
+              <a:t>Ground-level health and vulnerability data from community programmes; social-enterprise implementer with field access; SDG-aligned health-shock narrative; counterpart contribution via live operations.</a:t>
+            </a:r>
+          </a:p>
+        </p:txBody>
+      </p:sp>
+      <p:sp>
+        <p:nvSpPr>
+          <p:cNvPr id="12" name="Rectangle 11"/>
           <p:cNvSpPr/>
           <p:nvPr/>
         </p:nvSpPr>
         <p:spPr>
           <a:xfrm>
-            <a:off x="0" y="6565392"/>
-            <a:ext cx="12191695" cy="292608"/>
+            <a:off x="0" y="6583680"/>
+            <a:ext cx="12191695" cy="274320"/>
           </a:xfrm>
           <a:prstGeom prst="rect">
             <a:avLst/>
@@ -8101,7 +7955,6 @@
           <a:ln>
             <a:noFill/>
           </a:ln>
-          <a:effectLst/>
         </p:spPr>
         <p:style>
           <a:lnRef idx="1">
@@ -8127,14 +7980,14 @@
       </p:sp>
       <p:sp>
         <p:nvSpPr>
-          <p:cNvPr id="9" name="TextBox 8"/>
+          <p:cNvPr id="13" name="TextBox 12"/>
           <p:cNvSpPr txBox="1"/>
           <p:nvPr/>
         </p:nvSpPr>
         <p:spPr>
           <a:xfrm>
-            <a:off x="365760" y="6574536"/>
-            <a:ext cx="9144000" cy="274320"/>
+            <a:off x="365760" y="6592824"/>
+            <a:ext cx="9144000" cy="256032"/>
           </a:xfrm>
           <a:prstGeom prst="rect">
             <a:avLst/>
@@ -8142,16 +7995,12 @@
           <a:noFill/>
         </p:spPr>
         <p:txBody>
-          <a:bodyPr wrap="square" anchor="ctr">
+          <a:bodyPr wrap="square">
             <a:spAutoFit/>
           </a:bodyPr>
           <a:lstStyle/>
           <a:p>
-            <a:pPr algn="l">
-              <a:spcAft>
-                <a:spcPts val="0"/>
-              </a:spcAft>
-            </a:pPr>
+            <a:pPr algn="l"/>
             <a:r>
               <a:rPr sz="900" b="0" i="0">
                 <a:solidFill>
@@ -8159,21 +8008,21 @@
                 </a:solidFill>
                 <a:latin typeface="Calibri"/>
               </a:rPr>
-              <a:t>FairBanks FCHIP  |  IFAD Grant — Rural Sector Performance As  |  Your health, our mission.</a:t>
-            </a:r>
-          </a:p>
-        </p:txBody>
-      </p:sp>
-      <p:sp>
-        <p:nvSpPr>
-          <p:cNvPr id="10" name="TextBox 9"/>
+              <a:t>FairBanks FCHIP | IFAD Rural Performance | Your health, our mission.</a:t>
+            </a:r>
+          </a:p>
+        </p:txBody>
+      </p:sp>
+      <p:sp>
+        <p:nvSpPr>
+          <p:cNvPr id="14" name="TextBox 13"/>
           <p:cNvSpPr txBox="1"/>
           <p:nvPr/>
         </p:nvSpPr>
         <p:spPr>
           <a:xfrm>
-            <a:off x="11094415" y="6574536"/>
-            <a:ext cx="731520" cy="274320"/>
+            <a:off x="11460175" y="6592824"/>
+            <a:ext cx="457200" cy="256032"/>
           </a:xfrm>
           <a:prstGeom prst="rect">
             <a:avLst/>
@@ -8181,16 +8030,12 @@
           <a:noFill/>
         </p:spPr>
         <p:txBody>
-          <a:bodyPr wrap="square" anchor="ctr">
+          <a:bodyPr wrap="square">
             <a:spAutoFit/>
           </a:bodyPr>
           <a:lstStyle/>
           <a:p>
-            <a:pPr algn="r">
-              <a:spcAft>
-                <a:spcPts val="0"/>
-              </a:spcAft>
-            </a:pPr>
+            <a:pPr algn="r"/>
             <a:r>
               <a:rPr sz="900" b="0" i="0">
                 <a:solidFill>

--- a/applications/ifad/documents/ifad_ppt.pptx
+++ b/applications/ifad/documents/ifad_ppt.pptx
@@ -3208,7 +3208,7 @@
         <p:spPr>
           <a:xfrm>
             <a:off x="548640" y="4389120"/>
-            <a:ext cx="10972800" cy="594360"/>
+            <a:ext cx="10972800" cy="502920"/>
           </a:xfrm>
           <a:prstGeom prst="rect">
             <a:avLst/>
@@ -3223,7 +3223,7 @@
           <a:p>
             <a:pPr algn="l"/>
             <a:r>
-              <a:rPr sz="2400" b="1" i="0">
+              <a:rPr sz="2200" b="1" i="0">
                 <a:solidFill>
                   <a:srgbClr val="FFFFFF"/>
                 </a:solidFill>
@@ -3242,8 +3242,8 @@
         </p:nvSpPr>
         <p:spPr>
           <a:xfrm>
-            <a:off x="548640" y="5166360"/>
-            <a:ext cx="10972800" cy="365760"/>
+            <a:off x="548640" y="4892040"/>
+            <a:ext cx="10972800" cy="274320"/>
           </a:xfrm>
           <a:prstGeom prst="rect">
             <a:avLst/>
@@ -3258,6 +3258,41 @@
           <a:p>
             <a:pPr algn="l"/>
             <a:r>
+              <a:rPr sz="1300" b="1" i="1">
+                <a:solidFill>
+                  <a:srgbClr val="F2C79B"/>
+                </a:solidFill>
+                <a:latin typeface="Calibri"/>
+              </a:rPr>
+              <a:t>FairBanks Community Health Intelligence Platform (FCHIP)</a:t>
+            </a:r>
+          </a:p>
+        </p:txBody>
+      </p:sp>
+      <p:sp>
+        <p:nvSpPr>
+          <p:cNvPr id="7" name="TextBox 6"/>
+          <p:cNvSpPr txBox="1"/>
+          <p:nvPr/>
+        </p:nvSpPr>
+        <p:spPr>
+          <a:xfrm>
+            <a:off x="548640" y="5257800"/>
+            <a:ext cx="10972800" cy="320040"/>
+          </a:xfrm>
+          <a:prstGeom prst="rect">
+            <a:avLst/>
+          </a:prstGeom>
+          <a:noFill/>
+        </p:spPr>
+        <p:txBody>
+          <a:bodyPr wrap="square">
+            <a:spAutoFit/>
+          </a:bodyPr>
+          <a:lstStyle/>
+          <a:p>
+            <a:pPr algn="l"/>
+            <a:r>
               <a:rPr sz="1400" b="1" i="0">
                 <a:solidFill>
                   <a:srgbClr val="FFFFFF"/>
@@ -3271,7 +3306,7 @@
       </p:sp>
       <p:sp>
         <p:nvSpPr>
-          <p:cNvPr id="7" name="TextBox 6"/>
+          <p:cNvPr id="8" name="TextBox 7"/>
           <p:cNvSpPr txBox="1"/>
           <p:nvPr/>
         </p:nvSpPr>

--- a/applications/ifad/documents/ifad_ppt.pptx
+++ b/applications/ifad/documents/ifad_ppt.pptx
@@ -3186,7 +3186,17 @@
           </a:bodyPr>
           <a:lstStyle/>
           <a:p>
-            <a:pPr algn="l"/>
+            <a:pPr algn="l">
+              <a:lnSpc>
+                <a:spcPct val="115000"/>
+              </a:lnSpc>
+              <a:spcBef>
+                <a:spcPts val="0"/>
+              </a:spcBef>
+              <a:spcAft>
+                <a:spcPts val="200"/>
+              </a:spcAft>
+            </a:pPr>
             <a:r>
               <a:rPr sz="1300" b="1" i="0">
                 <a:solidFill>
@@ -3221,7 +3231,17 @@
           </a:bodyPr>
           <a:lstStyle/>
           <a:p>
-            <a:pPr algn="l"/>
+            <a:pPr algn="l">
+              <a:lnSpc>
+                <a:spcPct val="115000"/>
+              </a:lnSpc>
+              <a:spcBef>
+                <a:spcPts val="0"/>
+              </a:spcBef>
+              <a:spcAft>
+                <a:spcPts val="200"/>
+              </a:spcAft>
+            </a:pPr>
             <a:r>
               <a:rPr sz="2200" b="1" i="0">
                 <a:solidFill>
@@ -3256,7 +3276,17 @@
           </a:bodyPr>
           <a:lstStyle/>
           <a:p>
-            <a:pPr algn="l"/>
+            <a:pPr algn="l">
+              <a:lnSpc>
+                <a:spcPct val="115000"/>
+              </a:lnSpc>
+              <a:spcBef>
+                <a:spcPts val="0"/>
+              </a:spcBef>
+              <a:spcAft>
+                <a:spcPts val="200"/>
+              </a:spcAft>
+            </a:pPr>
             <a:r>
               <a:rPr sz="1300" b="1" i="1">
                 <a:solidFill>
@@ -3291,7 +3321,17 @@
           </a:bodyPr>
           <a:lstStyle/>
           <a:p>
-            <a:pPr algn="l"/>
+            <a:pPr algn="l">
+              <a:lnSpc>
+                <a:spcPct val="115000"/>
+              </a:lnSpc>
+              <a:spcBef>
+                <a:spcPts val="0"/>
+              </a:spcBef>
+              <a:spcAft>
+                <a:spcPts val="200"/>
+              </a:spcAft>
+            </a:pPr>
             <a:r>
               <a:rPr sz="1400" b="1" i="0">
                 <a:solidFill>
@@ -3326,7 +3366,17 @@
           </a:bodyPr>
           <a:lstStyle/>
           <a:p>
-            <a:pPr algn="l"/>
+            <a:pPr algn="l">
+              <a:lnSpc>
+                <a:spcPct val="115000"/>
+              </a:lnSpc>
+              <a:spcBef>
+                <a:spcPts val="0"/>
+              </a:spcBef>
+              <a:spcAft>
+                <a:spcPts val="200"/>
+              </a:spcAft>
+            </a:pPr>
             <a:r>
               <a:rPr sz="1100" b="0" i="0">
                 <a:solidFill>
@@ -3446,7 +3496,17 @@
           </a:bodyPr>
           <a:lstStyle/>
           <a:p>
-            <a:pPr algn="l"/>
+            <a:pPr algn="l">
+              <a:lnSpc>
+                <a:spcPct val="115000"/>
+              </a:lnSpc>
+              <a:spcBef>
+                <a:spcPts val="0"/>
+              </a:spcBef>
+              <a:spcAft>
+                <a:spcPts val="200"/>
+              </a:spcAft>
+            </a:pPr>
             <a:r>
               <a:rPr sz="2400" b="1" i="0">
                 <a:solidFill>
@@ -3481,7 +3541,17 @@
           </a:bodyPr>
           <a:lstStyle/>
           <a:p>
-            <a:pPr algn="l"/>
+            <a:pPr algn="l">
+              <a:lnSpc>
+                <a:spcPct val="115000"/>
+              </a:lnSpc>
+              <a:spcBef>
+                <a:spcPts val="0"/>
+              </a:spcBef>
+              <a:spcAft>
+                <a:spcPts val="200"/>
+              </a:spcAft>
+            </a:pPr>
             <a:r>
               <a:rPr sz="1400" b="1" i="0">
                 <a:solidFill>
@@ -3620,7 +3690,17 @@
           </a:bodyPr>
           <a:lstStyle/>
           <a:p>
-            <a:pPr algn="l"/>
+            <a:pPr algn="l">
+              <a:lnSpc>
+                <a:spcPct val="115000"/>
+              </a:lnSpc>
+              <a:spcBef>
+                <a:spcPts val="0"/>
+              </a:spcBef>
+              <a:spcAft>
+                <a:spcPts val="200"/>
+              </a:spcAft>
+            </a:pPr>
             <a:r>
               <a:rPr sz="1100" b="1" i="0">
                 <a:solidFill>
@@ -3655,7 +3735,17 @@
           </a:bodyPr>
           <a:lstStyle/>
           <a:p>
-            <a:pPr algn="l"/>
+            <a:pPr algn="l">
+              <a:lnSpc>
+                <a:spcPct val="115000"/>
+              </a:lnSpc>
+              <a:spcBef>
+                <a:spcPts val="0"/>
+              </a:spcBef>
+              <a:spcAft>
+                <a:spcPts val="200"/>
+              </a:spcAft>
+            </a:pPr>
             <a:r>
               <a:rPr sz="2400" b="1" i="0">
                 <a:solidFill>
@@ -3690,17 +3780,69 @@
           </a:bodyPr>
           <a:lstStyle/>
           <a:p>
-            <a:pPr algn="l"/>
-            <a:r>
-              <a:rPr sz="1600" b="0" i="0">
+            <a:pPr algn="l">
+              <a:lnSpc>
+                <a:spcPct val="128000"/>
+              </a:lnSpc>
+              <a:spcBef>
+                <a:spcPts val="0"/>
+              </a:spcBef>
+              <a:spcAft>
+                <a:spcPts val="1400"/>
+              </a:spcAft>
+            </a:pPr>
+            <a:r>
+              <a:rPr sz="2600" b="0" i="0">
                 <a:solidFill>
                   <a:srgbClr val="3A4A54"/>
                 </a:solidFill>
                 <a:latin typeface="Calibri"/>
               </a:rPr>
-              <a:t>IFAD grant up to US$1.2M for Rural Sector Performance Assessment.
-FairBanks links health shocks to rural livelihoods through FCHIP and the community cascade.
-We proceed carefully — EOI first, full proposal only if thematic fit is confirmed.</a:t>
+              <a:t>IFAD grant up to US$1.2M for Rural Sector Performance Assessment.</a:t>
+            </a:r>
+          </a:p>
+          <a:p>
+            <a:pPr algn="l">
+              <a:lnSpc>
+                <a:spcPct val="128000"/>
+              </a:lnSpc>
+              <a:spcBef>
+                <a:spcPts val="0"/>
+              </a:spcBef>
+              <a:spcAft>
+                <a:spcPts val="1400"/>
+              </a:spcAft>
+            </a:pPr>
+            <a:r>
+              <a:rPr sz="2600" b="0" i="0">
+                <a:solidFill>
+                  <a:srgbClr val="3A4A54"/>
+                </a:solidFill>
+                <a:latin typeface="Calibri"/>
+              </a:rPr>
+              <a:t>FairBanks links health shocks to rural livelihoods through FCHIP and the community cascade.</a:t>
+            </a:r>
+          </a:p>
+          <a:p>
+            <a:pPr algn="l">
+              <a:lnSpc>
+                <a:spcPct val="128000"/>
+              </a:lnSpc>
+              <a:spcBef>
+                <a:spcPts val="0"/>
+              </a:spcBef>
+              <a:spcAft>
+                <a:spcPts val="200"/>
+              </a:spcAft>
+            </a:pPr>
+            <a:r>
+              <a:rPr sz="2600" b="0" i="0">
+                <a:solidFill>
+                  <a:srgbClr val="3A4A54"/>
+                </a:solidFill>
+                <a:latin typeface="Calibri"/>
+              </a:rPr>
+              <a:t>We proceed carefully — EOI first, full proposal only if thematic fit is confirmed.</a:t>
             </a:r>
           </a:p>
         </p:txBody>
@@ -3794,7 +3936,17 @@
           </a:bodyPr>
           <a:lstStyle/>
           <a:p>
-            <a:pPr algn="l"/>
+            <a:pPr algn="l">
+              <a:lnSpc>
+                <a:spcPct val="115000"/>
+              </a:lnSpc>
+              <a:spcBef>
+                <a:spcPts val="0"/>
+              </a:spcBef>
+              <a:spcAft>
+                <a:spcPts val="200"/>
+              </a:spcAft>
+            </a:pPr>
             <a:r>
               <a:rPr sz="900" b="0" i="0">
                 <a:solidFill>
@@ -3829,7 +3981,17 @@
           </a:bodyPr>
           <a:lstStyle/>
           <a:p>
-            <a:pPr algn="r"/>
+            <a:pPr algn="r">
+              <a:lnSpc>
+                <a:spcPct val="115000"/>
+              </a:lnSpc>
+              <a:spcBef>
+                <a:spcPts val="0"/>
+              </a:spcBef>
+              <a:spcAft>
+                <a:spcPts val="200"/>
+              </a:spcAft>
+            </a:pPr>
             <a:r>
               <a:rPr sz="900" b="0" i="0">
                 <a:solidFill>
@@ -3968,7 +4130,17 @@
           </a:bodyPr>
           <a:lstStyle/>
           <a:p>
-            <a:pPr algn="l"/>
+            <a:pPr algn="l">
+              <a:lnSpc>
+                <a:spcPct val="115000"/>
+              </a:lnSpc>
+              <a:spcBef>
+                <a:spcPts val="0"/>
+              </a:spcBef>
+              <a:spcAft>
+                <a:spcPts val="200"/>
+              </a:spcAft>
+            </a:pPr>
             <a:r>
               <a:rPr sz="1100" b="1" i="0">
                 <a:solidFill>
@@ -4003,7 +4175,17 @@
           </a:bodyPr>
           <a:lstStyle/>
           <a:p>
-            <a:pPr algn="l"/>
+            <a:pPr algn="l">
+              <a:lnSpc>
+                <a:spcPct val="115000"/>
+              </a:lnSpc>
+              <a:spcBef>
+                <a:spcPts val="0"/>
+              </a:spcBef>
+              <a:spcAft>
+                <a:spcPts val="200"/>
+              </a:spcAft>
+            </a:pPr>
             <a:r>
               <a:rPr sz="2400" b="1" i="0">
                 <a:solidFill>
@@ -4062,18 +4244,91 @@
           </a:bodyPr>
           <a:lstStyle/>
           <a:p>
-            <a:pPr algn="l"/>
-            <a:r>
-              <a:rPr sz="1600" b="0" i="0">
+            <a:pPr algn="l">
+              <a:lnSpc>
+                <a:spcPct val="128000"/>
+              </a:lnSpc>
+              <a:spcBef>
+                <a:spcPts val="0"/>
+              </a:spcBef>
+              <a:spcAft>
+                <a:spcPts val="1400"/>
+              </a:spcAft>
+            </a:pPr>
+            <a:r>
+              <a:rPr sz="2600" b="0" i="0">
                 <a:solidFill>
                   <a:srgbClr val="1E2F38"/>
                 </a:solidFill>
                 <a:latin typeface="Calibri"/>
               </a:rPr>
-              <a:t>• Illness erases farm income and savings
-• Performance assessments under-weight health
-• Community data could make policy human-centred
-• Prevention protects livelihoods and food security</a:t>
+              <a:t>• Illness erases farm income and savings</a:t>
+            </a:r>
+          </a:p>
+          <a:p>
+            <a:pPr algn="l">
+              <a:lnSpc>
+                <a:spcPct val="128000"/>
+              </a:lnSpc>
+              <a:spcBef>
+                <a:spcPts val="0"/>
+              </a:spcBef>
+              <a:spcAft>
+                <a:spcPts val="1400"/>
+              </a:spcAft>
+            </a:pPr>
+            <a:r>
+              <a:rPr sz="2600" b="0" i="0">
+                <a:solidFill>
+                  <a:srgbClr val="1E2F38"/>
+                </a:solidFill>
+                <a:latin typeface="Calibri"/>
+              </a:rPr>
+              <a:t>• Performance assessments under-weight health</a:t>
+            </a:r>
+          </a:p>
+          <a:p>
+            <a:pPr algn="l">
+              <a:lnSpc>
+                <a:spcPct val="128000"/>
+              </a:lnSpc>
+              <a:spcBef>
+                <a:spcPts val="0"/>
+              </a:spcBef>
+              <a:spcAft>
+                <a:spcPts val="1400"/>
+              </a:spcAft>
+            </a:pPr>
+            <a:r>
+              <a:rPr sz="2600" b="0" i="0">
+                <a:solidFill>
+                  <a:srgbClr val="1E2F38"/>
+                </a:solidFill>
+                <a:latin typeface="Calibri"/>
+              </a:rPr>
+              <a:t>• Community data could make policy human-centred</a:t>
+            </a:r>
+          </a:p>
+          <a:p>
+            <a:pPr algn="l">
+              <a:lnSpc>
+                <a:spcPct val="128000"/>
+              </a:lnSpc>
+              <a:spcBef>
+                <a:spcPts val="0"/>
+              </a:spcBef>
+              <a:spcAft>
+                <a:spcPts val="200"/>
+              </a:spcAft>
+            </a:pPr>
+            <a:r>
+              <a:rPr sz="2600" b="0" i="0">
+                <a:solidFill>
+                  <a:srgbClr val="1E2F38"/>
+                </a:solidFill>
+                <a:latin typeface="Calibri"/>
+              </a:rPr>
+              <a:t>• Prevention protects livelihoods and food security</a:t>
             </a:r>
           </a:p>
         </p:txBody>
@@ -4143,7 +4398,17 @@
           </a:bodyPr>
           <a:lstStyle/>
           <a:p>
-            <a:pPr algn="l"/>
+            <a:pPr algn="l">
+              <a:lnSpc>
+                <a:spcPct val="115000"/>
+              </a:lnSpc>
+              <a:spcBef>
+                <a:spcPts val="0"/>
+              </a:spcBef>
+              <a:spcAft>
+                <a:spcPts val="200"/>
+              </a:spcAft>
+            </a:pPr>
             <a:r>
               <a:rPr sz="900" b="0" i="0">
                 <a:solidFill>
@@ -4178,7 +4443,17 @@
           </a:bodyPr>
           <a:lstStyle/>
           <a:p>
-            <a:pPr algn="r"/>
+            <a:pPr algn="r">
+              <a:lnSpc>
+                <a:spcPct val="115000"/>
+              </a:lnSpc>
+              <a:spcBef>
+                <a:spcPts val="0"/>
+              </a:spcBef>
+              <a:spcAft>
+                <a:spcPts val="200"/>
+              </a:spcAft>
+            </a:pPr>
             <a:r>
               <a:rPr sz="900" b="0" i="0">
                 <a:solidFill>
@@ -4317,7 +4592,17 @@
           </a:bodyPr>
           <a:lstStyle/>
           <a:p>
-            <a:pPr algn="l"/>
+            <a:pPr algn="l">
+              <a:lnSpc>
+                <a:spcPct val="115000"/>
+              </a:lnSpc>
+              <a:spcBef>
+                <a:spcPts val="0"/>
+              </a:spcBef>
+              <a:spcAft>
+                <a:spcPts val="200"/>
+              </a:spcAft>
+            </a:pPr>
             <a:r>
               <a:rPr sz="1100" b="1" i="0">
                 <a:solidFill>
@@ -4352,7 +4637,17 @@
           </a:bodyPr>
           <a:lstStyle/>
           <a:p>
-            <a:pPr algn="l"/>
+            <a:pPr algn="l">
+              <a:lnSpc>
+                <a:spcPct val="115000"/>
+              </a:lnSpc>
+              <a:spcBef>
+                <a:spcPts val="0"/>
+              </a:spcBef>
+              <a:spcAft>
+                <a:spcPts val="200"/>
+              </a:spcAft>
+            </a:pPr>
             <a:r>
               <a:rPr sz="2400" b="1" i="0">
                 <a:solidFill>
@@ -4411,16 +4706,47 @@
           </a:bodyPr>
           <a:lstStyle/>
           <a:p>
-            <a:pPr algn="l"/>
-            <a:r>
-              <a:rPr sz="1500" b="0" i="0">
+            <a:pPr algn="l">
+              <a:lnSpc>
+                <a:spcPct val="128000"/>
+              </a:lnSpc>
+              <a:spcBef>
+                <a:spcPts val="0"/>
+              </a:spcBef>
+              <a:spcAft>
+                <a:spcPts val="1400"/>
+              </a:spcAft>
+            </a:pPr>
+            <a:r>
+              <a:rPr sz="2600" b="0" i="0">
                 <a:solidFill>
                   <a:srgbClr val="3A4A54"/>
                 </a:solidFill>
                 <a:latin typeface="Calibri"/>
               </a:rPr>
-              <a:t>CHWs → outreach → clinic → research → empowerment.
-FCHIP adds illness clusters, maternal risk, missed care, and stock-out signals for policy briefs and investment priorities.</a:t>
+              <a:t>CHWs → outreach → clinic → research → empowerment.</a:t>
+            </a:r>
+          </a:p>
+          <a:p>
+            <a:pPr algn="l">
+              <a:lnSpc>
+                <a:spcPct val="128000"/>
+              </a:lnSpc>
+              <a:spcBef>
+                <a:spcPts val="0"/>
+              </a:spcBef>
+              <a:spcAft>
+                <a:spcPts val="200"/>
+              </a:spcAft>
+            </a:pPr>
+            <a:r>
+              <a:rPr sz="2600" b="0" i="0">
+                <a:solidFill>
+                  <a:srgbClr val="3A4A54"/>
+                </a:solidFill>
+                <a:latin typeface="Calibri"/>
+              </a:rPr>
+              <a:t>FCHIP adds illness clusters, maternal risk, missed care, and stock-out signals for policy briefs and investment priorities.</a:t>
             </a:r>
           </a:p>
         </p:txBody>
@@ -4490,7 +4816,17 @@
           </a:bodyPr>
           <a:lstStyle/>
           <a:p>
-            <a:pPr algn="l"/>
+            <a:pPr algn="l">
+              <a:lnSpc>
+                <a:spcPct val="115000"/>
+              </a:lnSpc>
+              <a:spcBef>
+                <a:spcPts val="0"/>
+              </a:spcBef>
+              <a:spcAft>
+                <a:spcPts val="200"/>
+              </a:spcAft>
+            </a:pPr>
             <a:r>
               <a:rPr sz="900" b="0" i="0">
                 <a:solidFill>
@@ -4525,7 +4861,17 @@
           </a:bodyPr>
           <a:lstStyle/>
           <a:p>
-            <a:pPr algn="r"/>
+            <a:pPr algn="r">
+              <a:lnSpc>
+                <a:spcPct val="115000"/>
+              </a:lnSpc>
+              <a:spcBef>
+                <a:spcPts val="0"/>
+              </a:spcBef>
+              <a:spcAft>
+                <a:spcPts val="200"/>
+              </a:spcAft>
+            </a:pPr>
             <a:r>
               <a:rPr sz="900" b="0" i="0">
                 <a:solidFill>
@@ -4664,7 +5010,17 @@
           </a:bodyPr>
           <a:lstStyle/>
           <a:p>
-            <a:pPr algn="l"/>
+            <a:pPr algn="l">
+              <a:lnSpc>
+                <a:spcPct val="115000"/>
+              </a:lnSpc>
+              <a:spcBef>
+                <a:spcPts val="0"/>
+              </a:spcBef>
+              <a:spcAft>
+                <a:spcPts val="200"/>
+              </a:spcAft>
+            </a:pPr>
             <a:r>
               <a:rPr sz="1100" b="1" i="0">
                 <a:solidFill>
@@ -4699,7 +5055,17 @@
           </a:bodyPr>
           <a:lstStyle/>
           <a:p>
-            <a:pPr algn="l"/>
+            <a:pPr algn="l">
+              <a:lnSpc>
+                <a:spcPct val="115000"/>
+              </a:lnSpc>
+              <a:spcBef>
+                <a:spcPts val="0"/>
+              </a:spcBef>
+              <a:spcAft>
+                <a:spcPts val="200"/>
+              </a:spcAft>
+            </a:pPr>
             <a:r>
               <a:rPr sz="2400" b="1" i="0">
                 <a:solidFill>
@@ -4822,9 +5188,19 @@
           </a:bodyPr>
           <a:lstStyle/>
           <a:p>
-            <a:pPr algn="l"/>
-            <a:r>
-              <a:rPr sz="1400" b="0" i="0">
+            <a:pPr algn="l">
+              <a:lnSpc>
+                <a:spcPct val="115000"/>
+              </a:lnSpc>
+              <a:spcBef>
+                <a:spcPts val="0"/>
+              </a:spcBef>
+              <a:spcAft>
+                <a:spcPts val="200"/>
+              </a:spcAft>
+            </a:pPr>
+            <a:r>
+              <a:rPr sz="1800" b="0" i="0">
                 <a:solidFill>
                   <a:srgbClr val="1E2F38"/>
                 </a:solidFill>
@@ -4945,9 +5321,19 @@
           </a:bodyPr>
           <a:lstStyle/>
           <a:p>
-            <a:pPr algn="l"/>
-            <a:r>
-              <a:rPr sz="1400" b="0" i="0">
+            <a:pPr algn="l">
+              <a:lnSpc>
+                <a:spcPct val="115000"/>
+              </a:lnSpc>
+              <a:spcBef>
+                <a:spcPts val="0"/>
+              </a:spcBef>
+              <a:spcAft>
+                <a:spcPts val="200"/>
+              </a:spcAft>
+            </a:pPr>
+            <a:r>
+              <a:rPr sz="1800" b="0" i="0">
                 <a:solidFill>
                   <a:srgbClr val="1E2F38"/>
                 </a:solidFill>
@@ -5068,9 +5454,19 @@
           </a:bodyPr>
           <a:lstStyle/>
           <a:p>
-            <a:pPr algn="l"/>
-            <a:r>
-              <a:rPr sz="1400" b="0" i="0">
+            <a:pPr algn="l">
+              <a:lnSpc>
+                <a:spcPct val="115000"/>
+              </a:lnSpc>
+              <a:spcBef>
+                <a:spcPts val="0"/>
+              </a:spcBef>
+              <a:spcAft>
+                <a:spcPts val="200"/>
+              </a:spcAft>
+            </a:pPr>
+            <a:r>
+              <a:rPr sz="1800" b="0" i="0">
                 <a:solidFill>
                   <a:srgbClr val="1E2F38"/>
                 </a:solidFill>
@@ -5191,9 +5587,19 @@
           </a:bodyPr>
           <a:lstStyle/>
           <a:p>
-            <a:pPr algn="l"/>
-            <a:r>
-              <a:rPr sz="1400" b="0" i="0">
+            <a:pPr algn="l">
+              <a:lnSpc>
+                <a:spcPct val="115000"/>
+              </a:lnSpc>
+              <a:spcBef>
+                <a:spcPts val="0"/>
+              </a:spcBef>
+              <a:spcAft>
+                <a:spcPts val="200"/>
+              </a:spcAft>
+            </a:pPr>
+            <a:r>
+              <a:rPr sz="1800" b="0" i="0">
                 <a:solidFill>
                   <a:srgbClr val="1E2F38"/>
                 </a:solidFill>
@@ -5269,7 +5675,17 @@
           </a:bodyPr>
           <a:lstStyle/>
           <a:p>
-            <a:pPr algn="l"/>
+            <a:pPr algn="l">
+              <a:lnSpc>
+                <a:spcPct val="115000"/>
+              </a:lnSpc>
+              <a:spcBef>
+                <a:spcPts val="0"/>
+              </a:spcBef>
+              <a:spcAft>
+                <a:spcPts val="200"/>
+              </a:spcAft>
+            </a:pPr>
             <a:r>
               <a:rPr sz="900" b="0" i="0">
                 <a:solidFill>
@@ -5304,7 +5720,17 @@
           </a:bodyPr>
           <a:lstStyle/>
           <a:p>
-            <a:pPr algn="r"/>
+            <a:pPr algn="r">
+              <a:lnSpc>
+                <a:spcPct val="115000"/>
+              </a:lnSpc>
+              <a:spcBef>
+                <a:spcPts val="0"/>
+              </a:spcBef>
+              <a:spcAft>
+                <a:spcPts val="200"/>
+              </a:spcAft>
+            </a:pPr>
             <a:r>
               <a:rPr sz="900" b="0" i="0">
                 <a:solidFill>
@@ -5443,7 +5869,17 @@
           </a:bodyPr>
           <a:lstStyle/>
           <a:p>
-            <a:pPr algn="l"/>
+            <a:pPr algn="l">
+              <a:lnSpc>
+                <a:spcPct val="115000"/>
+              </a:lnSpc>
+              <a:spcBef>
+                <a:spcPts val="0"/>
+              </a:spcBef>
+              <a:spcAft>
+                <a:spcPts val="200"/>
+              </a:spcAft>
+            </a:pPr>
             <a:r>
               <a:rPr sz="1100" b="1" i="0">
                 <a:solidFill>
@@ -5478,7 +5914,17 @@
           </a:bodyPr>
           <a:lstStyle/>
           <a:p>
-            <a:pPr algn="l"/>
+            <a:pPr algn="l">
+              <a:lnSpc>
+                <a:spcPct val="115000"/>
+              </a:lnSpc>
+              <a:spcBef>
+                <a:spcPts val="0"/>
+              </a:spcBef>
+              <a:spcAft>
+                <a:spcPts val="200"/>
+              </a:spcAft>
+            </a:pPr>
             <a:r>
               <a:rPr sz="2400" b="1" i="0">
                 <a:solidFill>
@@ -5513,16 +5959,47 @@
           </a:bodyPr>
           <a:lstStyle/>
           <a:p>
-            <a:pPr algn="l"/>
-            <a:r>
-              <a:rPr sz="1600" b="0" i="0">
+            <a:pPr algn="l">
+              <a:lnSpc>
+                <a:spcPct val="128000"/>
+              </a:lnSpc>
+              <a:spcBef>
+                <a:spcPts val="0"/>
+              </a:spcBef>
+              <a:spcAft>
+                <a:spcPts val="1400"/>
+              </a:spcAft>
+            </a:pPr>
+            <a:r>
+              <a:rPr sz="2600" b="0" i="0">
                 <a:solidFill>
                   <a:srgbClr val="1E2F38"/>
                 </a:solidFill>
                 <a:latin typeface="Calibri"/>
               </a:rPr>
-              <a:t>FairBanks meets IFAD counterpart through:
-• Field operations and CHW supervision
+              <a:t>FairBanks meets IFAD counterpart through:</a:t>
+            </a:r>
+          </a:p>
+          <a:p>
+            <a:pPr algn="l">
+              <a:lnSpc>
+                <a:spcPct val="128000"/>
+              </a:lnSpc>
+              <a:spcBef>
+                <a:spcPts val="0"/>
+              </a:spcBef>
+              <a:spcAft>
+                <a:spcPts val="200"/>
+              </a:spcAft>
+            </a:pPr>
+            <a:r>
+              <a:rPr sz="2600" b="0" i="0">
+                <a:solidFill>
+                  <a:srgbClr val="1E2F38"/>
+                </a:solidFill>
+                <a:latin typeface="Calibri"/>
+              </a:rPr>
+              <a:t>• Field operations and CHW supervision
 • Outreach infrastructure and staff time
 • Data stewardship and existing digital foundations
 • Partner university / think tank for research design</a:t>
@@ -5619,7 +6096,17 @@
           </a:bodyPr>
           <a:lstStyle/>
           <a:p>
-            <a:pPr algn="l"/>
+            <a:pPr algn="l">
+              <a:lnSpc>
+                <a:spcPct val="115000"/>
+              </a:lnSpc>
+              <a:spcBef>
+                <a:spcPts val="0"/>
+              </a:spcBef>
+              <a:spcAft>
+                <a:spcPts val="200"/>
+              </a:spcAft>
+            </a:pPr>
             <a:r>
               <a:rPr sz="900" b="0" i="0">
                 <a:solidFill>
@@ -5654,7 +6141,17 @@
           </a:bodyPr>
           <a:lstStyle/>
           <a:p>
-            <a:pPr algn="r"/>
+            <a:pPr algn="r">
+              <a:lnSpc>
+                <a:spcPct val="115000"/>
+              </a:lnSpc>
+              <a:spcBef>
+                <a:spcPts val="0"/>
+              </a:spcBef>
+              <a:spcAft>
+                <a:spcPts val="200"/>
+              </a:spcAft>
+            </a:pPr>
             <a:r>
               <a:rPr sz="900" b="0" i="0">
                 <a:solidFill>
@@ -5793,7 +6290,17 @@
           </a:bodyPr>
           <a:lstStyle/>
           <a:p>
-            <a:pPr algn="l"/>
+            <a:pPr algn="l">
+              <a:lnSpc>
+                <a:spcPct val="115000"/>
+              </a:lnSpc>
+              <a:spcBef>
+                <a:spcPts val="0"/>
+              </a:spcBef>
+              <a:spcAft>
+                <a:spcPts val="200"/>
+              </a:spcAft>
+            </a:pPr>
             <a:r>
               <a:rPr sz="1100" b="1" i="0">
                 <a:solidFill>
@@ -5828,7 +6335,17 @@
           </a:bodyPr>
           <a:lstStyle/>
           <a:p>
-            <a:pPr algn="l"/>
+            <a:pPr algn="l">
+              <a:lnSpc>
+                <a:spcPct val="115000"/>
+              </a:lnSpc>
+              <a:spcBef>
+                <a:spcPts val="0"/>
+              </a:spcBef>
+              <a:spcAft>
+                <a:spcPts val="200"/>
+              </a:spcAft>
+            </a:pPr>
             <a:r>
               <a:rPr sz="2400" b="1" i="0">
                 <a:solidFill>
@@ -5908,7 +6425,17 @@
           </a:bodyPr>
           <a:lstStyle/>
           <a:p>
-            <a:pPr algn="l"/>
+            <a:pPr algn="l">
+              <a:lnSpc>
+                <a:spcPct val="115000"/>
+              </a:lnSpc>
+              <a:spcBef>
+                <a:spcPts val="0"/>
+              </a:spcBef>
+              <a:spcAft>
+                <a:spcPts val="200"/>
+              </a:spcAft>
+            </a:pPr>
             <a:r>
               <a:rPr sz="1300" b="1" i="0">
                 <a:solidFill>
@@ -5943,7 +6470,17 @@
           </a:bodyPr>
           <a:lstStyle/>
           <a:p>
-            <a:pPr algn="l"/>
+            <a:pPr algn="l">
+              <a:lnSpc>
+                <a:spcPct val="115000"/>
+              </a:lnSpc>
+              <a:spcBef>
+                <a:spcPts val="0"/>
+              </a:spcBef>
+              <a:spcAft>
+                <a:spcPts val="200"/>
+              </a:spcAft>
+            </a:pPr>
             <a:r>
               <a:rPr sz="1300" b="0" i="0">
                 <a:solidFill>
@@ -6023,7 +6560,17 @@
           </a:bodyPr>
           <a:lstStyle/>
           <a:p>
-            <a:pPr algn="l"/>
+            <a:pPr algn="l">
+              <a:lnSpc>
+                <a:spcPct val="115000"/>
+              </a:lnSpc>
+              <a:spcBef>
+                <a:spcPts val="0"/>
+              </a:spcBef>
+              <a:spcAft>
+                <a:spcPts val="200"/>
+              </a:spcAft>
+            </a:pPr>
             <a:r>
               <a:rPr sz="1300" b="1" i="0">
                 <a:solidFill>
@@ -6058,7 +6605,17 @@
           </a:bodyPr>
           <a:lstStyle/>
           <a:p>
-            <a:pPr algn="l"/>
+            <a:pPr algn="l">
+              <a:lnSpc>
+                <a:spcPct val="115000"/>
+              </a:lnSpc>
+              <a:spcBef>
+                <a:spcPts val="0"/>
+              </a:spcBef>
+              <a:spcAft>
+                <a:spcPts val="200"/>
+              </a:spcAft>
+            </a:pPr>
             <a:r>
               <a:rPr sz="1300" b="0" i="0">
                 <a:solidFill>
@@ -6138,7 +6695,17 @@
           </a:bodyPr>
           <a:lstStyle/>
           <a:p>
-            <a:pPr algn="l"/>
+            <a:pPr algn="l">
+              <a:lnSpc>
+                <a:spcPct val="115000"/>
+              </a:lnSpc>
+              <a:spcBef>
+                <a:spcPts val="0"/>
+              </a:spcBef>
+              <a:spcAft>
+                <a:spcPts val="200"/>
+              </a:spcAft>
+            </a:pPr>
             <a:r>
               <a:rPr sz="1300" b="1" i="0">
                 <a:solidFill>
@@ -6173,7 +6740,17 @@
           </a:bodyPr>
           <a:lstStyle/>
           <a:p>
-            <a:pPr algn="l"/>
+            <a:pPr algn="l">
+              <a:lnSpc>
+                <a:spcPct val="115000"/>
+              </a:lnSpc>
+              <a:spcBef>
+                <a:spcPts val="0"/>
+              </a:spcBef>
+              <a:spcAft>
+                <a:spcPts val="200"/>
+              </a:spcAft>
+            </a:pPr>
             <a:r>
               <a:rPr sz="1300" b="0" i="0">
                 <a:solidFill>
@@ -6253,7 +6830,17 @@
           </a:bodyPr>
           <a:lstStyle/>
           <a:p>
-            <a:pPr algn="l"/>
+            <a:pPr algn="l">
+              <a:lnSpc>
+                <a:spcPct val="115000"/>
+              </a:lnSpc>
+              <a:spcBef>
+                <a:spcPts val="0"/>
+              </a:spcBef>
+              <a:spcAft>
+                <a:spcPts val="200"/>
+              </a:spcAft>
+            </a:pPr>
             <a:r>
               <a:rPr sz="1300" b="1" i="0">
                 <a:solidFill>
@@ -6288,7 +6875,17 @@
           </a:bodyPr>
           <a:lstStyle/>
           <a:p>
-            <a:pPr algn="l"/>
+            <a:pPr algn="l">
+              <a:lnSpc>
+                <a:spcPct val="115000"/>
+              </a:lnSpc>
+              <a:spcBef>
+                <a:spcPts val="0"/>
+              </a:spcBef>
+              <a:spcAft>
+                <a:spcPts val="200"/>
+              </a:spcAft>
+            </a:pPr>
             <a:r>
               <a:rPr sz="1300" b="0" i="0">
                 <a:solidFill>
@@ -6368,7 +6965,17 @@
           </a:bodyPr>
           <a:lstStyle/>
           <a:p>
-            <a:pPr algn="l"/>
+            <a:pPr algn="l">
+              <a:lnSpc>
+                <a:spcPct val="115000"/>
+              </a:lnSpc>
+              <a:spcBef>
+                <a:spcPts val="0"/>
+              </a:spcBef>
+              <a:spcAft>
+                <a:spcPts val="200"/>
+              </a:spcAft>
+            </a:pPr>
             <a:r>
               <a:rPr sz="1300" b="1" i="0">
                 <a:solidFill>
@@ -6403,7 +7010,17 @@
           </a:bodyPr>
           <a:lstStyle/>
           <a:p>
-            <a:pPr algn="l"/>
+            <a:pPr algn="l">
+              <a:lnSpc>
+                <a:spcPct val="115000"/>
+              </a:lnSpc>
+              <a:spcBef>
+                <a:spcPts val="0"/>
+              </a:spcBef>
+              <a:spcAft>
+                <a:spcPts val="200"/>
+              </a:spcAft>
+            </a:pPr>
             <a:r>
               <a:rPr sz="1300" b="0" i="0">
                 <a:solidFill>
@@ -6481,7 +7098,17 @@
           </a:bodyPr>
           <a:lstStyle/>
           <a:p>
-            <a:pPr algn="l"/>
+            <a:pPr algn="l">
+              <a:lnSpc>
+                <a:spcPct val="115000"/>
+              </a:lnSpc>
+              <a:spcBef>
+                <a:spcPts val="0"/>
+              </a:spcBef>
+              <a:spcAft>
+                <a:spcPts val="200"/>
+              </a:spcAft>
+            </a:pPr>
             <a:r>
               <a:rPr sz="900" b="0" i="0">
                 <a:solidFill>
@@ -6516,7 +7143,17 @@
           </a:bodyPr>
           <a:lstStyle/>
           <a:p>
-            <a:pPr algn="r"/>
+            <a:pPr algn="r">
+              <a:lnSpc>
+                <a:spcPct val="115000"/>
+              </a:lnSpc>
+              <a:spcBef>
+                <a:spcPts val="0"/>
+              </a:spcBef>
+              <a:spcAft>
+                <a:spcPts val="200"/>
+              </a:spcAft>
+            </a:pPr>
             <a:r>
               <a:rPr sz="900" b="0" i="0">
                 <a:solidFill>
@@ -6655,7 +7292,17 @@
           </a:bodyPr>
           <a:lstStyle/>
           <a:p>
-            <a:pPr algn="l"/>
+            <a:pPr algn="l">
+              <a:lnSpc>
+                <a:spcPct val="115000"/>
+              </a:lnSpc>
+              <a:spcBef>
+                <a:spcPts val="0"/>
+              </a:spcBef>
+              <a:spcAft>
+                <a:spcPts val="200"/>
+              </a:spcAft>
+            </a:pPr>
             <a:r>
               <a:rPr sz="1100" b="1" i="0">
                 <a:solidFill>
@@ -6690,7 +7337,17 @@
           </a:bodyPr>
           <a:lstStyle/>
           <a:p>
-            <a:pPr algn="l"/>
+            <a:pPr algn="l">
+              <a:lnSpc>
+                <a:spcPct val="115000"/>
+              </a:lnSpc>
+              <a:spcBef>
+                <a:spcPts val="0"/>
+              </a:spcBef>
+              <a:spcAft>
+                <a:spcPts val="200"/>
+              </a:spcAft>
+            </a:pPr>
             <a:r>
               <a:rPr sz="2400" b="1" i="0">
                 <a:solidFill>
@@ -6770,7 +7427,17 @@
           </a:bodyPr>
           <a:lstStyle/>
           <a:p>
-            <a:pPr algn="l"/>
+            <a:pPr algn="l">
+              <a:lnSpc>
+                <a:spcPct val="115000"/>
+              </a:lnSpc>
+              <a:spcBef>
+                <a:spcPts val="0"/>
+              </a:spcBef>
+              <a:spcAft>
+                <a:spcPts val="200"/>
+              </a:spcAft>
+            </a:pPr>
             <a:r>
               <a:rPr sz="1200" b="0" i="0">
                 <a:solidFill>
@@ -6805,7 +7472,17 @@
           </a:bodyPr>
           <a:lstStyle/>
           <a:p>
-            <a:pPr algn="l"/>
+            <a:pPr algn="l">
+              <a:lnSpc>
+                <a:spcPct val="115000"/>
+              </a:lnSpc>
+              <a:spcBef>
+                <a:spcPts val="0"/>
+              </a:spcBef>
+              <a:spcAft>
+                <a:spcPts val="200"/>
+              </a:spcAft>
+            </a:pPr>
             <a:r>
               <a:rPr sz="1100" b="0" i="0">
                 <a:solidFill>
@@ -6840,7 +7517,17 @@
           </a:bodyPr>
           <a:lstStyle/>
           <a:p>
-            <a:pPr algn="r"/>
+            <a:pPr algn="r">
+              <a:lnSpc>
+                <a:spcPct val="115000"/>
+              </a:lnSpc>
+              <a:spcBef>
+                <a:spcPts val="0"/>
+              </a:spcBef>
+              <a:spcAft>
+                <a:spcPts val="200"/>
+              </a:spcAft>
+            </a:pPr>
             <a:r>
               <a:rPr sz="1200" b="1" i="0">
                 <a:solidFill>
@@ -6920,7 +7607,17 @@
           </a:bodyPr>
           <a:lstStyle/>
           <a:p>
-            <a:pPr algn="l"/>
+            <a:pPr algn="l">
+              <a:lnSpc>
+                <a:spcPct val="115000"/>
+              </a:lnSpc>
+              <a:spcBef>
+                <a:spcPts val="0"/>
+              </a:spcBef>
+              <a:spcAft>
+                <a:spcPts val="200"/>
+              </a:spcAft>
+            </a:pPr>
             <a:r>
               <a:rPr sz="1200" b="0" i="0">
                 <a:solidFill>
@@ -6955,7 +7652,17 @@
           </a:bodyPr>
           <a:lstStyle/>
           <a:p>
-            <a:pPr algn="l"/>
+            <a:pPr algn="l">
+              <a:lnSpc>
+                <a:spcPct val="115000"/>
+              </a:lnSpc>
+              <a:spcBef>
+                <a:spcPts val="0"/>
+              </a:spcBef>
+              <a:spcAft>
+                <a:spcPts val="200"/>
+              </a:spcAft>
+            </a:pPr>
             <a:r>
               <a:rPr sz="1100" b="0" i="0">
                 <a:solidFill>
@@ -6990,7 +7697,17 @@
           </a:bodyPr>
           <a:lstStyle/>
           <a:p>
-            <a:pPr algn="r"/>
+            <a:pPr algn="r">
+              <a:lnSpc>
+                <a:spcPct val="115000"/>
+              </a:lnSpc>
+              <a:spcBef>
+                <a:spcPts val="0"/>
+              </a:spcBef>
+              <a:spcAft>
+                <a:spcPts val="200"/>
+              </a:spcAft>
+            </a:pPr>
             <a:r>
               <a:rPr sz="1200" b="1" i="0">
                 <a:solidFill>
@@ -7070,7 +7787,17 @@
           </a:bodyPr>
           <a:lstStyle/>
           <a:p>
-            <a:pPr algn="l"/>
+            <a:pPr algn="l">
+              <a:lnSpc>
+                <a:spcPct val="115000"/>
+              </a:lnSpc>
+              <a:spcBef>
+                <a:spcPts val="0"/>
+              </a:spcBef>
+              <a:spcAft>
+                <a:spcPts val="200"/>
+              </a:spcAft>
+            </a:pPr>
             <a:r>
               <a:rPr sz="1200" b="0" i="0">
                 <a:solidFill>
@@ -7105,7 +7832,17 @@
           </a:bodyPr>
           <a:lstStyle/>
           <a:p>
-            <a:pPr algn="l"/>
+            <a:pPr algn="l">
+              <a:lnSpc>
+                <a:spcPct val="115000"/>
+              </a:lnSpc>
+              <a:spcBef>
+                <a:spcPts val="0"/>
+              </a:spcBef>
+              <a:spcAft>
+                <a:spcPts val="200"/>
+              </a:spcAft>
+            </a:pPr>
             <a:r>
               <a:rPr sz="1100" b="0" i="0">
                 <a:solidFill>
@@ -7140,7 +7877,17 @@
           </a:bodyPr>
           <a:lstStyle/>
           <a:p>
-            <a:pPr algn="r"/>
+            <a:pPr algn="r">
+              <a:lnSpc>
+                <a:spcPct val="115000"/>
+              </a:lnSpc>
+              <a:spcBef>
+                <a:spcPts val="0"/>
+              </a:spcBef>
+              <a:spcAft>
+                <a:spcPts val="200"/>
+              </a:spcAft>
+            </a:pPr>
             <a:r>
               <a:rPr sz="1200" b="1" i="0">
                 <a:solidFill>
@@ -7220,7 +7967,17 @@
           </a:bodyPr>
           <a:lstStyle/>
           <a:p>
-            <a:pPr algn="l"/>
+            <a:pPr algn="l">
+              <a:lnSpc>
+                <a:spcPct val="115000"/>
+              </a:lnSpc>
+              <a:spcBef>
+                <a:spcPts val="0"/>
+              </a:spcBef>
+              <a:spcAft>
+                <a:spcPts val="200"/>
+              </a:spcAft>
+            </a:pPr>
             <a:r>
               <a:rPr sz="1200" b="0" i="0">
                 <a:solidFill>
@@ -7255,7 +8012,17 @@
           </a:bodyPr>
           <a:lstStyle/>
           <a:p>
-            <a:pPr algn="l"/>
+            <a:pPr algn="l">
+              <a:lnSpc>
+                <a:spcPct val="115000"/>
+              </a:lnSpc>
+              <a:spcBef>
+                <a:spcPts val="0"/>
+              </a:spcBef>
+              <a:spcAft>
+                <a:spcPts val="200"/>
+              </a:spcAft>
+            </a:pPr>
             <a:r>
               <a:rPr sz="1100" b="0" i="0">
                 <a:solidFill>
@@ -7290,7 +8057,17 @@
           </a:bodyPr>
           <a:lstStyle/>
           <a:p>
-            <a:pPr algn="r"/>
+            <a:pPr algn="r">
+              <a:lnSpc>
+                <a:spcPct val="115000"/>
+              </a:lnSpc>
+              <a:spcBef>
+                <a:spcPts val="0"/>
+              </a:spcBef>
+              <a:spcAft>
+                <a:spcPts val="200"/>
+              </a:spcAft>
+            </a:pPr>
             <a:r>
               <a:rPr sz="1200" b="1" i="0">
                 <a:solidFill>
@@ -7370,7 +8147,17 @@
           </a:bodyPr>
           <a:lstStyle/>
           <a:p>
-            <a:pPr algn="l"/>
+            <a:pPr algn="l">
+              <a:lnSpc>
+                <a:spcPct val="115000"/>
+              </a:lnSpc>
+              <a:spcBef>
+                <a:spcPts val="0"/>
+              </a:spcBef>
+              <a:spcAft>
+                <a:spcPts val="200"/>
+              </a:spcAft>
+            </a:pPr>
             <a:r>
               <a:rPr sz="1200" b="1" i="0">
                 <a:solidFill>
@@ -7405,7 +8192,17 @@
           </a:bodyPr>
           <a:lstStyle/>
           <a:p>
-            <a:pPr algn="l"/>
+            <a:pPr algn="l">
+              <a:lnSpc>
+                <a:spcPct val="115000"/>
+              </a:lnSpc>
+              <a:spcBef>
+                <a:spcPts val="0"/>
+              </a:spcBef>
+              <a:spcAft>
+                <a:spcPts val="200"/>
+              </a:spcAft>
+            </a:pPr>
             <a:r>
               <a:rPr sz="1100" b="0" i="0">
                 <a:solidFill>
@@ -7440,7 +8237,17 @@
           </a:bodyPr>
           <a:lstStyle/>
           <a:p>
-            <a:pPr algn="r"/>
+            <a:pPr algn="r">
+              <a:lnSpc>
+                <a:spcPct val="115000"/>
+              </a:lnSpc>
+              <a:spcBef>
+                <a:spcPts val="0"/>
+              </a:spcBef>
+              <a:spcAft>
+                <a:spcPts val="200"/>
+              </a:spcAft>
+            </a:pPr>
             <a:r>
               <a:rPr sz="1200" b="1" i="0">
                 <a:solidFill>
@@ -7518,7 +8325,17 @@
           </a:bodyPr>
           <a:lstStyle/>
           <a:p>
-            <a:pPr algn="l"/>
+            <a:pPr algn="l">
+              <a:lnSpc>
+                <a:spcPct val="115000"/>
+              </a:lnSpc>
+              <a:spcBef>
+                <a:spcPts val="0"/>
+              </a:spcBef>
+              <a:spcAft>
+                <a:spcPts val="200"/>
+              </a:spcAft>
+            </a:pPr>
             <a:r>
               <a:rPr sz="900" b="0" i="0">
                 <a:solidFill>
@@ -7553,7 +8370,17 @@
           </a:bodyPr>
           <a:lstStyle/>
           <a:p>
-            <a:pPr algn="r"/>
+            <a:pPr algn="r">
+              <a:lnSpc>
+                <a:spcPct val="115000"/>
+              </a:lnSpc>
+              <a:spcBef>
+                <a:spcPts val="0"/>
+              </a:spcBef>
+              <a:spcAft>
+                <a:spcPts val="200"/>
+              </a:spcAft>
+            </a:pPr>
             <a:r>
               <a:rPr sz="900" b="0" i="0">
                 <a:solidFill>
@@ -7692,7 +8519,17 @@
           </a:bodyPr>
           <a:lstStyle/>
           <a:p>
-            <a:pPr algn="l"/>
+            <a:pPr algn="l">
+              <a:lnSpc>
+                <a:spcPct val="115000"/>
+              </a:lnSpc>
+              <a:spcBef>
+                <a:spcPts val="0"/>
+              </a:spcBef>
+              <a:spcAft>
+                <a:spcPts val="200"/>
+              </a:spcAft>
+            </a:pPr>
             <a:r>
               <a:rPr sz="1100" b="1" i="0">
                 <a:solidFill>
@@ -7727,7 +8564,17 @@
           </a:bodyPr>
           <a:lstStyle/>
           <a:p>
-            <a:pPr algn="l"/>
+            <a:pPr algn="l">
+              <a:lnSpc>
+                <a:spcPct val="115000"/>
+              </a:lnSpc>
+              <a:spcBef>
+                <a:spcPts val="0"/>
+              </a:spcBef>
+              <a:spcAft>
+                <a:spcPts val="200"/>
+              </a:spcAft>
+            </a:pPr>
             <a:r>
               <a:rPr sz="2400" b="1" i="0">
                 <a:solidFill>
@@ -7807,7 +8654,17 @@
           </a:bodyPr>
           <a:lstStyle/>
           <a:p>
-            <a:pPr algn="l"/>
+            <a:pPr algn="l">
+              <a:lnSpc>
+                <a:spcPct val="115000"/>
+              </a:lnSpc>
+              <a:spcBef>
+                <a:spcPts val="0"/>
+              </a:spcBef>
+              <a:spcAft>
+                <a:spcPts val="200"/>
+              </a:spcAft>
+            </a:pPr>
             <a:r>
               <a:rPr sz="1600" b="1" i="0">
                 <a:solidFill>
@@ -7842,9 +8699,19 @@
           </a:bodyPr>
           <a:lstStyle/>
           <a:p>
-            <a:pPr algn="l"/>
-            <a:r>
-              <a:rPr sz="1400" b="0" i="0">
+            <a:pPr algn="l">
+              <a:lnSpc>
+                <a:spcPct val="128000"/>
+              </a:lnSpc>
+              <a:spcBef>
+                <a:spcPts val="0"/>
+              </a:spcBef>
+              <a:spcAft>
+                <a:spcPts val="200"/>
+              </a:spcAft>
+            </a:pPr>
+            <a:r>
+              <a:rPr sz="2600" b="0" i="0">
                 <a:solidFill>
                   <a:srgbClr val="3A4A54"/>
                 </a:solidFill>
@@ -7922,7 +8789,17 @@
           </a:bodyPr>
           <a:lstStyle/>
           <a:p>
-            <a:pPr algn="l"/>
+            <a:pPr algn="l">
+              <a:lnSpc>
+                <a:spcPct val="115000"/>
+              </a:lnSpc>
+              <a:spcBef>
+                <a:spcPts val="0"/>
+              </a:spcBef>
+              <a:spcAft>
+                <a:spcPts val="200"/>
+              </a:spcAft>
+            </a:pPr>
             <a:r>
               <a:rPr sz="1600" b="1" i="0">
                 <a:solidFill>
@@ -7957,9 +8834,19 @@
           </a:bodyPr>
           <a:lstStyle/>
           <a:p>
-            <a:pPr algn="l"/>
-            <a:r>
-              <a:rPr sz="1400" b="0" i="0">
+            <a:pPr algn="l">
+              <a:lnSpc>
+                <a:spcPct val="128000"/>
+              </a:lnSpc>
+              <a:spcBef>
+                <a:spcPts val="0"/>
+              </a:spcBef>
+              <a:spcAft>
+                <a:spcPts val="200"/>
+              </a:spcAft>
+            </a:pPr>
+            <a:r>
+              <a:rPr sz="2600" b="0" i="0">
                 <a:solidFill>
                   <a:srgbClr val="3A4A54"/>
                 </a:solidFill>
@@ -8035,7 +8922,17 @@
           </a:bodyPr>
           <a:lstStyle/>
           <a:p>
-            <a:pPr algn="l"/>
+            <a:pPr algn="l">
+              <a:lnSpc>
+                <a:spcPct val="115000"/>
+              </a:lnSpc>
+              <a:spcBef>
+                <a:spcPts val="0"/>
+              </a:spcBef>
+              <a:spcAft>
+                <a:spcPts val="200"/>
+              </a:spcAft>
+            </a:pPr>
             <a:r>
               <a:rPr sz="900" b="0" i="0">
                 <a:solidFill>
@@ -8070,7 +8967,17 @@
           </a:bodyPr>
           <a:lstStyle/>
           <a:p>
-            <a:pPr algn="r"/>
+            <a:pPr algn="r">
+              <a:lnSpc>
+                <a:spcPct val="115000"/>
+              </a:lnSpc>
+              <a:spcBef>
+                <a:spcPts val="0"/>
+              </a:spcBef>
+              <a:spcAft>
+                <a:spcPts val="200"/>
+              </a:spcAft>
+            </a:pPr>
             <a:r>
               <a:rPr sz="900" b="0" i="0">
                 <a:solidFill>

--- a/applications/ifad/documents/ifad_ppt.pptx
+++ b/applications/ifad/documents/ifad_ppt.pptx
@@ -3394,6 +3394,96 @@
   <p:clrMapOvr>
     <a:masterClrMapping/>
   </p:clrMapOvr>
+  <p:timing>
+    <p:tnLst>
+      <p:par>
+        <p:cTn id="1" dur="indefinite" restart="never" nodeType="tmRoot">
+          <p:childTnLst>
+            <p:seq concurrent="true" nextAc="seek">
+              <p:cTn id="2" dur="indefinite" nodeType="mainSeq">
+                <p:childTnLst>
+                  <p:par>
+                    <p:cTn id="9" fill="hold">
+                      <p:stCondLst>
+                        <p:cond delay="0"/>
+                      </p:stCondLst>
+                      <p:childTnLst>
+                        <p:par>
+                          <p:cTn id="3" presetID="10" presetClass="entr" presetSubtype="0" fill="hold" nodeType="withEffect">
+                            <p:stCondLst>
+                              <p:cond delay="0"/>
+                            </p:stCondLst>
+                            <p:childTnLst>
+                              <p:animEffect transition="in" filter="fade">
+                                <p:cBhvr>
+                                  <p:cTn id="4" dur="450"/>
+                                  <p:tgtEl>
+                                    <p:spTgt spid="2"/>
+                                  </p:tgtEl>
+                                </p:cBhvr>
+                              </p:animEffect>
+                            </p:childTnLst>
+                          </p:cTn>
+                        </p:par>
+                        <p:par>
+                          <p:cTn id="5" presetID="10" presetClass="entr" presetSubtype="0" fill="hold" nodeType="withEffect">
+                            <p:stCondLst>
+                              <p:cond delay="200"/>
+                            </p:stCondLst>
+                            <p:childTnLst>
+                              <p:animEffect transition="in" filter="fade">
+                                <p:cBhvr>
+                                  <p:cTn id="6" dur="450"/>
+                                  <p:tgtEl>
+                                    <p:spTgt spid="3"/>
+                                  </p:tgtEl>
+                                </p:cBhvr>
+                              </p:animEffect>
+                            </p:childTnLst>
+                          </p:cTn>
+                        </p:par>
+                        <p:par>
+                          <p:cTn id="7" presetID="10" presetClass="entr" presetSubtype="0" fill="hold" nodeType="withEffect">
+                            <p:stCondLst>
+                              <p:cond delay="200"/>
+                            </p:stCondLst>
+                            <p:childTnLst>
+                              <p:animEffect transition="in" filter="fade">
+                                <p:cBhvr>
+                                  <p:cTn id="8" dur="450"/>
+                                  <p:tgtEl>
+                                    <p:spTgt spid="4"/>
+                                  </p:tgtEl>
+                                </p:cBhvr>
+                              </p:animEffect>
+                            </p:childTnLst>
+                          </p:cTn>
+                        </p:par>
+                      </p:childTnLst>
+                    </p:cTn>
+                  </p:par>
+                </p:childTnLst>
+              </p:cTn>
+              <p:prevCondLst>
+                <p:cond evt="onPrev" delay="0">
+                  <p:tgtEl>
+                    <p:sldTgt/>
+                  </p:tgtEl>
+                </p:cond>
+              </p:prevCondLst>
+              <p:nextCondLst>
+                <p:cond evt="onNext" delay="0">
+                  <p:tgtEl>
+                    <p:sldTgt/>
+                  </p:tgtEl>
+                </p:cond>
+              </p:nextCondLst>
+            </p:seq>
+          </p:childTnLst>
+        </p:cTn>
+      </p:par>
+    </p:tnLst>
+  </p:timing>
 </p:sld>
 </file>
 
@@ -3569,6 +3659,96 @@
   <p:clrMapOvr>
     <a:masterClrMapping/>
   </p:clrMapOvr>
+  <p:timing>
+    <p:tnLst>
+      <p:par>
+        <p:cTn id="1" dur="indefinite" restart="never" nodeType="tmRoot">
+          <p:childTnLst>
+            <p:seq concurrent="true" nextAc="seek">
+              <p:cTn id="2" dur="indefinite" nodeType="mainSeq">
+                <p:childTnLst>
+                  <p:par>
+                    <p:cTn id="9" fill="hold">
+                      <p:stCondLst>
+                        <p:cond delay="0"/>
+                      </p:stCondLst>
+                      <p:childTnLst>
+                        <p:par>
+                          <p:cTn id="3" presetID="10" presetClass="entr" presetSubtype="0" fill="hold" nodeType="withEffect">
+                            <p:stCondLst>
+                              <p:cond delay="0"/>
+                            </p:stCondLst>
+                            <p:childTnLst>
+                              <p:animEffect transition="in" filter="fade">
+                                <p:cBhvr>
+                                  <p:cTn id="4" dur="450"/>
+                                  <p:tgtEl>
+                                    <p:spTgt spid="2"/>
+                                  </p:tgtEl>
+                                </p:cBhvr>
+                              </p:animEffect>
+                            </p:childTnLst>
+                          </p:cTn>
+                        </p:par>
+                        <p:par>
+                          <p:cTn id="5" presetID="10" presetClass="entr" presetSubtype="0" fill="hold" nodeType="withEffect">
+                            <p:stCondLst>
+                              <p:cond delay="200"/>
+                            </p:stCondLst>
+                            <p:childTnLst>
+                              <p:animEffect transition="in" filter="fade">
+                                <p:cBhvr>
+                                  <p:cTn id="6" dur="450"/>
+                                  <p:tgtEl>
+                                    <p:spTgt spid="3"/>
+                                  </p:tgtEl>
+                                </p:cBhvr>
+                              </p:animEffect>
+                            </p:childTnLst>
+                          </p:cTn>
+                        </p:par>
+                        <p:par>
+                          <p:cTn id="7" presetID="10" presetClass="entr" presetSubtype="0" fill="hold" nodeType="withEffect">
+                            <p:stCondLst>
+                              <p:cond delay="200"/>
+                            </p:stCondLst>
+                            <p:childTnLst>
+                              <p:animEffect transition="in" filter="fade">
+                                <p:cBhvr>
+                                  <p:cTn id="8" dur="450"/>
+                                  <p:tgtEl>
+                                    <p:spTgt spid="4"/>
+                                  </p:tgtEl>
+                                </p:cBhvr>
+                              </p:animEffect>
+                            </p:childTnLst>
+                          </p:cTn>
+                        </p:par>
+                      </p:childTnLst>
+                    </p:cTn>
+                  </p:par>
+                </p:childTnLst>
+              </p:cTn>
+              <p:prevCondLst>
+                <p:cond evt="onPrev" delay="0">
+                  <p:tgtEl>
+                    <p:sldTgt/>
+                  </p:tgtEl>
+                </p:cond>
+              </p:prevCondLst>
+              <p:nextCondLst>
+                <p:cond evt="onNext" delay="0">
+                  <p:tgtEl>
+                    <p:sldTgt/>
+                  </p:tgtEl>
+                </p:cond>
+              </p:nextCondLst>
+            </p:seq>
+          </p:childTnLst>
+        </p:cTn>
+      </p:par>
+    </p:tnLst>
+  </p:timing>
 </p:sld>
 </file>
 
@@ -4009,6 +4189,96 @@
   <p:clrMapOvr>
     <a:masterClrMapping/>
   </p:clrMapOvr>
+  <p:timing>
+    <p:tnLst>
+      <p:par>
+        <p:cTn id="1" dur="indefinite" restart="never" nodeType="tmRoot">
+          <p:childTnLst>
+            <p:seq concurrent="true" nextAc="seek">
+              <p:cTn id="2" dur="indefinite" nodeType="mainSeq">
+                <p:childTnLst>
+                  <p:par>
+                    <p:cTn id="9" fill="hold">
+                      <p:stCondLst>
+                        <p:cond delay="0"/>
+                      </p:stCondLst>
+                      <p:childTnLst>
+                        <p:par>
+                          <p:cTn id="3" presetID="10" presetClass="entr" presetSubtype="0" fill="hold" nodeType="withEffect">
+                            <p:stCondLst>
+                              <p:cond delay="0"/>
+                            </p:stCondLst>
+                            <p:childTnLst>
+                              <p:animEffect transition="in" filter="fade">
+                                <p:cBhvr>
+                                  <p:cTn id="4" dur="450"/>
+                                  <p:tgtEl>
+                                    <p:spTgt spid="2"/>
+                                  </p:tgtEl>
+                                </p:cBhvr>
+                              </p:animEffect>
+                            </p:childTnLst>
+                          </p:cTn>
+                        </p:par>
+                        <p:par>
+                          <p:cTn id="5" presetID="10" presetClass="entr" presetSubtype="0" fill="hold" nodeType="withEffect">
+                            <p:stCondLst>
+                              <p:cond delay="200"/>
+                            </p:stCondLst>
+                            <p:childTnLst>
+                              <p:animEffect transition="in" filter="fade">
+                                <p:cBhvr>
+                                  <p:cTn id="6" dur="450"/>
+                                  <p:tgtEl>
+                                    <p:spTgt spid="3"/>
+                                  </p:tgtEl>
+                                </p:cBhvr>
+                              </p:animEffect>
+                            </p:childTnLst>
+                          </p:cTn>
+                        </p:par>
+                        <p:par>
+                          <p:cTn id="7" presetID="10" presetClass="entr" presetSubtype="0" fill="hold" nodeType="withEffect">
+                            <p:stCondLst>
+                              <p:cond delay="200"/>
+                            </p:stCondLst>
+                            <p:childTnLst>
+                              <p:animEffect transition="in" filter="fade">
+                                <p:cBhvr>
+                                  <p:cTn id="8" dur="450"/>
+                                  <p:tgtEl>
+                                    <p:spTgt spid="4"/>
+                                  </p:tgtEl>
+                                </p:cBhvr>
+                              </p:animEffect>
+                            </p:childTnLst>
+                          </p:cTn>
+                        </p:par>
+                      </p:childTnLst>
+                    </p:cTn>
+                  </p:par>
+                </p:childTnLst>
+              </p:cTn>
+              <p:prevCondLst>
+                <p:cond evt="onPrev" delay="0">
+                  <p:tgtEl>
+                    <p:sldTgt/>
+                  </p:tgtEl>
+                </p:cond>
+              </p:prevCondLst>
+              <p:nextCondLst>
+                <p:cond evt="onNext" delay="0">
+                  <p:tgtEl>
+                    <p:sldTgt/>
+                  </p:tgtEl>
+                </p:cond>
+              </p:nextCondLst>
+            </p:seq>
+          </p:childTnLst>
+        </p:cTn>
+      </p:par>
+    </p:tnLst>
+  </p:timing>
 </p:sld>
 </file>
 
@@ -4471,6 +4741,96 @@
   <p:clrMapOvr>
     <a:masterClrMapping/>
   </p:clrMapOvr>
+  <p:timing>
+    <p:tnLst>
+      <p:par>
+        <p:cTn id="1" dur="indefinite" restart="never" nodeType="tmRoot">
+          <p:childTnLst>
+            <p:seq concurrent="true" nextAc="seek">
+              <p:cTn id="2" dur="indefinite" nodeType="mainSeq">
+                <p:childTnLst>
+                  <p:par>
+                    <p:cTn id="9" fill="hold">
+                      <p:stCondLst>
+                        <p:cond delay="0"/>
+                      </p:stCondLst>
+                      <p:childTnLst>
+                        <p:par>
+                          <p:cTn id="3" presetID="10" presetClass="entr" presetSubtype="0" fill="hold" nodeType="withEffect">
+                            <p:stCondLst>
+                              <p:cond delay="0"/>
+                            </p:stCondLst>
+                            <p:childTnLst>
+                              <p:animEffect transition="in" filter="fade">
+                                <p:cBhvr>
+                                  <p:cTn id="4" dur="450"/>
+                                  <p:tgtEl>
+                                    <p:spTgt spid="2"/>
+                                  </p:tgtEl>
+                                </p:cBhvr>
+                              </p:animEffect>
+                            </p:childTnLst>
+                          </p:cTn>
+                        </p:par>
+                        <p:par>
+                          <p:cTn id="5" presetID="10" presetClass="entr" presetSubtype="0" fill="hold" nodeType="withEffect">
+                            <p:stCondLst>
+                              <p:cond delay="200"/>
+                            </p:stCondLst>
+                            <p:childTnLst>
+                              <p:animEffect transition="in" filter="fade">
+                                <p:cBhvr>
+                                  <p:cTn id="6" dur="450"/>
+                                  <p:tgtEl>
+                                    <p:spTgt spid="3"/>
+                                  </p:tgtEl>
+                                </p:cBhvr>
+                              </p:animEffect>
+                            </p:childTnLst>
+                          </p:cTn>
+                        </p:par>
+                        <p:par>
+                          <p:cTn id="7" presetID="10" presetClass="entr" presetSubtype="0" fill="hold" nodeType="withEffect">
+                            <p:stCondLst>
+                              <p:cond delay="200"/>
+                            </p:stCondLst>
+                            <p:childTnLst>
+                              <p:animEffect transition="in" filter="fade">
+                                <p:cBhvr>
+                                  <p:cTn id="8" dur="450"/>
+                                  <p:tgtEl>
+                                    <p:spTgt spid="4"/>
+                                  </p:tgtEl>
+                                </p:cBhvr>
+                              </p:animEffect>
+                            </p:childTnLst>
+                          </p:cTn>
+                        </p:par>
+                      </p:childTnLst>
+                    </p:cTn>
+                  </p:par>
+                </p:childTnLst>
+              </p:cTn>
+              <p:prevCondLst>
+                <p:cond evt="onPrev" delay="0">
+                  <p:tgtEl>
+                    <p:sldTgt/>
+                  </p:tgtEl>
+                </p:cond>
+              </p:prevCondLst>
+              <p:nextCondLst>
+                <p:cond evt="onNext" delay="0">
+                  <p:tgtEl>
+                    <p:sldTgt/>
+                  </p:tgtEl>
+                </p:cond>
+              </p:nextCondLst>
+            </p:seq>
+          </p:childTnLst>
+        </p:cTn>
+      </p:par>
+    </p:tnLst>
+  </p:timing>
 </p:sld>
 </file>
 
@@ -4889,6 +5249,96 @@
   <p:clrMapOvr>
     <a:masterClrMapping/>
   </p:clrMapOvr>
+  <p:timing>
+    <p:tnLst>
+      <p:par>
+        <p:cTn id="1" dur="indefinite" restart="never" nodeType="tmRoot">
+          <p:childTnLst>
+            <p:seq concurrent="true" nextAc="seek">
+              <p:cTn id="2" dur="indefinite" nodeType="mainSeq">
+                <p:childTnLst>
+                  <p:par>
+                    <p:cTn id="9" fill="hold">
+                      <p:stCondLst>
+                        <p:cond delay="0"/>
+                      </p:stCondLst>
+                      <p:childTnLst>
+                        <p:par>
+                          <p:cTn id="3" presetID="10" presetClass="entr" presetSubtype="0" fill="hold" nodeType="withEffect">
+                            <p:stCondLst>
+                              <p:cond delay="0"/>
+                            </p:stCondLst>
+                            <p:childTnLst>
+                              <p:animEffect transition="in" filter="fade">
+                                <p:cBhvr>
+                                  <p:cTn id="4" dur="450"/>
+                                  <p:tgtEl>
+                                    <p:spTgt spid="2"/>
+                                  </p:tgtEl>
+                                </p:cBhvr>
+                              </p:animEffect>
+                            </p:childTnLst>
+                          </p:cTn>
+                        </p:par>
+                        <p:par>
+                          <p:cTn id="5" presetID="10" presetClass="entr" presetSubtype="0" fill="hold" nodeType="withEffect">
+                            <p:stCondLst>
+                              <p:cond delay="200"/>
+                            </p:stCondLst>
+                            <p:childTnLst>
+                              <p:animEffect transition="in" filter="fade">
+                                <p:cBhvr>
+                                  <p:cTn id="6" dur="450"/>
+                                  <p:tgtEl>
+                                    <p:spTgt spid="3"/>
+                                  </p:tgtEl>
+                                </p:cBhvr>
+                              </p:animEffect>
+                            </p:childTnLst>
+                          </p:cTn>
+                        </p:par>
+                        <p:par>
+                          <p:cTn id="7" presetID="10" presetClass="entr" presetSubtype="0" fill="hold" nodeType="withEffect">
+                            <p:stCondLst>
+                              <p:cond delay="200"/>
+                            </p:stCondLst>
+                            <p:childTnLst>
+                              <p:animEffect transition="in" filter="fade">
+                                <p:cBhvr>
+                                  <p:cTn id="8" dur="450"/>
+                                  <p:tgtEl>
+                                    <p:spTgt spid="4"/>
+                                  </p:tgtEl>
+                                </p:cBhvr>
+                              </p:animEffect>
+                            </p:childTnLst>
+                          </p:cTn>
+                        </p:par>
+                      </p:childTnLst>
+                    </p:cTn>
+                  </p:par>
+                </p:childTnLst>
+              </p:cTn>
+              <p:prevCondLst>
+                <p:cond evt="onPrev" delay="0">
+                  <p:tgtEl>
+                    <p:sldTgt/>
+                  </p:tgtEl>
+                </p:cond>
+              </p:prevCondLst>
+              <p:nextCondLst>
+                <p:cond evt="onNext" delay="0">
+                  <p:tgtEl>
+                    <p:sldTgt/>
+                  </p:tgtEl>
+                </p:cond>
+              </p:nextCondLst>
+            </p:seq>
+          </p:childTnLst>
+        </p:cTn>
+      </p:par>
+    </p:tnLst>
+  </p:timing>
 </p:sld>
 </file>
 
@@ -5748,6 +6198,96 @@
   <p:clrMapOvr>
     <a:masterClrMapping/>
   </p:clrMapOvr>
+  <p:timing>
+    <p:tnLst>
+      <p:par>
+        <p:cTn id="1" dur="indefinite" restart="never" nodeType="tmRoot">
+          <p:childTnLst>
+            <p:seq concurrent="true" nextAc="seek">
+              <p:cTn id="2" dur="indefinite" nodeType="mainSeq">
+                <p:childTnLst>
+                  <p:par>
+                    <p:cTn id="9" fill="hold">
+                      <p:stCondLst>
+                        <p:cond delay="0"/>
+                      </p:stCondLst>
+                      <p:childTnLst>
+                        <p:par>
+                          <p:cTn id="3" presetID="10" presetClass="entr" presetSubtype="0" fill="hold" nodeType="withEffect">
+                            <p:stCondLst>
+                              <p:cond delay="0"/>
+                            </p:stCondLst>
+                            <p:childTnLst>
+                              <p:animEffect transition="in" filter="fade">
+                                <p:cBhvr>
+                                  <p:cTn id="4" dur="450"/>
+                                  <p:tgtEl>
+                                    <p:spTgt spid="2"/>
+                                  </p:tgtEl>
+                                </p:cBhvr>
+                              </p:animEffect>
+                            </p:childTnLst>
+                          </p:cTn>
+                        </p:par>
+                        <p:par>
+                          <p:cTn id="5" presetID="10" presetClass="entr" presetSubtype="0" fill="hold" nodeType="withEffect">
+                            <p:stCondLst>
+                              <p:cond delay="200"/>
+                            </p:stCondLst>
+                            <p:childTnLst>
+                              <p:animEffect transition="in" filter="fade">
+                                <p:cBhvr>
+                                  <p:cTn id="6" dur="450"/>
+                                  <p:tgtEl>
+                                    <p:spTgt spid="3"/>
+                                  </p:tgtEl>
+                                </p:cBhvr>
+                              </p:animEffect>
+                            </p:childTnLst>
+                          </p:cTn>
+                        </p:par>
+                        <p:par>
+                          <p:cTn id="7" presetID="10" presetClass="entr" presetSubtype="0" fill="hold" nodeType="withEffect">
+                            <p:stCondLst>
+                              <p:cond delay="200"/>
+                            </p:stCondLst>
+                            <p:childTnLst>
+                              <p:animEffect transition="in" filter="fade">
+                                <p:cBhvr>
+                                  <p:cTn id="8" dur="450"/>
+                                  <p:tgtEl>
+                                    <p:spTgt spid="4"/>
+                                  </p:tgtEl>
+                                </p:cBhvr>
+                              </p:animEffect>
+                            </p:childTnLst>
+                          </p:cTn>
+                        </p:par>
+                      </p:childTnLst>
+                    </p:cTn>
+                  </p:par>
+                </p:childTnLst>
+              </p:cTn>
+              <p:prevCondLst>
+                <p:cond evt="onPrev" delay="0">
+                  <p:tgtEl>
+                    <p:sldTgt/>
+                  </p:tgtEl>
+                </p:cond>
+              </p:prevCondLst>
+              <p:nextCondLst>
+                <p:cond evt="onNext" delay="0">
+                  <p:tgtEl>
+                    <p:sldTgt/>
+                  </p:tgtEl>
+                </p:cond>
+              </p:nextCondLst>
+            </p:seq>
+          </p:childTnLst>
+        </p:cTn>
+      </p:par>
+    </p:tnLst>
+  </p:timing>
 </p:sld>
 </file>
 
@@ -6169,6 +6709,96 @@
   <p:clrMapOvr>
     <a:masterClrMapping/>
   </p:clrMapOvr>
+  <p:timing>
+    <p:tnLst>
+      <p:par>
+        <p:cTn id="1" dur="indefinite" restart="never" nodeType="tmRoot">
+          <p:childTnLst>
+            <p:seq concurrent="true" nextAc="seek">
+              <p:cTn id="2" dur="indefinite" nodeType="mainSeq">
+                <p:childTnLst>
+                  <p:par>
+                    <p:cTn id="9" fill="hold">
+                      <p:stCondLst>
+                        <p:cond delay="0"/>
+                      </p:stCondLst>
+                      <p:childTnLst>
+                        <p:par>
+                          <p:cTn id="3" presetID="10" presetClass="entr" presetSubtype="0" fill="hold" nodeType="withEffect">
+                            <p:stCondLst>
+                              <p:cond delay="0"/>
+                            </p:stCondLst>
+                            <p:childTnLst>
+                              <p:animEffect transition="in" filter="fade">
+                                <p:cBhvr>
+                                  <p:cTn id="4" dur="450"/>
+                                  <p:tgtEl>
+                                    <p:spTgt spid="2"/>
+                                  </p:tgtEl>
+                                </p:cBhvr>
+                              </p:animEffect>
+                            </p:childTnLst>
+                          </p:cTn>
+                        </p:par>
+                        <p:par>
+                          <p:cTn id="5" presetID="10" presetClass="entr" presetSubtype="0" fill="hold" nodeType="withEffect">
+                            <p:stCondLst>
+                              <p:cond delay="200"/>
+                            </p:stCondLst>
+                            <p:childTnLst>
+                              <p:animEffect transition="in" filter="fade">
+                                <p:cBhvr>
+                                  <p:cTn id="6" dur="450"/>
+                                  <p:tgtEl>
+                                    <p:spTgt spid="3"/>
+                                  </p:tgtEl>
+                                </p:cBhvr>
+                              </p:animEffect>
+                            </p:childTnLst>
+                          </p:cTn>
+                        </p:par>
+                        <p:par>
+                          <p:cTn id="7" presetID="10" presetClass="entr" presetSubtype="0" fill="hold" nodeType="withEffect">
+                            <p:stCondLst>
+                              <p:cond delay="200"/>
+                            </p:stCondLst>
+                            <p:childTnLst>
+                              <p:animEffect transition="in" filter="fade">
+                                <p:cBhvr>
+                                  <p:cTn id="8" dur="450"/>
+                                  <p:tgtEl>
+                                    <p:spTgt spid="4"/>
+                                  </p:tgtEl>
+                                </p:cBhvr>
+                              </p:animEffect>
+                            </p:childTnLst>
+                          </p:cTn>
+                        </p:par>
+                      </p:childTnLst>
+                    </p:cTn>
+                  </p:par>
+                </p:childTnLst>
+              </p:cTn>
+              <p:prevCondLst>
+                <p:cond evt="onPrev" delay="0">
+                  <p:tgtEl>
+                    <p:sldTgt/>
+                  </p:tgtEl>
+                </p:cond>
+              </p:prevCondLst>
+              <p:nextCondLst>
+                <p:cond evt="onNext" delay="0">
+                  <p:tgtEl>
+                    <p:sldTgt/>
+                  </p:tgtEl>
+                </p:cond>
+              </p:nextCondLst>
+            </p:seq>
+          </p:childTnLst>
+        </p:cTn>
+      </p:par>
+    </p:tnLst>
+  </p:timing>
 </p:sld>
 </file>
 
@@ -7171,6 +7801,96 @@
   <p:clrMapOvr>
     <a:masterClrMapping/>
   </p:clrMapOvr>
+  <p:timing>
+    <p:tnLst>
+      <p:par>
+        <p:cTn id="1" dur="indefinite" restart="never" nodeType="tmRoot">
+          <p:childTnLst>
+            <p:seq concurrent="true" nextAc="seek">
+              <p:cTn id="2" dur="indefinite" nodeType="mainSeq">
+                <p:childTnLst>
+                  <p:par>
+                    <p:cTn id="9" fill="hold">
+                      <p:stCondLst>
+                        <p:cond delay="0"/>
+                      </p:stCondLst>
+                      <p:childTnLst>
+                        <p:par>
+                          <p:cTn id="3" presetID="10" presetClass="entr" presetSubtype="0" fill="hold" nodeType="withEffect">
+                            <p:stCondLst>
+                              <p:cond delay="0"/>
+                            </p:stCondLst>
+                            <p:childTnLst>
+                              <p:animEffect transition="in" filter="fade">
+                                <p:cBhvr>
+                                  <p:cTn id="4" dur="450"/>
+                                  <p:tgtEl>
+                                    <p:spTgt spid="2"/>
+                                  </p:tgtEl>
+                                </p:cBhvr>
+                              </p:animEffect>
+                            </p:childTnLst>
+                          </p:cTn>
+                        </p:par>
+                        <p:par>
+                          <p:cTn id="5" presetID="10" presetClass="entr" presetSubtype="0" fill="hold" nodeType="withEffect">
+                            <p:stCondLst>
+                              <p:cond delay="200"/>
+                            </p:stCondLst>
+                            <p:childTnLst>
+                              <p:animEffect transition="in" filter="fade">
+                                <p:cBhvr>
+                                  <p:cTn id="6" dur="450"/>
+                                  <p:tgtEl>
+                                    <p:spTgt spid="3"/>
+                                  </p:tgtEl>
+                                </p:cBhvr>
+                              </p:animEffect>
+                            </p:childTnLst>
+                          </p:cTn>
+                        </p:par>
+                        <p:par>
+                          <p:cTn id="7" presetID="10" presetClass="entr" presetSubtype="0" fill="hold" nodeType="withEffect">
+                            <p:stCondLst>
+                              <p:cond delay="200"/>
+                            </p:stCondLst>
+                            <p:childTnLst>
+                              <p:animEffect transition="in" filter="fade">
+                                <p:cBhvr>
+                                  <p:cTn id="8" dur="450"/>
+                                  <p:tgtEl>
+                                    <p:spTgt spid="4"/>
+                                  </p:tgtEl>
+                                </p:cBhvr>
+                              </p:animEffect>
+                            </p:childTnLst>
+                          </p:cTn>
+                        </p:par>
+                      </p:childTnLst>
+                    </p:cTn>
+                  </p:par>
+                </p:childTnLst>
+              </p:cTn>
+              <p:prevCondLst>
+                <p:cond evt="onPrev" delay="0">
+                  <p:tgtEl>
+                    <p:sldTgt/>
+                  </p:tgtEl>
+                </p:cond>
+              </p:prevCondLst>
+              <p:nextCondLst>
+                <p:cond evt="onNext" delay="0">
+                  <p:tgtEl>
+                    <p:sldTgt/>
+                  </p:tgtEl>
+                </p:cond>
+              </p:nextCondLst>
+            </p:seq>
+          </p:childTnLst>
+        </p:cTn>
+      </p:par>
+    </p:tnLst>
+  </p:timing>
 </p:sld>
 </file>
 
@@ -8398,6 +9118,96 @@
   <p:clrMapOvr>
     <a:masterClrMapping/>
   </p:clrMapOvr>
+  <p:timing>
+    <p:tnLst>
+      <p:par>
+        <p:cTn id="1" dur="indefinite" restart="never" nodeType="tmRoot">
+          <p:childTnLst>
+            <p:seq concurrent="true" nextAc="seek">
+              <p:cTn id="2" dur="indefinite" nodeType="mainSeq">
+                <p:childTnLst>
+                  <p:par>
+                    <p:cTn id="9" fill="hold">
+                      <p:stCondLst>
+                        <p:cond delay="0"/>
+                      </p:stCondLst>
+                      <p:childTnLst>
+                        <p:par>
+                          <p:cTn id="3" presetID="10" presetClass="entr" presetSubtype="0" fill="hold" nodeType="withEffect">
+                            <p:stCondLst>
+                              <p:cond delay="0"/>
+                            </p:stCondLst>
+                            <p:childTnLst>
+                              <p:animEffect transition="in" filter="fade">
+                                <p:cBhvr>
+                                  <p:cTn id="4" dur="450"/>
+                                  <p:tgtEl>
+                                    <p:spTgt spid="2"/>
+                                  </p:tgtEl>
+                                </p:cBhvr>
+                              </p:animEffect>
+                            </p:childTnLst>
+                          </p:cTn>
+                        </p:par>
+                        <p:par>
+                          <p:cTn id="5" presetID="10" presetClass="entr" presetSubtype="0" fill="hold" nodeType="withEffect">
+                            <p:stCondLst>
+                              <p:cond delay="200"/>
+                            </p:stCondLst>
+                            <p:childTnLst>
+                              <p:animEffect transition="in" filter="fade">
+                                <p:cBhvr>
+                                  <p:cTn id="6" dur="450"/>
+                                  <p:tgtEl>
+                                    <p:spTgt spid="3"/>
+                                  </p:tgtEl>
+                                </p:cBhvr>
+                              </p:animEffect>
+                            </p:childTnLst>
+                          </p:cTn>
+                        </p:par>
+                        <p:par>
+                          <p:cTn id="7" presetID="10" presetClass="entr" presetSubtype="0" fill="hold" nodeType="withEffect">
+                            <p:stCondLst>
+                              <p:cond delay="200"/>
+                            </p:stCondLst>
+                            <p:childTnLst>
+                              <p:animEffect transition="in" filter="fade">
+                                <p:cBhvr>
+                                  <p:cTn id="8" dur="450"/>
+                                  <p:tgtEl>
+                                    <p:spTgt spid="4"/>
+                                  </p:tgtEl>
+                                </p:cBhvr>
+                              </p:animEffect>
+                            </p:childTnLst>
+                          </p:cTn>
+                        </p:par>
+                      </p:childTnLst>
+                    </p:cTn>
+                  </p:par>
+                </p:childTnLst>
+              </p:cTn>
+              <p:prevCondLst>
+                <p:cond evt="onPrev" delay="0">
+                  <p:tgtEl>
+                    <p:sldTgt/>
+                  </p:tgtEl>
+                </p:cond>
+              </p:prevCondLst>
+              <p:nextCondLst>
+                <p:cond evt="onNext" delay="0">
+                  <p:tgtEl>
+                    <p:sldTgt/>
+                  </p:tgtEl>
+                </p:cond>
+              </p:nextCondLst>
+            </p:seq>
+          </p:childTnLst>
+        </p:cTn>
+      </p:par>
+    </p:tnLst>
+  </p:timing>
 </p:sld>
 </file>
 
@@ -8995,6 +9805,96 @@
   <p:clrMapOvr>
     <a:masterClrMapping/>
   </p:clrMapOvr>
+  <p:timing>
+    <p:tnLst>
+      <p:par>
+        <p:cTn id="1" dur="indefinite" restart="never" nodeType="tmRoot">
+          <p:childTnLst>
+            <p:seq concurrent="true" nextAc="seek">
+              <p:cTn id="2" dur="indefinite" nodeType="mainSeq">
+                <p:childTnLst>
+                  <p:par>
+                    <p:cTn id="9" fill="hold">
+                      <p:stCondLst>
+                        <p:cond delay="0"/>
+                      </p:stCondLst>
+                      <p:childTnLst>
+                        <p:par>
+                          <p:cTn id="3" presetID="10" presetClass="entr" presetSubtype="0" fill="hold" nodeType="withEffect">
+                            <p:stCondLst>
+                              <p:cond delay="0"/>
+                            </p:stCondLst>
+                            <p:childTnLst>
+                              <p:animEffect transition="in" filter="fade">
+                                <p:cBhvr>
+                                  <p:cTn id="4" dur="450"/>
+                                  <p:tgtEl>
+                                    <p:spTgt spid="2"/>
+                                  </p:tgtEl>
+                                </p:cBhvr>
+                              </p:animEffect>
+                            </p:childTnLst>
+                          </p:cTn>
+                        </p:par>
+                        <p:par>
+                          <p:cTn id="5" presetID="10" presetClass="entr" presetSubtype="0" fill="hold" nodeType="withEffect">
+                            <p:stCondLst>
+                              <p:cond delay="200"/>
+                            </p:stCondLst>
+                            <p:childTnLst>
+                              <p:animEffect transition="in" filter="fade">
+                                <p:cBhvr>
+                                  <p:cTn id="6" dur="450"/>
+                                  <p:tgtEl>
+                                    <p:spTgt spid="3"/>
+                                  </p:tgtEl>
+                                </p:cBhvr>
+                              </p:animEffect>
+                            </p:childTnLst>
+                          </p:cTn>
+                        </p:par>
+                        <p:par>
+                          <p:cTn id="7" presetID="10" presetClass="entr" presetSubtype="0" fill="hold" nodeType="withEffect">
+                            <p:stCondLst>
+                              <p:cond delay="200"/>
+                            </p:stCondLst>
+                            <p:childTnLst>
+                              <p:animEffect transition="in" filter="fade">
+                                <p:cBhvr>
+                                  <p:cTn id="8" dur="450"/>
+                                  <p:tgtEl>
+                                    <p:spTgt spid="4"/>
+                                  </p:tgtEl>
+                                </p:cBhvr>
+                              </p:animEffect>
+                            </p:childTnLst>
+                          </p:cTn>
+                        </p:par>
+                      </p:childTnLst>
+                    </p:cTn>
+                  </p:par>
+                </p:childTnLst>
+              </p:cTn>
+              <p:prevCondLst>
+                <p:cond evt="onPrev" delay="0">
+                  <p:tgtEl>
+                    <p:sldTgt/>
+                  </p:tgtEl>
+                </p:cond>
+              </p:prevCondLst>
+              <p:nextCondLst>
+                <p:cond evt="onNext" delay="0">
+                  <p:tgtEl>
+                    <p:sldTgt/>
+                  </p:tgtEl>
+                </p:cond>
+              </p:nextCondLst>
+            </p:seq>
+          </p:childTnLst>
+        </p:cTn>
+      </p:par>
+    </p:tnLst>
+  </p:timing>
 </p:sld>
 </file>
 
